--- a/extras/images/coordinate_images.pptx
+++ b/extras/images/coordinate_images.pptx
@@ -3452,15 +3452,15 @@
                     </a:ext>
                   </a:extLst>
                 </a:blip>
-                <a:srcRect l="29790" t="21826" r="34281" b="21564"/>
+                <a:srcRect l="29790" t="31786" r="34281" b="21958"/>
                 <a:stretch>
                   <a:fillRect/>
                 </a:stretch>
               </p:blipFill>
               <p:spPr bwMode="auto">
                 <a:xfrm>
-                  <a:off x="3515976" y="1229192"/>
-                  <a:ext cx="1844587" cy="1757680"/>
+                  <a:off x="3515976" y="1538408"/>
+                  <a:ext cx="1844587" cy="1436205"/>
                 </a:xfrm>
                 <a:prstGeom prst="rect">
                   <a:avLst/>
@@ -6017,10 +6017,10 @@
         </p:nvGrpSpPr>
         <p:grpSpPr>
           <a:xfrm>
-            <a:off x="6328075" y="896230"/>
-            <a:ext cx="4170680" cy="4973320"/>
-            <a:chOff x="6328075" y="896230"/>
-            <a:chExt cx="4170680" cy="4973320"/>
+            <a:off x="6328074" y="896230"/>
+            <a:ext cx="4476565" cy="4973320"/>
+            <a:chOff x="6328074" y="896230"/>
+            <a:chExt cx="4476565" cy="4973320"/>
           </a:xfrm>
         </p:grpSpPr>
         <p:grpSp>
@@ -6037,10 +6037,10 @@
           </p:nvGrpSpPr>
           <p:grpSpPr>
             <a:xfrm>
-              <a:off x="6328075" y="896230"/>
-              <a:ext cx="4170680" cy="4973320"/>
-              <a:chOff x="6328075" y="896230"/>
-              <a:chExt cx="4170680" cy="4973320"/>
+              <a:off x="6328074" y="896230"/>
+              <a:ext cx="4476565" cy="4973320"/>
+              <a:chOff x="6328074" y="896230"/>
+              <a:chExt cx="4476565" cy="4973320"/>
             </a:xfrm>
           </p:grpSpPr>
           <p:sp>
@@ -6057,8 +6057,8 @@
             </p:nvSpPr>
             <p:spPr>
               <a:xfrm>
-                <a:off x="6328075" y="896230"/>
-                <a:ext cx="4170680" cy="4973320"/>
+                <a:off x="6328074" y="896230"/>
+                <a:ext cx="4476565" cy="4973320"/>
               </a:xfrm>
               <a:prstGeom prst="rect">
                 <a:avLst/>
@@ -6088,7 +6088,7 @@
               <a:lstStyle/>
               <a:p>
                 <a:pPr algn="ctr"/>
-                <a:endParaRPr lang="en-US"/>
+                <a:endParaRPr lang="en-US" dirty="0"/>
               </a:p>
             </p:txBody>
           </p:sp>
@@ -6134,7 +6134,7 @@
                     </a:ext>
                   </a:extLst>
                 </a:blip>
-                <a:srcRect l="14125" t="21826" r="49123" b="21564"/>
+                <a:srcRect l="14125" t="21826" r="49123" b="31208"/>
                 <a:stretch>
                   <a:fillRect/>
                 </a:stretch>
@@ -6142,7 +6142,7 @@
               <p:spPr bwMode="auto">
                 <a:xfrm>
                   <a:off x="7935704" y="1126293"/>
-                  <a:ext cx="1886849" cy="1757680"/>
+                  <a:ext cx="1886849" cy="1458264"/>
                 </a:xfrm>
                 <a:prstGeom prst="rect">
                   <a:avLst/>
@@ -9253,6 +9253,187 @@
           </p:sp>
         </mc:Fallback>
       </mc:AlternateContent>
+      <p:cxnSp>
+        <p:nvCxnSpPr>
+          <p:cNvPr id="176" name="Straight Arrow Connector 175">
+            <a:extLst>
+              <a:ext uri="{FF2B5EF4-FFF2-40B4-BE49-F238E27FC236}">
+                <a16:creationId xmlns:a16="http://schemas.microsoft.com/office/drawing/2014/main" id="{1C2B4816-81A8-2646-0898-B137118A7BDB}"/>
+              </a:ext>
+            </a:extLst>
+          </p:cNvPr>
+          <p:cNvCxnSpPr/>
+          <p:nvPr/>
+        </p:nvCxnSpPr>
+        <p:spPr>
+          <a:xfrm flipV="1">
+            <a:off x="9944282" y="1900981"/>
+            <a:ext cx="0" cy="314844"/>
+          </a:xfrm>
+          <a:prstGeom prst="straightConnector1">
+            <a:avLst/>
+          </a:prstGeom>
+          <a:ln w="38100">
+            <a:solidFill>
+              <a:schemeClr val="accent1"/>
+            </a:solidFill>
+            <a:tailEnd type="triangle"/>
+          </a:ln>
+        </p:spPr>
+        <p:style>
+          <a:lnRef idx="2">
+            <a:schemeClr val="accent1"/>
+          </a:lnRef>
+          <a:fillRef idx="0">
+            <a:schemeClr val="accent1"/>
+          </a:fillRef>
+          <a:effectRef idx="1">
+            <a:schemeClr val="accent1"/>
+          </a:effectRef>
+          <a:fontRef idx="minor">
+            <a:schemeClr val="tx1"/>
+          </a:fontRef>
+        </p:style>
+      </p:cxnSp>
+      <mc:AlternateContent xmlns:mc="http://schemas.openxmlformats.org/markup-compatibility/2006">
+        <mc:Choice xmlns:a14="http://schemas.microsoft.com/office/drawing/2010/main" Requires="a14">
+          <p:sp>
+            <p:nvSpPr>
+              <p:cNvPr id="177" name="TextBox 176">
+                <a:extLst>
+                  <a:ext uri="{FF2B5EF4-FFF2-40B4-BE49-F238E27FC236}">
+                    <a16:creationId xmlns:a16="http://schemas.microsoft.com/office/drawing/2014/main" id="{76D35460-8744-A60C-2631-2E88CA0AB897}"/>
+                  </a:ext>
+                </a:extLst>
+              </p:cNvPr>
+              <p:cNvSpPr txBox="1"/>
+              <p:nvPr/>
+            </p:nvSpPr>
+            <p:spPr>
+              <a:xfrm>
+                <a:off x="9976231" y="1788023"/>
+                <a:ext cx="603749" cy="557204"/>
+              </a:xfrm>
+              <a:prstGeom prst="rect">
+                <a:avLst/>
+              </a:prstGeom>
+              <a:noFill/>
+            </p:spPr>
+            <p:txBody>
+              <a:bodyPr wrap="square" rtlCol="0">
+                <a:spAutoFit/>
+              </a:bodyPr>
+              <a:lstStyle/>
+              <a:p>
+                <a14:m>
+                  <m:oMathPara xmlns:m="http://schemas.openxmlformats.org/officeDocument/2006/math">
+                    <m:oMathParaPr>
+                      <m:jc m:val="centerGroup"/>
+                    </m:oMathParaPr>
+                    <m:oMath xmlns:m="http://schemas.openxmlformats.org/officeDocument/2006/math">
+                      <m:r>
+                        <m:rPr>
+                          <m:sty m:val="p"/>
+                        </m:rPr>
+                        <a:rPr lang="en-US" sz="2800" b="0" i="0" smtClean="0">
+                          <a:solidFill>
+                            <a:schemeClr val="accent1"/>
+                          </a:solidFill>
+                          <a:latin typeface="Cambria Math" panose="02040503050406030204" pitchFamily="18" charset="0"/>
+                        </a:rPr>
+                        <m:t>Δ</m:t>
+                      </m:r>
+                      <m:sSub>
+                        <m:sSubPr>
+                          <m:ctrlPr>
+                            <a:rPr lang="en-US" sz="2800" b="0" i="1" smtClean="0">
+                              <a:solidFill>
+                                <a:schemeClr val="accent1"/>
+                              </a:solidFill>
+                              <a:latin typeface="Cambria Math" panose="02040503050406030204" pitchFamily="18" charset="0"/>
+                            </a:rPr>
+                          </m:ctrlPr>
+                        </m:sSubPr>
+                        <m:e>
+                          <m:r>
+                            <a:rPr lang="en-US" sz="2800" b="0" i="1" smtClean="0">
+                              <a:solidFill>
+                                <a:schemeClr val="accent1"/>
+                              </a:solidFill>
+                              <a:latin typeface="Cambria Math" panose="02040503050406030204" pitchFamily="18" charset="0"/>
+                            </a:rPr>
+                            <m:t>𝑑</m:t>
+                          </m:r>
+                        </m:e>
+                        <m:sub>
+                          <m:r>
+                            <a:rPr lang="en-US" sz="2800" b="0" i="1" smtClean="0">
+                              <a:solidFill>
+                                <a:schemeClr val="accent1"/>
+                              </a:solidFill>
+                              <a:latin typeface="Cambria Math" panose="02040503050406030204" pitchFamily="18" charset="0"/>
+                            </a:rPr>
+                            <m:t>𝑦</m:t>
+                          </m:r>
+                        </m:sub>
+                      </m:sSub>
+                    </m:oMath>
+                  </m:oMathPara>
+                </a14:m>
+                <a:endParaRPr lang="en-US" sz="2800" dirty="0">
+                  <a:solidFill>
+                    <a:schemeClr val="accent1"/>
+                  </a:solidFill>
+                </a:endParaRPr>
+              </a:p>
+            </p:txBody>
+          </p:sp>
+        </mc:Choice>
+        <mc:Fallback>
+          <p:sp>
+            <p:nvSpPr>
+              <p:cNvPr id="177" name="TextBox 176">
+                <a:extLst>
+                  <a:ext uri="{FF2B5EF4-FFF2-40B4-BE49-F238E27FC236}">
+                    <a16:creationId xmlns:a16="http://schemas.microsoft.com/office/drawing/2014/main" id="{76D35460-8744-A60C-2631-2E88CA0AB897}"/>
+                  </a:ext>
+                </a:extLst>
+              </p:cNvPr>
+              <p:cNvSpPr txBox="1">
+                <a:spLocks noRot="1" noChangeAspect="1" noMove="1" noResize="1" noEditPoints="1" noAdjustHandles="1" noChangeArrowheads="1" noChangeShapeType="1" noTextEdit="1"/>
+              </p:cNvSpPr>
+              <p:nvPr/>
+            </p:nvSpPr>
+            <p:spPr>
+              <a:xfrm>
+                <a:off x="9976231" y="1788023"/>
+                <a:ext cx="603749" cy="557204"/>
+              </a:xfrm>
+              <a:prstGeom prst="rect">
+                <a:avLst/>
+              </a:prstGeom>
+              <a:blipFill>
+                <a:blip r:embed="rId27"/>
+                <a:stretch>
+                  <a:fillRect r="-11111"/>
+                </a:stretch>
+              </a:blipFill>
+            </p:spPr>
+            <p:txBody>
+              <a:bodyPr/>
+              <a:lstStyle/>
+              <a:p>
+                <a:r>
+                  <a:rPr lang="en-US">
+                    <a:noFill/>
+                  </a:rPr>
+                  <a:t> </a:t>
+                </a:r>
+              </a:p>
+            </p:txBody>
+          </p:sp>
+        </mc:Fallback>
+      </mc:AlternateContent>
     </p:spTree>
     <p:extLst>
       <p:ext uri="{BB962C8B-B14F-4D97-AF65-F5344CB8AC3E}">

--- a/extras/images/coordinate_images.pptx
+++ b/extras/images/coordinate_images.pptx
@@ -6003,2693 +6003,6 @@
           </p:txBody>
         </p:sp>
       </p:grpSp>
-      <p:grpSp>
-        <p:nvGrpSpPr>
-          <p:cNvPr id="165" name="Group 164">
-            <a:extLst>
-              <a:ext uri="{FF2B5EF4-FFF2-40B4-BE49-F238E27FC236}">
-                <a16:creationId xmlns:a16="http://schemas.microsoft.com/office/drawing/2014/main" id="{FB47E748-DD75-567B-3F5D-8F3C1D55FF39}"/>
-              </a:ext>
-            </a:extLst>
-          </p:cNvPr>
-          <p:cNvGrpSpPr/>
-          <p:nvPr/>
-        </p:nvGrpSpPr>
-        <p:grpSpPr>
-          <a:xfrm>
-            <a:off x="6328074" y="896230"/>
-            <a:ext cx="4476565" cy="4973320"/>
-            <a:chOff x="6328074" y="896230"/>
-            <a:chExt cx="4476565" cy="4973320"/>
-          </a:xfrm>
-        </p:grpSpPr>
-        <p:grpSp>
-          <p:nvGrpSpPr>
-            <p:cNvPr id="119" name="Group 118">
-              <a:extLst>
-                <a:ext uri="{FF2B5EF4-FFF2-40B4-BE49-F238E27FC236}">
-                  <a16:creationId xmlns:a16="http://schemas.microsoft.com/office/drawing/2014/main" id="{9C6B6D6C-7B6B-DACC-AA77-58E3CBB35040}"/>
-                </a:ext>
-              </a:extLst>
-            </p:cNvPr>
-            <p:cNvGrpSpPr/>
-            <p:nvPr/>
-          </p:nvGrpSpPr>
-          <p:grpSpPr>
-            <a:xfrm>
-              <a:off x="6328074" y="896230"/>
-              <a:ext cx="4476565" cy="4973320"/>
-              <a:chOff x="6328074" y="896230"/>
-              <a:chExt cx="4476565" cy="4973320"/>
-            </a:xfrm>
-          </p:grpSpPr>
-          <p:sp>
-            <p:nvSpPr>
-              <p:cNvPr id="118" name="Rectangle 117">
-                <a:extLst>
-                  <a:ext uri="{FF2B5EF4-FFF2-40B4-BE49-F238E27FC236}">
-                    <a16:creationId xmlns:a16="http://schemas.microsoft.com/office/drawing/2014/main" id="{028312D0-345A-FB8B-F2D8-51248F4D42CE}"/>
-                  </a:ext>
-                </a:extLst>
-              </p:cNvPr>
-              <p:cNvSpPr/>
-              <p:nvPr/>
-            </p:nvSpPr>
-            <p:spPr>
-              <a:xfrm>
-                <a:off x="6328074" y="896230"/>
-                <a:ext cx="4476565" cy="4973320"/>
-              </a:xfrm>
-              <a:prstGeom prst="rect">
-                <a:avLst/>
-              </a:prstGeom>
-              <a:solidFill>
-                <a:schemeClr val="bg1"/>
-              </a:solidFill>
-            </p:spPr>
-            <p:style>
-              <a:lnRef idx="2">
-                <a:schemeClr val="accent1">
-                  <a:shade val="15000"/>
-                </a:schemeClr>
-              </a:lnRef>
-              <a:fillRef idx="1">
-                <a:schemeClr val="accent1"/>
-              </a:fillRef>
-              <a:effectRef idx="0">
-                <a:schemeClr val="accent1"/>
-              </a:effectRef>
-              <a:fontRef idx="minor">
-                <a:schemeClr val="lt1"/>
-              </a:fontRef>
-            </p:style>
-            <p:txBody>
-              <a:bodyPr rtlCol="0" anchor="ctr"/>
-              <a:lstStyle/>
-              <a:p>
-                <a:pPr algn="ctr"/>
-                <a:endParaRPr lang="en-US" dirty="0"/>
-              </a:p>
-            </p:txBody>
-          </p:sp>
-          <p:grpSp>
-            <p:nvGrpSpPr>
-              <p:cNvPr id="116" name="Group 115">
-                <a:extLst>
-                  <a:ext uri="{FF2B5EF4-FFF2-40B4-BE49-F238E27FC236}">
-                    <a16:creationId xmlns:a16="http://schemas.microsoft.com/office/drawing/2014/main" id="{0551DB48-29E0-D677-0C07-A3CF5A2A2998}"/>
-                  </a:ext>
-                </a:extLst>
-              </p:cNvPr>
-              <p:cNvGrpSpPr/>
-              <p:nvPr/>
-            </p:nvGrpSpPr>
-            <p:grpSpPr>
-              <a:xfrm>
-                <a:off x="6979911" y="973536"/>
-                <a:ext cx="3348036" cy="4365544"/>
-                <a:chOff x="6979911" y="973536"/>
-                <a:chExt cx="3348036" cy="4365544"/>
-              </a:xfrm>
-            </p:grpSpPr>
-            <p:pic>
-              <p:nvPicPr>
-                <p:cNvPr id="73" name="Picture 10">
-                  <a:extLst>
-                    <a:ext uri="{FF2B5EF4-FFF2-40B4-BE49-F238E27FC236}">
-                      <a16:creationId xmlns:a16="http://schemas.microsoft.com/office/drawing/2014/main" id="{5BC98E7B-033C-2BE4-B811-D5A794543182}"/>
-                    </a:ext>
-                  </a:extLst>
-                </p:cNvPr>
-                <p:cNvPicPr>
-                  <a:picLocks noChangeAspect="1" noChangeArrowheads="1"/>
-                </p:cNvPicPr>
-                <p:nvPr/>
-              </p:nvPicPr>
-              <p:blipFill rotWithShape="1">
-                <a:blip r:embed="rId2" cstate="hqprint">
-                  <a:extLst>
-                    <a:ext uri="{28A0092B-C50C-407E-A947-70E740481C1C}">
-                      <a14:useLocalDpi xmlns:a14="http://schemas.microsoft.com/office/drawing/2010/main"/>
-                    </a:ext>
-                  </a:extLst>
-                </a:blip>
-                <a:srcRect l="14125" t="21826" r="49123" b="31208"/>
-                <a:stretch>
-                  <a:fillRect/>
-                </a:stretch>
-              </p:blipFill>
-              <p:spPr bwMode="auto">
-                <a:xfrm>
-                  <a:off x="7935704" y="1126293"/>
-                  <a:ext cx="1886849" cy="1458264"/>
-                </a:xfrm>
-                <a:prstGeom prst="rect">
-                  <a:avLst/>
-                </a:prstGeom>
-                <a:noFill/>
-                <a:extLst>
-                  <a:ext uri="{909E8E84-426E-40DD-AFC4-6F175D3DCCD1}">
-                    <a14:hiddenFill xmlns:a14="http://schemas.microsoft.com/office/drawing/2010/main">
-                      <a:solidFill>
-                        <a:srgbClr val="FFFFFF"/>
-                      </a:solidFill>
-                    </a14:hiddenFill>
-                  </a:ext>
-                </a:extLst>
-              </p:spPr>
-            </p:pic>
-            <p:cxnSp>
-              <p:nvCxnSpPr>
-                <p:cNvPr id="74" name="Straight Arrow Connector 73">
-                  <a:extLst>
-                    <a:ext uri="{FF2B5EF4-FFF2-40B4-BE49-F238E27FC236}">
-                      <a16:creationId xmlns:a16="http://schemas.microsoft.com/office/drawing/2014/main" id="{9EF40B54-E5AB-73D8-7250-465BDD2A165E}"/>
-                    </a:ext>
-                  </a:extLst>
-                </p:cNvPr>
-                <p:cNvCxnSpPr>
-                  <a:cxnSpLocks/>
-                </p:cNvCxnSpPr>
-                <p:nvPr/>
-              </p:nvCxnSpPr>
-              <p:spPr>
-                <a:xfrm flipV="1">
-                  <a:off x="8354062" y="1974208"/>
-                  <a:ext cx="1326300" cy="1808805"/>
-                </a:xfrm>
-                <a:prstGeom prst="straightConnector1">
-                  <a:avLst/>
-                </a:prstGeom>
-                <a:ln w="38100">
-                  <a:solidFill>
-                    <a:srgbClr val="FFC000"/>
-                  </a:solidFill>
-                  <a:tailEnd type="triangle"/>
-                </a:ln>
-              </p:spPr>
-              <p:style>
-                <a:lnRef idx="2">
-                  <a:schemeClr val="accent1"/>
-                </a:lnRef>
-                <a:fillRef idx="0">
-                  <a:schemeClr val="accent1"/>
-                </a:fillRef>
-                <a:effectRef idx="1">
-                  <a:schemeClr val="accent1"/>
-                </a:effectRef>
-                <a:fontRef idx="minor">
-                  <a:schemeClr val="tx1"/>
-                </a:fontRef>
-              </p:style>
-            </p:cxnSp>
-            <p:cxnSp>
-              <p:nvCxnSpPr>
-                <p:cNvPr id="75" name="Straight Arrow Connector 74">
-                  <a:extLst>
-                    <a:ext uri="{FF2B5EF4-FFF2-40B4-BE49-F238E27FC236}">
-                      <a16:creationId xmlns:a16="http://schemas.microsoft.com/office/drawing/2014/main" id="{EAA7A676-AD4D-088F-B410-D190A90A6C67}"/>
-                    </a:ext>
-                  </a:extLst>
-                </p:cNvPr>
-                <p:cNvCxnSpPr>
-                  <a:cxnSpLocks/>
-                </p:cNvCxnSpPr>
-                <p:nvPr/>
-              </p:nvCxnSpPr>
-              <p:spPr>
-                <a:xfrm flipV="1">
-                  <a:off x="8338822" y="1951569"/>
-                  <a:ext cx="611905" cy="1850171"/>
-                </a:xfrm>
-                <a:prstGeom prst="straightConnector1">
-                  <a:avLst/>
-                </a:prstGeom>
-                <a:ln w="38100">
-                  <a:solidFill>
-                    <a:schemeClr val="accent1">
-                      <a:lumMod val="20000"/>
-                      <a:lumOff val="80000"/>
-                    </a:schemeClr>
-                  </a:solidFill>
-                  <a:prstDash val="sysDash"/>
-                  <a:tailEnd type="triangle"/>
-                </a:ln>
-              </p:spPr>
-              <p:style>
-                <a:lnRef idx="2">
-                  <a:schemeClr val="accent1"/>
-                </a:lnRef>
-                <a:fillRef idx="0">
-                  <a:schemeClr val="accent1"/>
-                </a:fillRef>
-                <a:effectRef idx="1">
-                  <a:schemeClr val="accent1"/>
-                </a:effectRef>
-                <a:fontRef idx="minor">
-                  <a:schemeClr val="tx1"/>
-                </a:fontRef>
-              </p:style>
-            </p:cxnSp>
-            <p:sp>
-              <p:nvSpPr>
-                <p:cNvPr id="76" name="Rectangle 75">
-                  <a:extLst>
-                    <a:ext uri="{FF2B5EF4-FFF2-40B4-BE49-F238E27FC236}">
-                      <a16:creationId xmlns:a16="http://schemas.microsoft.com/office/drawing/2014/main" id="{CD33A66E-A3E5-D5CA-6343-B618303D33A6}"/>
-                    </a:ext>
-                  </a:extLst>
-                </p:cNvPr>
-                <p:cNvSpPr/>
-                <p:nvPr/>
-              </p:nvSpPr>
-              <p:spPr>
-                <a:xfrm>
-                  <a:off x="7524460" y="2716641"/>
-                  <a:ext cx="1828800" cy="1828800"/>
-                </a:xfrm>
-                <a:prstGeom prst="rect">
-                  <a:avLst/>
-                </a:prstGeom>
-                <a:solidFill>
-                  <a:schemeClr val="bg2">
-                    <a:lumMod val="90000"/>
-                  </a:schemeClr>
-                </a:solidFill>
-                <a:scene3d>
-                  <a:camera prst="isometricOffAxis2Left"/>
-                  <a:lightRig rig="threePt" dir="t"/>
-                </a:scene3d>
-                <a:sp3d extrusionH="127000"/>
-              </p:spPr>
-              <p:style>
-                <a:lnRef idx="2">
-                  <a:schemeClr val="accent1">
-                    <a:shade val="15000"/>
-                  </a:schemeClr>
-                </a:lnRef>
-                <a:fillRef idx="1">
-                  <a:schemeClr val="accent1"/>
-                </a:fillRef>
-                <a:effectRef idx="0">
-                  <a:schemeClr val="accent1"/>
-                </a:effectRef>
-                <a:fontRef idx="minor">
-                  <a:schemeClr val="lt1"/>
-                </a:fontRef>
-              </p:style>
-              <p:txBody>
-                <a:bodyPr rtlCol="0" anchor="ctr"/>
-                <a:lstStyle/>
-                <a:p>
-                  <a:pPr algn="ctr"/>
-                  <a:endParaRPr lang="en-US"/>
-                </a:p>
-              </p:txBody>
-            </p:sp>
-            <p:sp>
-              <p:nvSpPr>
-                <p:cNvPr id="77" name="Rectangle 76">
-                  <a:extLst>
-                    <a:ext uri="{FF2B5EF4-FFF2-40B4-BE49-F238E27FC236}">
-                      <a16:creationId xmlns:a16="http://schemas.microsoft.com/office/drawing/2014/main" id="{99A0937C-F92B-63E4-912B-4C29B04A498B}"/>
-                    </a:ext>
-                  </a:extLst>
-                </p:cNvPr>
-                <p:cNvSpPr/>
-                <p:nvPr/>
-              </p:nvSpPr>
-              <p:spPr>
-                <a:xfrm>
-                  <a:off x="7514255" y="2640441"/>
-                  <a:ext cx="182880" cy="1828800"/>
-                </a:xfrm>
-                <a:prstGeom prst="rect">
-                  <a:avLst/>
-                </a:prstGeom>
-                <a:solidFill>
-                  <a:schemeClr val="tx2">
-                    <a:lumMod val="25000"/>
-                    <a:lumOff val="75000"/>
-                  </a:schemeClr>
-                </a:solidFill>
-                <a:ln>
-                  <a:noFill/>
-                </a:ln>
-                <a:scene3d>
-                  <a:camera prst="isometricOffAxis2Left"/>
-                  <a:lightRig rig="soft" dir="t"/>
-                </a:scene3d>
-                <a:sp3d extrusionH="127000" contourW="12700">
-                  <a:contourClr>
-                    <a:schemeClr val="bg2"/>
-                  </a:contourClr>
-                </a:sp3d>
-              </p:spPr>
-              <p:style>
-                <a:lnRef idx="2">
-                  <a:schemeClr val="accent1">
-                    <a:shade val="15000"/>
-                  </a:schemeClr>
-                </a:lnRef>
-                <a:fillRef idx="1">
-                  <a:schemeClr val="accent1"/>
-                </a:fillRef>
-                <a:effectRef idx="0">
-                  <a:schemeClr val="accent1"/>
-                </a:effectRef>
-                <a:fontRef idx="minor">
-                  <a:schemeClr val="lt1"/>
-                </a:fontRef>
-              </p:style>
-              <p:txBody>
-                <a:bodyPr rtlCol="0" anchor="ctr"/>
-                <a:lstStyle/>
-                <a:p>
-                  <a:pPr algn="ctr"/>
-                  <a:endParaRPr lang="en-US"/>
-                </a:p>
-              </p:txBody>
-            </p:sp>
-            <p:sp>
-              <p:nvSpPr>
-                <p:cNvPr id="78" name="Rectangle 77">
-                  <a:extLst>
-                    <a:ext uri="{FF2B5EF4-FFF2-40B4-BE49-F238E27FC236}">
-                      <a16:creationId xmlns:a16="http://schemas.microsoft.com/office/drawing/2014/main" id="{32B682AE-B9D3-8767-2BC7-51ACD4A876B0}"/>
-                    </a:ext>
-                  </a:extLst>
-                </p:cNvPr>
-                <p:cNvSpPr/>
-                <p:nvPr/>
-              </p:nvSpPr>
-              <p:spPr>
-                <a:xfrm>
-                  <a:off x="9012855" y="2878566"/>
-                  <a:ext cx="182880" cy="1828800"/>
-                </a:xfrm>
-                <a:prstGeom prst="rect">
-                  <a:avLst/>
-                </a:prstGeom>
-                <a:solidFill>
-                  <a:schemeClr val="tx2">
-                    <a:lumMod val="25000"/>
-                    <a:lumOff val="75000"/>
-                  </a:schemeClr>
-                </a:solidFill>
-                <a:ln>
-                  <a:noFill/>
-                </a:ln>
-                <a:scene3d>
-                  <a:camera prst="isometricOffAxis2Left"/>
-                  <a:lightRig rig="soft" dir="t"/>
-                </a:scene3d>
-                <a:sp3d extrusionH="127000" contourW="12700">
-                  <a:contourClr>
-                    <a:schemeClr val="bg2"/>
-                  </a:contourClr>
-                </a:sp3d>
-              </p:spPr>
-              <p:style>
-                <a:lnRef idx="2">
-                  <a:schemeClr val="accent1">
-                    <a:shade val="15000"/>
-                  </a:schemeClr>
-                </a:lnRef>
-                <a:fillRef idx="1">
-                  <a:schemeClr val="accent1"/>
-                </a:fillRef>
-                <a:effectRef idx="0">
-                  <a:schemeClr val="accent1"/>
-                </a:effectRef>
-                <a:fontRef idx="minor">
-                  <a:schemeClr val="lt1"/>
-                </a:fontRef>
-              </p:style>
-              <p:txBody>
-                <a:bodyPr rtlCol="0" anchor="ctr"/>
-                <a:lstStyle/>
-                <a:p>
-                  <a:pPr algn="ctr"/>
-                  <a:endParaRPr lang="en-US"/>
-                </a:p>
-              </p:txBody>
-            </p:sp>
-            <p:sp>
-              <p:nvSpPr>
-                <p:cNvPr id="79" name="Rectangle 78">
-                  <a:extLst>
-                    <a:ext uri="{FF2B5EF4-FFF2-40B4-BE49-F238E27FC236}">
-                      <a16:creationId xmlns:a16="http://schemas.microsoft.com/office/drawing/2014/main" id="{FB866357-5ADD-F0C2-FDD9-CF7033A57DB4}"/>
-                    </a:ext>
-                  </a:extLst>
-                </p:cNvPr>
-                <p:cNvSpPr/>
-                <p:nvPr/>
-              </p:nvSpPr>
-              <p:spPr>
-                <a:xfrm>
-                  <a:off x="7813975" y="2688066"/>
-                  <a:ext cx="182880" cy="1828800"/>
-                </a:xfrm>
-                <a:prstGeom prst="rect">
-                  <a:avLst/>
-                </a:prstGeom>
-                <a:solidFill>
-                  <a:schemeClr val="tx2">
-                    <a:lumMod val="25000"/>
-                    <a:lumOff val="75000"/>
-                  </a:schemeClr>
-                </a:solidFill>
-                <a:ln>
-                  <a:noFill/>
-                </a:ln>
-                <a:scene3d>
-                  <a:camera prst="isometricOffAxis2Left"/>
-                  <a:lightRig rig="soft" dir="t"/>
-                </a:scene3d>
-                <a:sp3d extrusionH="127000" contourW="12700">
-                  <a:contourClr>
-                    <a:schemeClr val="bg2"/>
-                  </a:contourClr>
-                </a:sp3d>
-              </p:spPr>
-              <p:style>
-                <a:lnRef idx="2">
-                  <a:schemeClr val="accent1">
-                    <a:shade val="15000"/>
-                  </a:schemeClr>
-                </a:lnRef>
-                <a:fillRef idx="1">
-                  <a:schemeClr val="accent1"/>
-                </a:fillRef>
-                <a:effectRef idx="0">
-                  <a:schemeClr val="accent1"/>
-                </a:effectRef>
-                <a:fontRef idx="minor">
-                  <a:schemeClr val="lt1"/>
-                </a:fontRef>
-              </p:style>
-              <p:txBody>
-                <a:bodyPr rtlCol="0" anchor="ctr"/>
-                <a:lstStyle/>
-                <a:p>
-                  <a:pPr algn="ctr"/>
-                  <a:endParaRPr lang="en-US"/>
-                </a:p>
-              </p:txBody>
-            </p:sp>
-            <p:sp>
-              <p:nvSpPr>
-                <p:cNvPr id="80" name="Rectangle 79">
-                  <a:extLst>
-                    <a:ext uri="{FF2B5EF4-FFF2-40B4-BE49-F238E27FC236}">
-                      <a16:creationId xmlns:a16="http://schemas.microsoft.com/office/drawing/2014/main" id="{643D4D03-482E-CE76-0A41-81689B815BB9}"/>
-                    </a:ext>
-                  </a:extLst>
-                </p:cNvPr>
-                <p:cNvSpPr/>
-                <p:nvPr/>
-              </p:nvSpPr>
-              <p:spPr>
-                <a:xfrm>
-                  <a:off x="8713135" y="2830941"/>
-                  <a:ext cx="182880" cy="1828800"/>
-                </a:xfrm>
-                <a:prstGeom prst="rect">
-                  <a:avLst/>
-                </a:prstGeom>
-                <a:solidFill>
-                  <a:schemeClr val="tx2">
-                    <a:lumMod val="25000"/>
-                    <a:lumOff val="75000"/>
-                  </a:schemeClr>
-                </a:solidFill>
-                <a:ln>
-                  <a:noFill/>
-                </a:ln>
-                <a:scene3d>
-                  <a:camera prst="isometricOffAxis2Left"/>
-                  <a:lightRig rig="soft" dir="t"/>
-                </a:scene3d>
-                <a:sp3d extrusionH="127000" contourW="12700">
-                  <a:contourClr>
-                    <a:schemeClr val="bg2"/>
-                  </a:contourClr>
-                </a:sp3d>
-              </p:spPr>
-              <p:style>
-                <a:lnRef idx="2">
-                  <a:schemeClr val="accent1">
-                    <a:shade val="15000"/>
-                  </a:schemeClr>
-                </a:lnRef>
-                <a:fillRef idx="1">
-                  <a:schemeClr val="accent1"/>
-                </a:fillRef>
-                <a:effectRef idx="0">
-                  <a:schemeClr val="accent1"/>
-                </a:effectRef>
-                <a:fontRef idx="minor">
-                  <a:schemeClr val="lt1"/>
-                </a:fontRef>
-              </p:style>
-              <p:txBody>
-                <a:bodyPr rtlCol="0" anchor="ctr"/>
-                <a:lstStyle/>
-                <a:p>
-                  <a:pPr algn="ctr"/>
-                  <a:endParaRPr lang="en-US"/>
-                </a:p>
-              </p:txBody>
-            </p:sp>
-            <p:sp>
-              <p:nvSpPr>
-                <p:cNvPr id="81" name="Rectangle 80">
-                  <a:extLst>
-                    <a:ext uri="{FF2B5EF4-FFF2-40B4-BE49-F238E27FC236}">
-                      <a16:creationId xmlns:a16="http://schemas.microsoft.com/office/drawing/2014/main" id="{7430B77A-D992-A102-AA81-7C7023B1D587}"/>
-                    </a:ext>
-                  </a:extLst>
-                </p:cNvPr>
-                <p:cNvSpPr/>
-                <p:nvPr/>
-              </p:nvSpPr>
-              <p:spPr>
-                <a:xfrm>
-                  <a:off x="8113695" y="2735691"/>
-                  <a:ext cx="182880" cy="1828800"/>
-                </a:xfrm>
-                <a:prstGeom prst="rect">
-                  <a:avLst/>
-                </a:prstGeom>
-                <a:solidFill>
-                  <a:schemeClr val="tx2">
-                    <a:lumMod val="25000"/>
-                    <a:lumOff val="75000"/>
-                  </a:schemeClr>
-                </a:solidFill>
-                <a:ln>
-                  <a:noFill/>
-                </a:ln>
-                <a:scene3d>
-                  <a:camera prst="isometricOffAxis2Left"/>
-                  <a:lightRig rig="soft" dir="t"/>
-                </a:scene3d>
-                <a:sp3d extrusionH="127000" contourW="12700">
-                  <a:contourClr>
-                    <a:schemeClr val="bg2"/>
-                  </a:contourClr>
-                </a:sp3d>
-              </p:spPr>
-              <p:style>
-                <a:lnRef idx="2">
-                  <a:schemeClr val="accent1">
-                    <a:shade val="15000"/>
-                  </a:schemeClr>
-                </a:lnRef>
-                <a:fillRef idx="1">
-                  <a:schemeClr val="accent1"/>
-                </a:fillRef>
-                <a:effectRef idx="0">
-                  <a:schemeClr val="accent1"/>
-                </a:effectRef>
-                <a:fontRef idx="minor">
-                  <a:schemeClr val="lt1"/>
-                </a:fontRef>
-              </p:style>
-              <p:txBody>
-                <a:bodyPr rtlCol="0" anchor="ctr"/>
-                <a:lstStyle/>
-                <a:p>
-                  <a:pPr algn="ctr"/>
-                  <a:endParaRPr lang="en-US"/>
-                </a:p>
-              </p:txBody>
-            </p:sp>
-            <p:sp>
-              <p:nvSpPr>
-                <p:cNvPr id="82" name="Rectangle 81">
-                  <a:extLst>
-                    <a:ext uri="{FF2B5EF4-FFF2-40B4-BE49-F238E27FC236}">
-                      <a16:creationId xmlns:a16="http://schemas.microsoft.com/office/drawing/2014/main" id="{40BB53D3-B606-EAB2-922E-0D9D2DEB35C1}"/>
-                    </a:ext>
-                  </a:extLst>
-                </p:cNvPr>
-                <p:cNvSpPr/>
-                <p:nvPr/>
-              </p:nvSpPr>
-              <p:spPr>
-                <a:xfrm>
-                  <a:off x="8413415" y="2783316"/>
-                  <a:ext cx="182880" cy="1828800"/>
-                </a:xfrm>
-                <a:prstGeom prst="rect">
-                  <a:avLst/>
-                </a:prstGeom>
-                <a:solidFill>
-                  <a:schemeClr val="tx2">
-                    <a:lumMod val="25000"/>
-                    <a:lumOff val="75000"/>
-                  </a:schemeClr>
-                </a:solidFill>
-                <a:ln>
-                  <a:noFill/>
-                </a:ln>
-                <a:scene3d>
-                  <a:camera prst="isometricOffAxis2Left"/>
-                  <a:lightRig rig="soft" dir="t"/>
-                </a:scene3d>
-                <a:sp3d extrusionH="127000" contourW="12700">
-                  <a:contourClr>
-                    <a:schemeClr val="bg2"/>
-                  </a:contourClr>
-                </a:sp3d>
-              </p:spPr>
-              <p:style>
-                <a:lnRef idx="2">
-                  <a:schemeClr val="accent1">
-                    <a:shade val="15000"/>
-                  </a:schemeClr>
-                </a:lnRef>
-                <a:fillRef idx="1">
-                  <a:schemeClr val="accent1"/>
-                </a:fillRef>
-                <a:effectRef idx="0">
-                  <a:schemeClr val="accent1"/>
-                </a:effectRef>
-                <a:fontRef idx="minor">
-                  <a:schemeClr val="lt1"/>
-                </a:fontRef>
-              </p:style>
-              <p:txBody>
-                <a:bodyPr rtlCol="0" anchor="ctr"/>
-                <a:lstStyle/>
-                <a:p>
-                  <a:pPr algn="ctr"/>
-                  <a:endParaRPr lang="en-US"/>
-                </a:p>
-              </p:txBody>
-            </p:sp>
-            <p:sp>
-              <p:nvSpPr>
-                <p:cNvPr id="83" name="Arc 82">
-                  <a:extLst>
-                    <a:ext uri="{FF2B5EF4-FFF2-40B4-BE49-F238E27FC236}">
-                      <a16:creationId xmlns:a16="http://schemas.microsoft.com/office/drawing/2014/main" id="{D202FD76-2AF2-9DD6-CB4E-89BD05A5DC51}"/>
-                    </a:ext>
-                  </a:extLst>
-                </p:cNvPr>
-                <p:cNvSpPr/>
-                <p:nvPr/>
-              </p:nvSpPr>
-              <p:spPr>
-                <a:xfrm>
-                  <a:off x="8293393" y="2455348"/>
-                  <a:ext cx="914400" cy="914400"/>
-                </a:xfrm>
-                <a:prstGeom prst="arc">
-                  <a:avLst>
-                    <a:gd name="adj1" fmla="val 16408360"/>
-                    <a:gd name="adj2" fmla="val 19899102"/>
-                  </a:avLst>
-                </a:prstGeom>
-                <a:ln w="38100">
-                  <a:solidFill>
-                    <a:schemeClr val="accent1">
-                      <a:lumMod val="20000"/>
-                      <a:lumOff val="80000"/>
-                    </a:schemeClr>
-                  </a:solidFill>
-                </a:ln>
-              </p:spPr>
-              <p:style>
-                <a:lnRef idx="2">
-                  <a:schemeClr val="accent1"/>
-                </a:lnRef>
-                <a:fillRef idx="0">
-                  <a:schemeClr val="accent1"/>
-                </a:fillRef>
-                <a:effectRef idx="1">
-                  <a:schemeClr val="accent1"/>
-                </a:effectRef>
-                <a:fontRef idx="minor">
-                  <a:schemeClr val="tx1"/>
-                </a:fontRef>
-              </p:style>
-              <p:txBody>
-                <a:bodyPr rtlCol="0" anchor="ctr"/>
-                <a:lstStyle/>
-                <a:p>
-                  <a:pPr algn="ctr"/>
-                  <a:endParaRPr lang="en-US"/>
-                </a:p>
-              </p:txBody>
-            </p:sp>
-            <mc:AlternateContent xmlns:mc="http://schemas.openxmlformats.org/markup-compatibility/2006">
-              <mc:Choice xmlns:a14="http://schemas.microsoft.com/office/drawing/2010/main" Requires="a14">
-                <p:sp>
-                  <p:nvSpPr>
-                    <p:cNvPr id="84" name="TextBox 83">
-                      <a:extLst>
-                        <a:ext uri="{FF2B5EF4-FFF2-40B4-BE49-F238E27FC236}">
-                          <a16:creationId xmlns:a16="http://schemas.microsoft.com/office/drawing/2014/main" id="{6DC1E686-5ACA-89BE-C6E0-9AB4BC78466E}"/>
-                        </a:ext>
-                      </a:extLst>
-                    </p:cNvPr>
-                    <p:cNvSpPr txBox="1"/>
-                    <p:nvPr/>
-                  </p:nvSpPr>
-                  <p:spPr>
-                    <a:xfrm>
-                      <a:off x="8783742" y="2029329"/>
-                      <a:ext cx="603749" cy="523220"/>
-                    </a:xfrm>
-                    <a:prstGeom prst="rect">
-                      <a:avLst/>
-                    </a:prstGeom>
-                    <a:noFill/>
-                  </p:spPr>
-                  <p:txBody>
-                    <a:bodyPr wrap="square" rtlCol="0">
-                      <a:spAutoFit/>
-                    </a:bodyPr>
-                    <a:lstStyle/>
-                    <a:p>
-                      <a14:m>
-                        <m:oMathPara xmlns:m="http://schemas.openxmlformats.org/officeDocument/2006/math">
-                          <m:oMathParaPr>
-                            <m:jc m:val="centerGroup"/>
-                          </m:oMathParaPr>
-                          <m:oMath xmlns:m="http://schemas.openxmlformats.org/officeDocument/2006/math">
-                            <m:sSub>
-                              <m:sSubPr>
-                                <m:ctrlPr>
-                                  <a:rPr lang="en-US" sz="2800" b="0" i="1" smtClean="0">
-                                    <a:solidFill>
-                                      <a:schemeClr val="accent1">
-                                        <a:lumMod val="20000"/>
-                                        <a:lumOff val="80000"/>
-                                      </a:schemeClr>
-                                    </a:solidFill>
-                                    <a:latin typeface="Cambria Math" panose="02040503050406030204" pitchFamily="18" charset="0"/>
-                                  </a:rPr>
-                                </m:ctrlPr>
-                              </m:sSubPr>
-                              <m:e>
-                                <m:r>
-                                  <a:rPr lang="en-US" sz="2800" b="0" i="1" smtClean="0">
-                                    <a:solidFill>
-                                      <a:schemeClr val="accent1">
-                                        <a:lumMod val="20000"/>
-                                        <a:lumOff val="80000"/>
-                                      </a:schemeClr>
-                                    </a:solidFill>
-                                    <a:latin typeface="Cambria Math" panose="02040503050406030204" pitchFamily="18" charset="0"/>
-                                  </a:rPr>
-                                  <m:t>𝜙</m:t>
-                                </m:r>
-                              </m:e>
-                              <m:sub>
-                                <m:r>
-                                  <a:rPr lang="en-US" sz="2800" b="0" i="1" smtClean="0">
-                                    <a:solidFill>
-                                      <a:schemeClr val="accent1">
-                                        <a:lumMod val="20000"/>
-                                        <a:lumOff val="80000"/>
-                                      </a:schemeClr>
-                                    </a:solidFill>
-                                    <a:latin typeface="Cambria Math" panose="02040503050406030204" pitchFamily="18" charset="0"/>
-                                  </a:rPr>
-                                  <m:t>𝑑</m:t>
-                                </m:r>
-                              </m:sub>
-                            </m:sSub>
-                          </m:oMath>
-                        </m:oMathPara>
-                      </a14:m>
-                      <a:endParaRPr lang="en-US" sz="2800" dirty="0">
-                        <a:solidFill>
-                          <a:schemeClr val="accent1">
-                            <a:lumMod val="20000"/>
-                            <a:lumOff val="80000"/>
-                          </a:schemeClr>
-                        </a:solidFill>
-                      </a:endParaRPr>
-                    </a:p>
-                  </p:txBody>
-                </p:sp>
-              </mc:Choice>
-              <mc:Fallback>
-                <p:sp>
-                  <p:nvSpPr>
-                    <p:cNvPr id="84" name="TextBox 83">
-                      <a:extLst>
-                        <a:ext uri="{FF2B5EF4-FFF2-40B4-BE49-F238E27FC236}">
-                          <a16:creationId xmlns:a16="http://schemas.microsoft.com/office/drawing/2014/main" id="{6DC1E686-5ACA-89BE-C6E0-9AB4BC78466E}"/>
-                        </a:ext>
-                      </a:extLst>
-                    </p:cNvPr>
-                    <p:cNvSpPr txBox="1">
-                      <a:spLocks noRot="1" noChangeAspect="1" noMove="1" noResize="1" noEditPoints="1" noAdjustHandles="1" noChangeArrowheads="1" noChangeShapeType="1" noTextEdit="1"/>
-                    </p:cNvSpPr>
-                    <p:nvPr/>
-                  </p:nvSpPr>
-                  <p:spPr>
-                    <a:xfrm>
-                      <a:off x="8783742" y="2029329"/>
-                      <a:ext cx="603749" cy="523220"/>
-                    </a:xfrm>
-                    <a:prstGeom prst="rect">
-                      <a:avLst/>
-                    </a:prstGeom>
-                    <a:blipFill>
-                      <a:blip r:embed="rId13"/>
-                      <a:stretch>
-                        <a:fillRect/>
-                      </a:stretch>
-                    </a:blipFill>
-                  </p:spPr>
-                  <p:txBody>
-                    <a:bodyPr/>
-                    <a:lstStyle/>
-                    <a:p>
-                      <a:r>
-                        <a:rPr lang="en-US">
-                          <a:noFill/>
-                        </a:rPr>
-                        <a:t> </a:t>
-                      </a:r>
-                    </a:p>
-                  </p:txBody>
-                </p:sp>
-              </mc:Fallback>
-            </mc:AlternateContent>
-            <p:cxnSp>
-              <p:nvCxnSpPr>
-                <p:cNvPr id="85" name="Straight Arrow Connector 84">
-                  <a:extLst>
-                    <a:ext uri="{FF2B5EF4-FFF2-40B4-BE49-F238E27FC236}">
-                      <a16:creationId xmlns:a16="http://schemas.microsoft.com/office/drawing/2014/main" id="{F8F697F1-77A0-A58C-CC42-8E909A66CBF8}"/>
-                    </a:ext>
-                  </a:extLst>
-                </p:cNvPr>
-                <p:cNvCxnSpPr>
-                  <a:cxnSpLocks/>
-                </p:cNvCxnSpPr>
-                <p:nvPr/>
-              </p:nvCxnSpPr>
-              <p:spPr>
-                <a:xfrm flipH="1" flipV="1">
-                  <a:off x="7694921" y="3626485"/>
-                  <a:ext cx="659141" cy="150964"/>
-                </a:xfrm>
-                <a:prstGeom prst="straightConnector1">
-                  <a:avLst/>
-                </a:prstGeom>
-                <a:ln w="38100">
-                  <a:solidFill>
-                    <a:srgbClr val="FF0000"/>
-                  </a:solidFill>
-                  <a:tailEnd type="triangle"/>
-                </a:ln>
-              </p:spPr>
-              <p:style>
-                <a:lnRef idx="2">
-                  <a:schemeClr val="accent1"/>
-                </a:lnRef>
-                <a:fillRef idx="0">
-                  <a:schemeClr val="accent1"/>
-                </a:fillRef>
-                <a:effectRef idx="1">
-                  <a:schemeClr val="accent1"/>
-                </a:effectRef>
-                <a:fontRef idx="minor">
-                  <a:schemeClr val="tx1"/>
-                </a:fontRef>
-              </p:style>
-            </p:cxnSp>
-            <p:cxnSp>
-              <p:nvCxnSpPr>
-                <p:cNvPr id="86" name="Straight Arrow Connector 85">
-                  <a:extLst>
-                    <a:ext uri="{FF2B5EF4-FFF2-40B4-BE49-F238E27FC236}">
-                      <a16:creationId xmlns:a16="http://schemas.microsoft.com/office/drawing/2014/main" id="{20E7D437-8CCD-EB9E-4561-28A8EE73E05E}"/>
-                    </a:ext>
-                  </a:extLst>
-                </p:cNvPr>
-                <p:cNvCxnSpPr>
-                  <a:cxnSpLocks/>
-                </p:cNvCxnSpPr>
-                <p:nvPr/>
-              </p:nvCxnSpPr>
-              <p:spPr>
-                <a:xfrm flipH="1" flipV="1">
-                  <a:off x="8348466" y="2937815"/>
-                  <a:ext cx="8602" cy="839634"/>
-                </a:xfrm>
-                <a:prstGeom prst="straightConnector1">
-                  <a:avLst/>
-                </a:prstGeom>
-                <a:ln w="38100">
-                  <a:solidFill>
-                    <a:srgbClr val="FF0000"/>
-                  </a:solidFill>
-                  <a:tailEnd type="triangle"/>
-                </a:ln>
-              </p:spPr>
-              <p:style>
-                <a:lnRef idx="2">
-                  <a:schemeClr val="accent1"/>
-                </a:lnRef>
-                <a:fillRef idx="0">
-                  <a:schemeClr val="accent1"/>
-                </a:fillRef>
-                <a:effectRef idx="1">
-                  <a:schemeClr val="accent1"/>
-                </a:effectRef>
-                <a:fontRef idx="minor">
-                  <a:schemeClr val="tx1"/>
-                </a:fontRef>
-              </p:style>
-            </p:cxnSp>
-            <p:cxnSp>
-              <p:nvCxnSpPr>
-                <p:cNvPr id="87" name="Straight Arrow Connector 86">
-                  <a:extLst>
-                    <a:ext uri="{FF2B5EF4-FFF2-40B4-BE49-F238E27FC236}">
-                      <a16:creationId xmlns:a16="http://schemas.microsoft.com/office/drawing/2014/main" id="{543195C1-5484-C531-6CBC-F7A99160E4BB}"/>
-                    </a:ext>
-                  </a:extLst>
-                </p:cNvPr>
-                <p:cNvCxnSpPr>
-                  <a:cxnSpLocks/>
-                </p:cNvCxnSpPr>
-                <p:nvPr/>
-              </p:nvCxnSpPr>
-              <p:spPr>
-                <a:xfrm flipV="1">
-                  <a:off x="6979911" y="3764902"/>
-                  <a:ext cx="1374151" cy="1574178"/>
-                </a:xfrm>
-                <a:prstGeom prst="straightConnector1">
-                  <a:avLst/>
-                </a:prstGeom>
-                <a:ln w="38100">
-                  <a:solidFill>
-                    <a:srgbClr val="FFC000"/>
-                  </a:solidFill>
-                  <a:tailEnd type="triangle"/>
-                </a:ln>
-              </p:spPr>
-              <p:style>
-                <a:lnRef idx="2">
-                  <a:schemeClr val="accent1"/>
-                </a:lnRef>
-                <a:fillRef idx="0">
-                  <a:schemeClr val="accent1"/>
-                </a:fillRef>
-                <a:effectRef idx="1">
-                  <a:schemeClr val="accent1"/>
-                </a:effectRef>
-                <a:fontRef idx="minor">
-                  <a:schemeClr val="tx1"/>
-                </a:fontRef>
-              </p:style>
-            </p:cxnSp>
-            <p:cxnSp>
-              <p:nvCxnSpPr>
-                <p:cNvPr id="88" name="Straight Arrow Connector 87">
-                  <a:extLst>
-                    <a:ext uri="{FF2B5EF4-FFF2-40B4-BE49-F238E27FC236}">
-                      <a16:creationId xmlns:a16="http://schemas.microsoft.com/office/drawing/2014/main" id="{4E33439A-844F-D426-0CC2-2C37459F687F}"/>
-                    </a:ext>
-                  </a:extLst>
-                </p:cNvPr>
-                <p:cNvCxnSpPr>
-                  <a:cxnSpLocks/>
-                </p:cNvCxnSpPr>
-                <p:nvPr/>
-              </p:nvCxnSpPr>
-              <p:spPr>
-                <a:xfrm flipV="1">
-                  <a:off x="8348466" y="3346146"/>
-                  <a:ext cx="353785" cy="415084"/>
-                </a:xfrm>
-                <a:prstGeom prst="straightConnector1">
-                  <a:avLst/>
-                </a:prstGeom>
-                <a:ln w="38100">
-                  <a:solidFill>
-                    <a:srgbClr val="FF0000"/>
-                  </a:solidFill>
-                  <a:prstDash val="sysDot"/>
-                  <a:tailEnd type="triangle"/>
-                </a:ln>
-              </p:spPr>
-              <p:style>
-                <a:lnRef idx="2">
-                  <a:schemeClr val="accent1"/>
-                </a:lnRef>
-                <a:fillRef idx="0">
-                  <a:schemeClr val="accent1"/>
-                </a:fillRef>
-                <a:effectRef idx="1">
-                  <a:schemeClr val="accent1"/>
-                </a:effectRef>
-                <a:fontRef idx="minor">
-                  <a:schemeClr val="tx1"/>
-                </a:fontRef>
-              </p:style>
-            </p:cxnSp>
-            <p:cxnSp>
-              <p:nvCxnSpPr>
-                <p:cNvPr id="92" name="Straight Arrow Connector 91">
-                  <a:extLst>
-                    <a:ext uri="{FF2B5EF4-FFF2-40B4-BE49-F238E27FC236}">
-                      <a16:creationId xmlns:a16="http://schemas.microsoft.com/office/drawing/2014/main" id="{0C4C9419-C147-A72F-5A39-6310D008238A}"/>
-                    </a:ext>
-                  </a:extLst>
-                </p:cNvPr>
-                <p:cNvCxnSpPr>
-                  <a:cxnSpLocks/>
-                </p:cNvCxnSpPr>
-                <p:nvPr/>
-              </p:nvCxnSpPr>
-              <p:spPr>
-                <a:xfrm flipH="1" flipV="1">
-                  <a:off x="9304867" y="1877148"/>
-                  <a:ext cx="390735" cy="66330"/>
-                </a:xfrm>
-                <a:prstGeom prst="straightConnector1">
-                  <a:avLst/>
-                </a:prstGeom>
-                <a:ln w="38100">
-                  <a:solidFill>
-                    <a:srgbClr val="FF0000"/>
-                  </a:solidFill>
-                  <a:tailEnd type="triangle"/>
-                </a:ln>
-              </p:spPr>
-              <p:style>
-                <a:lnRef idx="2">
-                  <a:schemeClr val="accent1"/>
-                </a:lnRef>
-                <a:fillRef idx="0">
-                  <a:schemeClr val="accent1"/>
-                </a:fillRef>
-                <a:effectRef idx="1">
-                  <a:schemeClr val="accent1"/>
-                </a:effectRef>
-                <a:fontRef idx="minor">
-                  <a:schemeClr val="tx1"/>
-                </a:fontRef>
-              </p:style>
-            </p:cxnSp>
-            <p:cxnSp>
-              <p:nvCxnSpPr>
-                <p:cNvPr id="93" name="Straight Arrow Connector 92">
-                  <a:extLst>
-                    <a:ext uri="{FF2B5EF4-FFF2-40B4-BE49-F238E27FC236}">
-                      <a16:creationId xmlns:a16="http://schemas.microsoft.com/office/drawing/2014/main" id="{05F2915D-4D4D-14B2-2BA1-31FAD1EE1A9B}"/>
-                    </a:ext>
-                  </a:extLst>
-                </p:cNvPr>
-                <p:cNvCxnSpPr>
-                  <a:cxnSpLocks/>
-                </p:cNvCxnSpPr>
-                <p:nvPr/>
-              </p:nvCxnSpPr>
-              <p:spPr>
-                <a:xfrm flipH="1" flipV="1">
-                  <a:off x="9683732" y="1436842"/>
-                  <a:ext cx="5232" cy="541308"/>
-                </a:xfrm>
-                <a:prstGeom prst="straightConnector1">
-                  <a:avLst/>
-                </a:prstGeom>
-                <a:ln w="38100">
-                  <a:solidFill>
-                    <a:srgbClr val="FF0000"/>
-                  </a:solidFill>
-                  <a:tailEnd type="triangle"/>
-                </a:ln>
-              </p:spPr>
-              <p:style>
-                <a:lnRef idx="2">
-                  <a:schemeClr val="accent1"/>
-                </a:lnRef>
-                <a:fillRef idx="0">
-                  <a:schemeClr val="accent1"/>
-                </a:fillRef>
-                <a:effectRef idx="1">
-                  <a:schemeClr val="accent1"/>
-                </a:effectRef>
-                <a:fontRef idx="minor">
-                  <a:schemeClr val="tx1"/>
-                </a:fontRef>
-              </p:style>
-            </p:cxnSp>
-            <p:cxnSp>
-              <p:nvCxnSpPr>
-                <p:cNvPr id="94" name="Straight Arrow Connector 93">
-                  <a:extLst>
-                    <a:ext uri="{FF2B5EF4-FFF2-40B4-BE49-F238E27FC236}">
-                      <a16:creationId xmlns:a16="http://schemas.microsoft.com/office/drawing/2014/main" id="{44A67F2D-15E6-E9E8-844F-B543B9585D25}"/>
-                    </a:ext>
-                  </a:extLst>
-                </p:cNvPr>
-                <p:cNvCxnSpPr>
-                  <a:cxnSpLocks/>
-                </p:cNvCxnSpPr>
-                <p:nvPr/>
-              </p:nvCxnSpPr>
-              <p:spPr>
-                <a:xfrm flipV="1">
-                  <a:off x="9680362" y="1678371"/>
-                  <a:ext cx="263920" cy="283560"/>
-                </a:xfrm>
-                <a:prstGeom prst="straightConnector1">
-                  <a:avLst/>
-                </a:prstGeom>
-                <a:ln w="38100">
-                  <a:solidFill>
-                    <a:srgbClr val="FF0000"/>
-                  </a:solidFill>
-                  <a:prstDash val="sysDot"/>
-                  <a:tailEnd type="triangle"/>
-                </a:ln>
-              </p:spPr>
-              <p:style>
-                <a:lnRef idx="2">
-                  <a:schemeClr val="accent1"/>
-                </a:lnRef>
-                <a:fillRef idx="0">
-                  <a:schemeClr val="accent1"/>
-                </a:fillRef>
-                <a:effectRef idx="1">
-                  <a:schemeClr val="accent1"/>
-                </a:effectRef>
-                <a:fontRef idx="minor">
-                  <a:schemeClr val="tx1"/>
-                </a:fontRef>
-              </p:style>
-            </p:cxnSp>
-            <mc:AlternateContent xmlns:mc="http://schemas.openxmlformats.org/markup-compatibility/2006">
-              <mc:Choice xmlns:a14="http://schemas.microsoft.com/office/drawing/2010/main" Requires="a14">
-                <p:sp>
-                  <p:nvSpPr>
-                    <p:cNvPr id="95" name="TextBox 94">
-                      <a:extLst>
-                        <a:ext uri="{FF2B5EF4-FFF2-40B4-BE49-F238E27FC236}">
-                          <a16:creationId xmlns:a16="http://schemas.microsoft.com/office/drawing/2014/main" id="{DE5BE3E4-E2D9-91AE-5EAE-2541BB566727}"/>
-                        </a:ext>
-                      </a:extLst>
-                    </p:cNvPr>
-                    <p:cNvSpPr txBox="1"/>
-                    <p:nvPr/>
-                  </p:nvSpPr>
-                  <p:spPr>
-                    <a:xfrm>
-                      <a:off x="9113409" y="973536"/>
-                      <a:ext cx="1214538" cy="461665"/>
-                    </a:xfrm>
-                    <a:prstGeom prst="rect">
-                      <a:avLst/>
-                    </a:prstGeom>
-                    <a:noFill/>
-                  </p:spPr>
-                  <p:txBody>
-                    <a:bodyPr wrap="square" rtlCol="0">
-                      <a:spAutoFit/>
-                    </a:bodyPr>
-                    <a:lstStyle/>
-                    <a:p>
-                      <a14:m>
-                        <m:oMathPara xmlns:m="http://schemas.openxmlformats.org/officeDocument/2006/math">
-                          <m:oMathParaPr>
-                            <m:jc m:val="centerGroup"/>
-                          </m:oMathParaPr>
-                          <m:oMath xmlns:m="http://schemas.openxmlformats.org/officeDocument/2006/math">
-                            <m:sSub>
-                              <m:sSubPr>
-                                <m:ctrlPr>
-                                  <a:rPr lang="en-US" sz="2400" b="0" i="1" smtClean="0">
-                                    <a:ln>
-                                      <a:noFill/>
-                                    </a:ln>
-                                    <a:solidFill>
-                                      <a:srgbClr val="FF0000"/>
-                                    </a:solidFill>
-                                    <a:latin typeface="Cambria Math" panose="02040503050406030204" pitchFamily="18" charset="0"/>
-                                  </a:rPr>
-                                </m:ctrlPr>
-                              </m:sSubPr>
-                              <m:e>
-                                <m:r>
-                                  <a:rPr lang="en-US" sz="2400" i="1" smtClean="0">
-                                    <a:ln>
-                                      <a:noFill/>
-                                    </a:ln>
-                                    <a:solidFill>
-                                      <a:srgbClr val="FF0000"/>
-                                    </a:solidFill>
-                                    <a:latin typeface="Cambria Math" panose="02040503050406030204" pitchFamily="18" charset="0"/>
-                                  </a:rPr>
-                                  <m:t>𝑦</m:t>
-                                </m:r>
-                              </m:e>
-                              <m:sub>
-                                <m:r>
-                                  <a:rPr lang="en-US" sz="2400" b="0" i="1" smtClean="0">
-                                    <a:ln>
-                                      <a:noFill/>
-                                    </a:ln>
-                                    <a:solidFill>
-                                      <a:srgbClr val="FF0000"/>
-                                    </a:solidFill>
-                                    <a:latin typeface="Cambria Math" panose="02040503050406030204" pitchFamily="18" charset="0"/>
-                                  </a:rPr>
-                                  <m:t>𝑏</m:t>
-                                </m:r>
-                              </m:sub>
-                            </m:sSub>
-                          </m:oMath>
-                        </m:oMathPara>
-                      </a14:m>
-                      <a:endParaRPr lang="en-US" sz="2400" dirty="0">
-                        <a:ln>
-                          <a:noFill/>
-                        </a:ln>
-                        <a:solidFill>
-                          <a:srgbClr val="FF0000"/>
-                        </a:solidFill>
-                      </a:endParaRPr>
-                    </a:p>
-                  </p:txBody>
-                </p:sp>
-              </mc:Choice>
-              <mc:Fallback>
-                <p:sp>
-                  <p:nvSpPr>
-                    <p:cNvPr id="95" name="TextBox 94">
-                      <a:extLst>
-                        <a:ext uri="{FF2B5EF4-FFF2-40B4-BE49-F238E27FC236}">
-                          <a16:creationId xmlns:a16="http://schemas.microsoft.com/office/drawing/2014/main" id="{DE5BE3E4-E2D9-91AE-5EAE-2541BB566727}"/>
-                        </a:ext>
-                      </a:extLst>
-                    </p:cNvPr>
-                    <p:cNvSpPr txBox="1">
-                      <a:spLocks noRot="1" noChangeAspect="1" noMove="1" noResize="1" noEditPoints="1" noAdjustHandles="1" noChangeArrowheads="1" noChangeShapeType="1" noTextEdit="1"/>
-                    </p:cNvSpPr>
-                    <p:nvPr/>
-                  </p:nvSpPr>
-                  <p:spPr>
-                    <a:xfrm>
-                      <a:off x="9113409" y="973536"/>
-                      <a:ext cx="1214538" cy="461665"/>
-                    </a:xfrm>
-                    <a:prstGeom prst="rect">
-                      <a:avLst/>
-                    </a:prstGeom>
-                    <a:blipFill>
-                      <a:blip r:embed="rId14"/>
-                      <a:stretch>
-                        <a:fillRect b="-9333"/>
-                      </a:stretch>
-                    </a:blipFill>
-                  </p:spPr>
-                  <p:txBody>
-                    <a:bodyPr/>
-                    <a:lstStyle/>
-                    <a:p>
-                      <a:r>
-                        <a:rPr lang="en-US">
-                          <a:noFill/>
-                        </a:rPr>
-                        <a:t> </a:t>
-                      </a:r>
-                    </a:p>
-                  </p:txBody>
-                </p:sp>
-              </mc:Fallback>
-            </mc:AlternateContent>
-            <mc:AlternateContent xmlns:mc="http://schemas.openxmlformats.org/markup-compatibility/2006">
-              <mc:Choice xmlns:a14="http://schemas.microsoft.com/office/drawing/2010/main" Requires="a14">
-                <p:sp>
-                  <p:nvSpPr>
-                    <p:cNvPr id="96" name="TextBox 95">
-                      <a:extLst>
-                        <a:ext uri="{FF2B5EF4-FFF2-40B4-BE49-F238E27FC236}">
-                          <a16:creationId xmlns:a16="http://schemas.microsoft.com/office/drawing/2014/main" id="{3D8B43E6-6039-47C5-A9AA-5CFE605BD923}"/>
-                        </a:ext>
-                      </a:extLst>
-                    </p:cNvPr>
-                    <p:cNvSpPr txBox="1"/>
-                    <p:nvPr/>
-                  </p:nvSpPr>
-                  <p:spPr>
-                    <a:xfrm>
-                      <a:off x="9799678" y="1289248"/>
-                      <a:ext cx="471763" cy="461665"/>
-                    </a:xfrm>
-                    <a:prstGeom prst="rect">
-                      <a:avLst/>
-                    </a:prstGeom>
-                    <a:noFill/>
-                  </p:spPr>
-                  <p:txBody>
-                    <a:bodyPr wrap="square" rtlCol="0">
-                      <a:spAutoFit/>
-                    </a:bodyPr>
-                    <a:lstStyle/>
-                    <a:p>
-                      <a14:m>
-                        <m:oMathPara xmlns:m="http://schemas.openxmlformats.org/officeDocument/2006/math">
-                          <m:oMathParaPr>
-                            <m:jc m:val="centerGroup"/>
-                          </m:oMathParaPr>
-                          <m:oMath xmlns:m="http://schemas.openxmlformats.org/officeDocument/2006/math">
-                            <m:sSub>
-                              <m:sSubPr>
-                                <m:ctrlPr>
-                                  <a:rPr lang="en-US" sz="2400" b="0" i="1" smtClean="0">
-                                    <a:ln>
-                                      <a:noFill/>
-                                    </a:ln>
-                                    <a:solidFill>
-                                      <a:srgbClr val="FF0000"/>
-                                    </a:solidFill>
-                                    <a:latin typeface="Cambria Math" panose="02040503050406030204" pitchFamily="18" charset="0"/>
-                                  </a:rPr>
-                                </m:ctrlPr>
-                              </m:sSubPr>
-                              <m:e>
-                                <m:r>
-                                  <a:rPr lang="en-US" sz="2400" i="1" smtClean="0">
-                                    <a:ln>
-                                      <a:noFill/>
-                                    </a:ln>
-                                    <a:solidFill>
-                                      <a:srgbClr val="FF0000"/>
-                                    </a:solidFill>
-                                    <a:latin typeface="Cambria Math" panose="02040503050406030204" pitchFamily="18" charset="0"/>
-                                  </a:rPr>
-                                  <m:t>𝑧</m:t>
-                                </m:r>
-                              </m:e>
-                              <m:sub>
-                                <m:r>
-                                  <a:rPr lang="en-US" sz="2400" b="0" i="1" smtClean="0">
-                                    <a:ln>
-                                      <a:noFill/>
-                                    </a:ln>
-                                    <a:solidFill>
-                                      <a:srgbClr val="FF0000"/>
-                                    </a:solidFill>
-                                    <a:latin typeface="Cambria Math" panose="02040503050406030204" pitchFamily="18" charset="0"/>
-                                  </a:rPr>
-                                  <m:t>𝑏</m:t>
-                                </m:r>
-                              </m:sub>
-                            </m:sSub>
-                          </m:oMath>
-                        </m:oMathPara>
-                      </a14:m>
-                      <a:endParaRPr lang="en-US" sz="2400" dirty="0">
-                        <a:ln>
-                          <a:noFill/>
-                        </a:ln>
-                        <a:solidFill>
-                          <a:srgbClr val="FF0000"/>
-                        </a:solidFill>
-                      </a:endParaRPr>
-                    </a:p>
-                  </p:txBody>
-                </p:sp>
-              </mc:Choice>
-              <mc:Fallback>
-                <p:sp>
-                  <p:nvSpPr>
-                    <p:cNvPr id="96" name="TextBox 95">
-                      <a:extLst>
-                        <a:ext uri="{FF2B5EF4-FFF2-40B4-BE49-F238E27FC236}">
-                          <a16:creationId xmlns:a16="http://schemas.microsoft.com/office/drawing/2014/main" id="{3D8B43E6-6039-47C5-A9AA-5CFE605BD923}"/>
-                        </a:ext>
-                      </a:extLst>
-                    </p:cNvPr>
-                    <p:cNvSpPr txBox="1">
-                      <a:spLocks noRot="1" noChangeAspect="1" noMove="1" noResize="1" noEditPoints="1" noAdjustHandles="1" noChangeArrowheads="1" noChangeShapeType="1" noTextEdit="1"/>
-                    </p:cNvSpPr>
-                    <p:nvPr/>
-                  </p:nvSpPr>
-                  <p:spPr>
-                    <a:xfrm>
-                      <a:off x="9799678" y="1289248"/>
-                      <a:ext cx="471763" cy="461665"/>
-                    </a:xfrm>
-                    <a:prstGeom prst="rect">
-                      <a:avLst/>
-                    </a:prstGeom>
-                    <a:blipFill>
-                      <a:blip r:embed="rId15"/>
-                      <a:stretch>
-                        <a:fillRect b="-1316"/>
-                      </a:stretch>
-                    </a:blipFill>
-                  </p:spPr>
-                  <p:txBody>
-                    <a:bodyPr/>
-                    <a:lstStyle/>
-                    <a:p>
-                      <a:r>
-                        <a:rPr lang="en-US">
-                          <a:noFill/>
-                        </a:rPr>
-                        <a:t> </a:t>
-                      </a:r>
-                    </a:p>
-                  </p:txBody>
-                </p:sp>
-              </mc:Fallback>
-            </mc:AlternateContent>
-            <mc:AlternateContent xmlns:mc="http://schemas.openxmlformats.org/markup-compatibility/2006">
-              <mc:Choice xmlns:a14="http://schemas.microsoft.com/office/drawing/2010/main" Requires="a14">
-                <p:sp>
-                  <p:nvSpPr>
-                    <p:cNvPr id="97" name="TextBox 96">
-                      <a:extLst>
-                        <a:ext uri="{FF2B5EF4-FFF2-40B4-BE49-F238E27FC236}">
-                          <a16:creationId xmlns:a16="http://schemas.microsoft.com/office/drawing/2014/main" id="{26194C53-F6B3-BF8C-C3CB-1749FBB306B7}"/>
-                        </a:ext>
-                      </a:extLst>
-                    </p:cNvPr>
-                    <p:cNvSpPr txBox="1"/>
-                    <p:nvPr/>
-                  </p:nvSpPr>
-                  <p:spPr>
-                    <a:xfrm>
-                      <a:off x="9200836" y="1474499"/>
-                      <a:ext cx="604895" cy="461665"/>
-                    </a:xfrm>
-                    <a:prstGeom prst="rect">
-                      <a:avLst/>
-                    </a:prstGeom>
-                    <a:noFill/>
-                  </p:spPr>
-                  <p:txBody>
-                    <a:bodyPr wrap="square" rtlCol="0">
-                      <a:spAutoFit/>
-                    </a:bodyPr>
-                    <a:lstStyle/>
-                    <a:p>
-                      <a14:m>
-                        <m:oMathPara xmlns:m="http://schemas.openxmlformats.org/officeDocument/2006/math">
-                          <m:oMathParaPr>
-                            <m:jc m:val="centerGroup"/>
-                          </m:oMathParaPr>
-                          <m:oMath xmlns:m="http://schemas.openxmlformats.org/officeDocument/2006/math">
-                            <m:sSub>
-                              <m:sSubPr>
-                                <m:ctrlPr>
-                                  <a:rPr lang="en-US" sz="2400" b="0" i="1" smtClean="0">
-                                    <a:ln>
-                                      <a:noFill/>
-                                    </a:ln>
-                                    <a:solidFill>
-                                      <a:srgbClr val="FF0000"/>
-                                    </a:solidFill>
-                                    <a:latin typeface="Cambria Math" panose="02040503050406030204" pitchFamily="18" charset="0"/>
-                                  </a:rPr>
-                                </m:ctrlPr>
-                              </m:sSubPr>
-                              <m:e>
-                                <m:r>
-                                  <a:rPr lang="en-US" sz="2400" i="1" smtClean="0">
-                                    <a:ln>
-                                      <a:noFill/>
-                                    </a:ln>
-                                    <a:solidFill>
-                                      <a:srgbClr val="FF0000"/>
-                                    </a:solidFill>
-                                    <a:latin typeface="Cambria Math" panose="02040503050406030204" pitchFamily="18" charset="0"/>
-                                  </a:rPr>
-                                  <m:t>𝑥</m:t>
-                                </m:r>
-                              </m:e>
-                              <m:sub>
-                                <m:r>
-                                  <a:rPr lang="en-US" sz="2400" b="0" i="1" smtClean="0">
-                                    <a:ln>
-                                      <a:noFill/>
-                                    </a:ln>
-                                    <a:solidFill>
-                                      <a:srgbClr val="FF0000"/>
-                                    </a:solidFill>
-                                    <a:latin typeface="Cambria Math" panose="02040503050406030204" pitchFamily="18" charset="0"/>
-                                  </a:rPr>
-                                  <m:t>𝑏</m:t>
-                                </m:r>
-                              </m:sub>
-                            </m:sSub>
-                          </m:oMath>
-                        </m:oMathPara>
-                      </a14:m>
-                      <a:endParaRPr lang="en-US" sz="2400" dirty="0">
-                        <a:ln>
-                          <a:noFill/>
-                        </a:ln>
-                        <a:solidFill>
-                          <a:srgbClr val="FF0000"/>
-                        </a:solidFill>
-                      </a:endParaRPr>
-                    </a:p>
-                  </p:txBody>
-                </p:sp>
-              </mc:Choice>
-              <mc:Fallback>
-                <p:sp>
-                  <p:nvSpPr>
-                    <p:cNvPr id="97" name="TextBox 96">
-                      <a:extLst>
-                        <a:ext uri="{FF2B5EF4-FFF2-40B4-BE49-F238E27FC236}">
-                          <a16:creationId xmlns:a16="http://schemas.microsoft.com/office/drawing/2014/main" id="{26194C53-F6B3-BF8C-C3CB-1749FBB306B7}"/>
-                        </a:ext>
-                      </a:extLst>
-                    </p:cNvPr>
-                    <p:cNvSpPr txBox="1">
-                      <a:spLocks noRot="1" noChangeAspect="1" noMove="1" noResize="1" noEditPoints="1" noAdjustHandles="1" noChangeArrowheads="1" noChangeShapeType="1" noTextEdit="1"/>
-                    </p:cNvSpPr>
-                    <p:nvPr/>
-                  </p:nvSpPr>
-                  <p:spPr>
-                    <a:xfrm>
-                      <a:off x="9200836" y="1474499"/>
-                      <a:ext cx="604895" cy="461665"/>
-                    </a:xfrm>
-                    <a:prstGeom prst="rect">
-                      <a:avLst/>
-                    </a:prstGeom>
-                    <a:blipFill>
-                      <a:blip r:embed="rId16"/>
-                      <a:stretch>
-                        <a:fillRect/>
-                      </a:stretch>
-                    </a:blipFill>
-                  </p:spPr>
-                  <p:txBody>
-                    <a:bodyPr/>
-                    <a:lstStyle/>
-                    <a:p>
-                      <a:r>
-                        <a:rPr lang="en-US">
-                          <a:noFill/>
-                        </a:rPr>
-                        <a:t> </a:t>
-                      </a:r>
-                    </a:p>
-                  </p:txBody>
-                </p:sp>
-              </mc:Fallback>
-            </mc:AlternateContent>
-            <p:sp>
-              <p:nvSpPr>
-                <p:cNvPr id="98" name="Arc 97">
-                  <a:extLst>
-                    <a:ext uri="{FF2B5EF4-FFF2-40B4-BE49-F238E27FC236}">
-                      <a16:creationId xmlns:a16="http://schemas.microsoft.com/office/drawing/2014/main" id="{28AC83C2-F08A-6620-A1B0-49133047F5C4}"/>
-                    </a:ext>
-                  </a:extLst>
-                </p:cNvPr>
-                <p:cNvSpPr/>
-                <p:nvPr/>
-              </p:nvSpPr>
-              <p:spPr>
-                <a:xfrm>
-                  <a:off x="7945884" y="3458550"/>
-                  <a:ext cx="145784" cy="492971"/>
-                </a:xfrm>
-                <a:prstGeom prst="arc">
-                  <a:avLst>
-                    <a:gd name="adj1" fmla="val 2678578"/>
-                    <a:gd name="adj2" fmla="val 19252713"/>
-                  </a:avLst>
-                </a:prstGeom>
-                <a:ln>
-                  <a:solidFill>
-                    <a:srgbClr val="FFFF00"/>
-                  </a:solidFill>
-                  <a:headEnd type="none" w="med" len="med"/>
-                  <a:tailEnd type="arrow" w="med" len="med"/>
-                </a:ln>
-              </p:spPr>
-              <p:style>
-                <a:lnRef idx="2">
-                  <a:schemeClr val="accent1"/>
-                </a:lnRef>
-                <a:fillRef idx="0">
-                  <a:schemeClr val="accent1"/>
-                </a:fillRef>
-                <a:effectRef idx="1">
-                  <a:schemeClr val="accent1"/>
-                </a:effectRef>
-                <a:fontRef idx="minor">
-                  <a:schemeClr val="tx1"/>
-                </a:fontRef>
-              </p:style>
-              <p:txBody>
-                <a:bodyPr rtlCol="0" anchor="ctr"/>
-                <a:lstStyle/>
-                <a:p>
-                  <a:pPr algn="ctr"/>
-                  <a:endParaRPr lang="en-US"/>
-                </a:p>
-              </p:txBody>
-            </p:sp>
-            <p:sp>
-              <p:nvSpPr>
-                <p:cNvPr id="99" name="Arc 98">
-                  <a:extLst>
-                    <a:ext uri="{FF2B5EF4-FFF2-40B4-BE49-F238E27FC236}">
-                      <a16:creationId xmlns:a16="http://schemas.microsoft.com/office/drawing/2014/main" id="{B94F435A-58A0-5AA0-01A8-6CABE205238F}"/>
-                    </a:ext>
-                  </a:extLst>
-                </p:cNvPr>
-                <p:cNvSpPr/>
-                <p:nvPr/>
-              </p:nvSpPr>
-              <p:spPr>
-                <a:xfrm rot="5573780" flipH="1">
-                  <a:off x="8275140" y="3001302"/>
-                  <a:ext cx="140639" cy="432736"/>
-                </a:xfrm>
-                <a:prstGeom prst="arc">
-                  <a:avLst>
-                    <a:gd name="adj1" fmla="val 2678578"/>
-                    <a:gd name="adj2" fmla="val 19252713"/>
-                  </a:avLst>
-                </a:prstGeom>
-                <a:ln>
-                  <a:solidFill>
-                    <a:srgbClr val="FFFF00"/>
-                  </a:solidFill>
-                  <a:headEnd type="none" w="med" len="med"/>
-                  <a:tailEnd type="arrow" w="med" len="med"/>
-                </a:ln>
-              </p:spPr>
-              <p:style>
-                <a:lnRef idx="2">
-                  <a:schemeClr val="accent1"/>
-                </a:lnRef>
-                <a:fillRef idx="0">
-                  <a:schemeClr val="accent1"/>
-                </a:fillRef>
-                <a:effectRef idx="1">
-                  <a:schemeClr val="accent1"/>
-                </a:effectRef>
-                <a:fontRef idx="minor">
-                  <a:schemeClr val="tx1"/>
-                </a:fontRef>
-              </p:style>
-              <p:txBody>
-                <a:bodyPr rtlCol="0" anchor="ctr"/>
-                <a:lstStyle/>
-                <a:p>
-                  <a:pPr algn="ctr"/>
-                  <a:endParaRPr lang="en-US"/>
-                </a:p>
-              </p:txBody>
-            </p:sp>
-            <p:sp>
-              <p:nvSpPr>
-                <p:cNvPr id="100" name="Arc 99">
-                  <a:extLst>
-                    <a:ext uri="{FF2B5EF4-FFF2-40B4-BE49-F238E27FC236}">
-                      <a16:creationId xmlns:a16="http://schemas.microsoft.com/office/drawing/2014/main" id="{10339A4D-364F-C9DE-AB68-2AE9EC15E02C}"/>
-                    </a:ext>
-                  </a:extLst>
-                </p:cNvPr>
-                <p:cNvSpPr/>
-                <p:nvPr/>
-              </p:nvSpPr>
-              <p:spPr>
-                <a:xfrm rot="7200403" flipH="1">
-                  <a:off x="8509750" y="3341029"/>
-                  <a:ext cx="104426" cy="350246"/>
-                </a:xfrm>
-                <a:prstGeom prst="arc">
-                  <a:avLst>
-                    <a:gd name="adj1" fmla="val 2678578"/>
-                    <a:gd name="adj2" fmla="val 19252713"/>
-                  </a:avLst>
-                </a:prstGeom>
-                <a:ln>
-                  <a:solidFill>
-                    <a:srgbClr val="FFFF00"/>
-                  </a:solidFill>
-                  <a:headEnd type="none" w="med" len="med"/>
-                  <a:tailEnd type="arrow" w="med" len="med"/>
-                </a:ln>
-              </p:spPr>
-              <p:style>
-                <a:lnRef idx="2">
-                  <a:schemeClr val="accent1"/>
-                </a:lnRef>
-                <a:fillRef idx="0">
-                  <a:schemeClr val="accent1"/>
-                </a:fillRef>
-                <a:effectRef idx="1">
-                  <a:schemeClr val="accent1"/>
-                </a:effectRef>
-                <a:fontRef idx="minor">
-                  <a:schemeClr val="tx1"/>
-                </a:fontRef>
-              </p:style>
-              <p:txBody>
-                <a:bodyPr rtlCol="0" anchor="ctr"/>
-                <a:lstStyle/>
-                <a:p>
-                  <a:pPr algn="ctr"/>
-                  <a:endParaRPr lang="en-US"/>
-                </a:p>
-              </p:txBody>
-            </p:sp>
-            <mc:AlternateContent xmlns:mc="http://schemas.openxmlformats.org/markup-compatibility/2006">
-              <mc:Choice xmlns:a14="http://schemas.microsoft.com/office/drawing/2010/main" Requires="a14">
-                <p:sp>
-                  <p:nvSpPr>
-                    <p:cNvPr id="101" name="TextBox 100">
-                      <a:extLst>
-                        <a:ext uri="{FF2B5EF4-FFF2-40B4-BE49-F238E27FC236}">
-                          <a16:creationId xmlns:a16="http://schemas.microsoft.com/office/drawing/2014/main" id="{43ED1EEF-9CE3-7E49-54CA-0C3C77460C25}"/>
-                        </a:ext>
-                      </a:extLst>
-                    </p:cNvPr>
-                    <p:cNvSpPr txBox="1"/>
-                    <p:nvPr/>
-                  </p:nvSpPr>
-                  <p:spPr>
-                    <a:xfrm>
-                      <a:off x="7781430" y="2905674"/>
-                      <a:ext cx="471763" cy="461665"/>
-                    </a:xfrm>
-                    <a:prstGeom prst="rect">
-                      <a:avLst/>
-                    </a:prstGeom>
-                    <a:noFill/>
-                  </p:spPr>
-                  <p:txBody>
-                    <a:bodyPr wrap="square" rtlCol="0">
-                      <a:spAutoFit/>
-                    </a:bodyPr>
-                    <a:lstStyle/>
-                    <a:p>
-                      <a14:m>
-                        <m:oMathPara xmlns:m="http://schemas.openxmlformats.org/officeDocument/2006/math">
-                          <m:oMathParaPr>
-                            <m:jc m:val="centerGroup"/>
-                          </m:oMathParaPr>
-                          <m:oMath xmlns:m="http://schemas.openxmlformats.org/officeDocument/2006/math">
-                            <m:r>
-                              <a:rPr lang="en-US" sz="2400" i="1" smtClean="0">
-                                <a:ln>
-                                  <a:noFill/>
-                                </a:ln>
-                                <a:solidFill>
-                                  <a:srgbClr val="FFFF00"/>
-                                </a:solidFill>
-                                <a:latin typeface="Cambria Math" panose="02040503050406030204" pitchFamily="18" charset="0"/>
-                              </a:rPr>
-                              <m:t>𝜙</m:t>
-                            </m:r>
-                          </m:oMath>
-                        </m:oMathPara>
-                      </a14:m>
-                      <a:endParaRPr lang="en-US" sz="2400" dirty="0">
-                        <a:ln>
-                          <a:noFill/>
-                        </a:ln>
-                        <a:solidFill>
-                          <a:srgbClr val="FFFF00"/>
-                        </a:solidFill>
-                      </a:endParaRPr>
-                    </a:p>
-                  </p:txBody>
-                </p:sp>
-              </mc:Choice>
-              <mc:Fallback>
-                <p:sp>
-                  <p:nvSpPr>
-                    <p:cNvPr id="101" name="TextBox 100">
-                      <a:extLst>
-                        <a:ext uri="{FF2B5EF4-FFF2-40B4-BE49-F238E27FC236}">
-                          <a16:creationId xmlns:a16="http://schemas.microsoft.com/office/drawing/2014/main" id="{43ED1EEF-9CE3-7E49-54CA-0C3C77460C25}"/>
-                        </a:ext>
-                      </a:extLst>
-                    </p:cNvPr>
-                    <p:cNvSpPr txBox="1">
-                      <a:spLocks noRot="1" noChangeAspect="1" noMove="1" noResize="1" noEditPoints="1" noAdjustHandles="1" noChangeArrowheads="1" noChangeShapeType="1" noTextEdit="1"/>
-                    </p:cNvSpPr>
-                    <p:nvPr/>
-                  </p:nvSpPr>
-                  <p:spPr>
-                    <a:xfrm>
-                      <a:off x="7781430" y="2905674"/>
-                      <a:ext cx="471763" cy="461665"/>
-                    </a:xfrm>
-                    <a:prstGeom prst="rect">
-                      <a:avLst/>
-                    </a:prstGeom>
-                    <a:blipFill>
-                      <a:blip r:embed="rId17"/>
-                      <a:stretch>
-                        <a:fillRect l="-2564" b="-16000"/>
-                      </a:stretch>
-                    </a:blipFill>
-                  </p:spPr>
-                  <p:txBody>
-                    <a:bodyPr/>
-                    <a:lstStyle/>
-                    <a:p>
-                      <a:r>
-                        <a:rPr lang="en-US">
-                          <a:noFill/>
-                        </a:rPr>
-                        <a:t> </a:t>
-                      </a:r>
-                    </a:p>
-                  </p:txBody>
-                </p:sp>
-              </mc:Fallback>
-            </mc:AlternateContent>
-            <mc:AlternateContent xmlns:mc="http://schemas.openxmlformats.org/markup-compatibility/2006">
-              <mc:Choice xmlns:a14="http://schemas.microsoft.com/office/drawing/2010/main" Requires="a14">
-                <p:sp>
-                  <p:nvSpPr>
-                    <p:cNvPr id="102" name="TextBox 101">
-                      <a:extLst>
-                        <a:ext uri="{FF2B5EF4-FFF2-40B4-BE49-F238E27FC236}">
-                          <a16:creationId xmlns:a16="http://schemas.microsoft.com/office/drawing/2014/main" id="{6127D515-1749-EDA4-C574-DD2BB0A093AA}"/>
-                        </a:ext>
-                      </a:extLst>
-                    </p:cNvPr>
-                    <p:cNvSpPr txBox="1"/>
-                    <p:nvPr/>
-                  </p:nvSpPr>
-                  <p:spPr>
-                    <a:xfrm>
-                      <a:off x="7577419" y="3613723"/>
-                      <a:ext cx="471763" cy="461665"/>
-                    </a:xfrm>
-                    <a:prstGeom prst="rect">
-                      <a:avLst/>
-                    </a:prstGeom>
-                    <a:noFill/>
-                  </p:spPr>
-                  <p:txBody>
-                    <a:bodyPr wrap="square" rtlCol="0">
-                      <a:spAutoFit/>
-                    </a:bodyPr>
-                    <a:lstStyle/>
-                    <a:p>
-                      <a14:m>
-                        <m:oMathPara xmlns:m="http://schemas.openxmlformats.org/officeDocument/2006/math">
-                          <m:oMathParaPr>
-                            <m:jc m:val="centerGroup"/>
-                          </m:oMathParaPr>
-                          <m:oMath xmlns:m="http://schemas.openxmlformats.org/officeDocument/2006/math">
-                            <m:r>
-                              <a:rPr lang="en-US" sz="2400" b="0" i="1" smtClean="0">
-                                <a:ln>
-                                  <a:noFill/>
-                                </a:ln>
-                                <a:solidFill>
-                                  <a:srgbClr val="FFFF00"/>
-                                </a:solidFill>
-                                <a:latin typeface="Cambria Math" panose="02040503050406030204" pitchFamily="18" charset="0"/>
-                              </a:rPr>
-                              <m:t>𝜔</m:t>
-                            </m:r>
-                          </m:oMath>
-                        </m:oMathPara>
-                      </a14:m>
-                      <a:endParaRPr lang="en-US" sz="2400" dirty="0">
-                        <a:ln>
-                          <a:noFill/>
-                        </a:ln>
-                        <a:solidFill>
-                          <a:srgbClr val="FFFF00"/>
-                        </a:solidFill>
-                      </a:endParaRPr>
-                    </a:p>
-                  </p:txBody>
-                </p:sp>
-              </mc:Choice>
-              <mc:Fallback>
-                <p:sp>
-                  <p:nvSpPr>
-                    <p:cNvPr id="102" name="TextBox 101">
-                      <a:extLst>
-                        <a:ext uri="{FF2B5EF4-FFF2-40B4-BE49-F238E27FC236}">
-                          <a16:creationId xmlns:a16="http://schemas.microsoft.com/office/drawing/2014/main" id="{6127D515-1749-EDA4-C574-DD2BB0A093AA}"/>
-                        </a:ext>
-                      </a:extLst>
-                    </p:cNvPr>
-                    <p:cNvSpPr txBox="1">
-                      <a:spLocks noRot="1" noChangeAspect="1" noMove="1" noResize="1" noEditPoints="1" noAdjustHandles="1" noChangeArrowheads="1" noChangeShapeType="1" noTextEdit="1"/>
-                    </p:cNvSpPr>
-                    <p:nvPr/>
-                  </p:nvSpPr>
-                  <p:spPr>
-                    <a:xfrm>
-                      <a:off x="7577419" y="3613723"/>
-                      <a:ext cx="471763" cy="461665"/>
-                    </a:xfrm>
-                    <a:prstGeom prst="rect">
-                      <a:avLst/>
-                    </a:prstGeom>
-                    <a:blipFill>
-                      <a:blip r:embed="rId18"/>
-                      <a:stretch>
-                        <a:fillRect/>
-                      </a:stretch>
-                    </a:blipFill>
-                  </p:spPr>
-                  <p:txBody>
-                    <a:bodyPr/>
-                    <a:lstStyle/>
-                    <a:p>
-                      <a:r>
-                        <a:rPr lang="en-US">
-                          <a:noFill/>
-                        </a:rPr>
-                        <a:t> </a:t>
-                      </a:r>
-                    </a:p>
-                  </p:txBody>
-                </p:sp>
-              </mc:Fallback>
-            </mc:AlternateContent>
-            <mc:AlternateContent xmlns:mc="http://schemas.openxmlformats.org/markup-compatibility/2006">
-              <mc:Choice xmlns:a14="http://schemas.microsoft.com/office/drawing/2010/main" Requires="a14">
-                <p:sp>
-                  <p:nvSpPr>
-                    <p:cNvPr id="103" name="TextBox 102">
-                      <a:extLst>
-                        <a:ext uri="{FF2B5EF4-FFF2-40B4-BE49-F238E27FC236}">
-                          <a16:creationId xmlns:a16="http://schemas.microsoft.com/office/drawing/2014/main" id="{0668F678-9DAA-C260-C1D6-9BADAA53E723}"/>
-                        </a:ext>
-                      </a:extLst>
-                    </p:cNvPr>
-                    <p:cNvSpPr txBox="1"/>
-                    <p:nvPr/>
-                  </p:nvSpPr>
-                  <p:spPr>
-                    <a:xfrm>
-                      <a:off x="8612406" y="3382891"/>
-                      <a:ext cx="471763" cy="461665"/>
-                    </a:xfrm>
-                    <a:prstGeom prst="rect">
-                      <a:avLst/>
-                    </a:prstGeom>
-                    <a:noFill/>
-                  </p:spPr>
-                  <p:txBody>
-                    <a:bodyPr wrap="square" rtlCol="0">
-                      <a:spAutoFit/>
-                    </a:bodyPr>
-                    <a:lstStyle/>
-                    <a:p>
-                      <a14:m>
-                        <m:oMathPara xmlns:m="http://schemas.openxmlformats.org/officeDocument/2006/math">
-                          <m:oMathParaPr>
-                            <m:jc m:val="centerGroup"/>
-                          </m:oMathParaPr>
-                          <m:oMath xmlns:m="http://schemas.openxmlformats.org/officeDocument/2006/math">
-                            <m:r>
-                              <a:rPr lang="en-US" sz="2400" b="0" i="1" smtClean="0">
-                                <a:ln>
-                                  <a:noFill/>
-                                </a:ln>
-                                <a:solidFill>
-                                  <a:srgbClr val="FFFF00"/>
-                                </a:solidFill>
-                                <a:latin typeface="Cambria Math" panose="02040503050406030204" pitchFamily="18" charset="0"/>
-                              </a:rPr>
-                              <m:t>𝜒</m:t>
-                            </m:r>
-                          </m:oMath>
-                        </m:oMathPara>
-                      </a14:m>
-                      <a:endParaRPr lang="en-US" sz="2400" dirty="0">
-                        <a:ln>
-                          <a:noFill/>
-                        </a:ln>
-                        <a:solidFill>
-                          <a:srgbClr val="FFFF00"/>
-                        </a:solidFill>
-                      </a:endParaRPr>
-                    </a:p>
-                  </p:txBody>
-                </p:sp>
-              </mc:Choice>
-              <mc:Fallback>
-                <p:sp>
-                  <p:nvSpPr>
-                    <p:cNvPr id="103" name="TextBox 102">
-                      <a:extLst>
-                        <a:ext uri="{FF2B5EF4-FFF2-40B4-BE49-F238E27FC236}">
-                          <a16:creationId xmlns:a16="http://schemas.microsoft.com/office/drawing/2014/main" id="{0668F678-9DAA-C260-C1D6-9BADAA53E723}"/>
-                        </a:ext>
-                      </a:extLst>
-                    </p:cNvPr>
-                    <p:cNvSpPr txBox="1">
-                      <a:spLocks noRot="1" noChangeAspect="1" noMove="1" noResize="1" noEditPoints="1" noAdjustHandles="1" noChangeArrowheads="1" noChangeShapeType="1" noTextEdit="1"/>
-                    </p:cNvSpPr>
-                    <p:nvPr/>
-                  </p:nvSpPr>
-                  <p:spPr>
-                    <a:xfrm>
-                      <a:off x="8612406" y="3382891"/>
-                      <a:ext cx="471763" cy="461665"/>
-                    </a:xfrm>
-                    <a:prstGeom prst="rect">
-                      <a:avLst/>
-                    </a:prstGeom>
-                    <a:blipFill>
-                      <a:blip r:embed="rId19"/>
-                      <a:stretch>
-                        <a:fillRect b="-6579"/>
-                      </a:stretch>
-                    </a:blipFill>
-                  </p:spPr>
-                  <p:txBody>
-                    <a:bodyPr/>
-                    <a:lstStyle/>
-                    <a:p>
-                      <a:r>
-                        <a:rPr lang="en-US">
-                          <a:noFill/>
-                        </a:rPr>
-                        <a:t> </a:t>
-                      </a:r>
-                    </a:p>
-                  </p:txBody>
-                </p:sp>
-              </mc:Fallback>
-            </mc:AlternateContent>
-            <p:cxnSp>
-              <p:nvCxnSpPr>
-                <p:cNvPr id="107" name="Straight Arrow Connector 106">
-                  <a:extLst>
-                    <a:ext uri="{FF2B5EF4-FFF2-40B4-BE49-F238E27FC236}">
-                      <a16:creationId xmlns:a16="http://schemas.microsoft.com/office/drawing/2014/main" id="{1DFE7E19-FD63-922A-4FFE-CF4BE541B118}"/>
-                    </a:ext>
-                  </a:extLst>
-                </p:cNvPr>
-                <p:cNvCxnSpPr>
-                  <a:cxnSpLocks/>
-                </p:cNvCxnSpPr>
-                <p:nvPr/>
-              </p:nvCxnSpPr>
-              <p:spPr>
-                <a:xfrm flipH="1" flipV="1">
-                  <a:off x="8467808" y="1946469"/>
-                  <a:ext cx="489557" cy="8998"/>
-                </a:xfrm>
-                <a:prstGeom prst="straightConnector1">
-                  <a:avLst/>
-                </a:prstGeom>
-                <a:ln w="38100">
-                  <a:solidFill>
-                    <a:srgbClr val="FF0000"/>
-                  </a:solidFill>
-                  <a:tailEnd type="triangle"/>
-                </a:ln>
-              </p:spPr>
-              <p:style>
-                <a:lnRef idx="2">
-                  <a:schemeClr val="accent1"/>
-                </a:lnRef>
-                <a:fillRef idx="0">
-                  <a:schemeClr val="accent1"/>
-                </a:fillRef>
-                <a:effectRef idx="1">
-                  <a:schemeClr val="accent1"/>
-                </a:effectRef>
-                <a:fontRef idx="minor">
-                  <a:schemeClr val="tx1"/>
-                </a:fontRef>
-              </p:style>
-            </p:cxnSp>
-            <p:cxnSp>
-              <p:nvCxnSpPr>
-                <p:cNvPr id="108" name="Straight Arrow Connector 107">
-                  <a:extLst>
-                    <a:ext uri="{FF2B5EF4-FFF2-40B4-BE49-F238E27FC236}">
-                      <a16:creationId xmlns:a16="http://schemas.microsoft.com/office/drawing/2014/main" id="{41CA21A3-7B22-B5DD-263C-51B93D4E3F68}"/>
-                    </a:ext>
-                  </a:extLst>
-                </p:cNvPr>
-                <p:cNvCxnSpPr>
-                  <a:cxnSpLocks/>
-                </p:cNvCxnSpPr>
-                <p:nvPr/>
-              </p:nvCxnSpPr>
-              <p:spPr>
-                <a:xfrm flipH="1" flipV="1">
-                  <a:off x="8945495" y="1428040"/>
-                  <a:ext cx="5232" cy="541308"/>
-                </a:xfrm>
-                <a:prstGeom prst="straightConnector1">
-                  <a:avLst/>
-                </a:prstGeom>
-                <a:ln w="38100">
-                  <a:solidFill>
-                    <a:srgbClr val="FF0000"/>
-                  </a:solidFill>
-                  <a:tailEnd type="triangle"/>
-                </a:ln>
-              </p:spPr>
-              <p:style>
-                <a:lnRef idx="2">
-                  <a:schemeClr val="accent1"/>
-                </a:lnRef>
-                <a:fillRef idx="0">
-                  <a:schemeClr val="accent1"/>
-                </a:fillRef>
-                <a:effectRef idx="1">
-                  <a:schemeClr val="accent1"/>
-                </a:effectRef>
-                <a:fontRef idx="minor">
-                  <a:schemeClr val="tx1"/>
-                </a:fontRef>
-              </p:style>
-            </p:cxnSp>
-            <p:cxnSp>
-              <p:nvCxnSpPr>
-                <p:cNvPr id="109" name="Straight Arrow Connector 108">
-                  <a:extLst>
-                    <a:ext uri="{FF2B5EF4-FFF2-40B4-BE49-F238E27FC236}">
-                      <a16:creationId xmlns:a16="http://schemas.microsoft.com/office/drawing/2014/main" id="{EAFB59C4-3BBE-2948-6250-8EC557C875B4}"/>
-                    </a:ext>
-                  </a:extLst>
-                </p:cNvPr>
-                <p:cNvCxnSpPr>
-                  <a:cxnSpLocks/>
-                </p:cNvCxnSpPr>
-                <p:nvPr/>
-              </p:nvCxnSpPr>
-              <p:spPr>
-                <a:xfrm flipV="1">
-                  <a:off x="8942125" y="1669569"/>
-                  <a:ext cx="263920" cy="283560"/>
-                </a:xfrm>
-                <a:prstGeom prst="straightConnector1">
-                  <a:avLst/>
-                </a:prstGeom>
-                <a:ln w="38100">
-                  <a:solidFill>
-                    <a:srgbClr val="FF0000"/>
-                  </a:solidFill>
-                  <a:prstDash val="sysDot"/>
-                  <a:tailEnd type="triangle"/>
-                </a:ln>
-              </p:spPr>
-              <p:style>
-                <a:lnRef idx="2">
-                  <a:schemeClr val="accent1"/>
-                </a:lnRef>
-                <a:fillRef idx="0">
-                  <a:schemeClr val="accent1"/>
-                </a:fillRef>
-                <a:effectRef idx="1">
-                  <a:schemeClr val="accent1"/>
-                </a:effectRef>
-                <a:fontRef idx="minor">
-                  <a:schemeClr val="tx1"/>
-                </a:fontRef>
-              </p:style>
-            </p:cxnSp>
-            <mc:AlternateContent xmlns:mc="http://schemas.openxmlformats.org/markup-compatibility/2006">
-              <mc:Choice xmlns:a14="http://schemas.microsoft.com/office/drawing/2010/main" Requires="a14">
-                <p:sp>
-                  <p:nvSpPr>
-                    <p:cNvPr id="110" name="TextBox 109">
-                      <a:extLst>
-                        <a:ext uri="{FF2B5EF4-FFF2-40B4-BE49-F238E27FC236}">
-                          <a16:creationId xmlns:a16="http://schemas.microsoft.com/office/drawing/2014/main" id="{E4E908AB-E1A2-59FA-75E3-061E711F1242}"/>
-                        </a:ext>
-                      </a:extLst>
-                    </p:cNvPr>
-                    <p:cNvSpPr txBox="1"/>
-                    <p:nvPr/>
-                  </p:nvSpPr>
-                  <p:spPr>
-                    <a:xfrm>
-                      <a:off x="8288746" y="976558"/>
-                      <a:ext cx="1214538" cy="461665"/>
-                    </a:xfrm>
-                    <a:prstGeom prst="rect">
-                      <a:avLst/>
-                    </a:prstGeom>
-                    <a:noFill/>
-                  </p:spPr>
-                  <p:txBody>
-                    <a:bodyPr wrap="square" rtlCol="0">
-                      <a:spAutoFit/>
-                    </a:bodyPr>
-                    <a:lstStyle/>
-                    <a:p>
-                      <a14:m>
-                        <m:oMathPara xmlns:m="http://schemas.openxmlformats.org/officeDocument/2006/math">
-                          <m:oMathParaPr>
-                            <m:jc m:val="centerGroup"/>
-                          </m:oMathParaPr>
-                          <m:oMath xmlns:m="http://schemas.openxmlformats.org/officeDocument/2006/math">
-                            <m:sSub>
-                              <m:sSubPr>
-                                <m:ctrlPr>
-                                  <a:rPr lang="en-US" sz="2400" b="0" i="1" smtClean="0">
-                                    <a:ln>
-                                      <a:noFill/>
-                                    </a:ln>
-                                    <a:solidFill>
-                                      <a:srgbClr val="FF0000"/>
-                                    </a:solidFill>
-                                    <a:latin typeface="Cambria Math" panose="02040503050406030204" pitchFamily="18" charset="0"/>
-                                  </a:rPr>
-                                </m:ctrlPr>
-                              </m:sSubPr>
-                              <m:e>
-                                <m:r>
-                                  <a:rPr lang="en-US" sz="2400" b="0" i="1" smtClean="0">
-                                    <a:ln>
-                                      <a:noFill/>
-                                    </a:ln>
-                                    <a:solidFill>
-                                      <a:srgbClr val="FF0000"/>
-                                    </a:solidFill>
-                                    <a:latin typeface="Cambria Math" panose="02040503050406030204" pitchFamily="18" charset="0"/>
-                                  </a:rPr>
-                                  <m:t>𝑦</m:t>
-                                </m:r>
-                              </m:e>
-                              <m:sub>
-                                <m:r>
-                                  <a:rPr lang="en-US" sz="2400" b="0" i="1" smtClean="0">
-                                    <a:ln>
-                                      <a:noFill/>
-                                    </a:ln>
-                                    <a:solidFill>
-                                      <a:srgbClr val="FF0000"/>
-                                    </a:solidFill>
-                                    <a:latin typeface="Cambria Math" panose="02040503050406030204" pitchFamily="18" charset="0"/>
-                                  </a:rPr>
-                                  <m:t>𝑑</m:t>
-                                </m:r>
-                              </m:sub>
-                            </m:sSub>
-                          </m:oMath>
-                        </m:oMathPara>
-                      </a14:m>
-                      <a:endParaRPr lang="en-US" sz="2400" dirty="0">
-                        <a:ln>
-                          <a:noFill/>
-                        </a:ln>
-                        <a:solidFill>
-                          <a:srgbClr val="FF0000"/>
-                        </a:solidFill>
-                      </a:endParaRPr>
-                    </a:p>
-                  </p:txBody>
-                </p:sp>
-              </mc:Choice>
-              <mc:Fallback>
-                <p:sp>
-                  <p:nvSpPr>
-                    <p:cNvPr id="110" name="TextBox 109">
-                      <a:extLst>
-                        <a:ext uri="{FF2B5EF4-FFF2-40B4-BE49-F238E27FC236}">
-                          <a16:creationId xmlns:a16="http://schemas.microsoft.com/office/drawing/2014/main" id="{E4E908AB-E1A2-59FA-75E3-061E711F1242}"/>
-                        </a:ext>
-                      </a:extLst>
-                    </p:cNvPr>
-                    <p:cNvSpPr txBox="1">
-                      <a:spLocks noRot="1" noChangeAspect="1" noMove="1" noResize="1" noEditPoints="1" noAdjustHandles="1" noChangeArrowheads="1" noChangeShapeType="1" noTextEdit="1"/>
-                    </p:cNvSpPr>
-                    <p:nvPr/>
-                  </p:nvSpPr>
-                  <p:spPr>
-                    <a:xfrm>
-                      <a:off x="8288746" y="976558"/>
-                      <a:ext cx="1214538" cy="461665"/>
-                    </a:xfrm>
-                    <a:prstGeom prst="rect">
-                      <a:avLst/>
-                    </a:prstGeom>
-                    <a:blipFill>
-                      <a:blip r:embed="rId20"/>
-                      <a:stretch>
-                        <a:fillRect b="-9211"/>
-                      </a:stretch>
-                    </a:blipFill>
-                  </p:spPr>
-                  <p:txBody>
-                    <a:bodyPr/>
-                    <a:lstStyle/>
-                    <a:p>
-                      <a:r>
-                        <a:rPr lang="en-US">
-                          <a:noFill/>
-                        </a:rPr>
-                        <a:t> </a:t>
-                      </a:r>
-                    </a:p>
-                  </p:txBody>
-                </p:sp>
-              </mc:Fallback>
-            </mc:AlternateContent>
-            <mc:AlternateContent xmlns:mc="http://schemas.openxmlformats.org/markup-compatibility/2006">
-              <mc:Choice xmlns:a14="http://schemas.microsoft.com/office/drawing/2010/main" Requires="a14">
-                <p:sp>
-                  <p:nvSpPr>
-                    <p:cNvPr id="111" name="TextBox 110">
-                      <a:extLst>
-                        <a:ext uri="{FF2B5EF4-FFF2-40B4-BE49-F238E27FC236}">
-                          <a16:creationId xmlns:a16="http://schemas.microsoft.com/office/drawing/2014/main" id="{C94ADF84-C945-D8AC-BCB8-C5E39C0FDE1E}"/>
-                        </a:ext>
-                      </a:extLst>
-                    </p:cNvPr>
-                    <p:cNvSpPr txBox="1"/>
-                    <p:nvPr/>
-                  </p:nvSpPr>
-                  <p:spPr>
-                    <a:xfrm>
-                      <a:off x="8957365" y="1223109"/>
-                      <a:ext cx="471763" cy="461665"/>
-                    </a:xfrm>
-                    <a:prstGeom prst="rect">
-                      <a:avLst/>
-                    </a:prstGeom>
-                    <a:noFill/>
-                  </p:spPr>
-                  <p:txBody>
-                    <a:bodyPr wrap="square" rtlCol="0">
-                      <a:spAutoFit/>
-                    </a:bodyPr>
-                    <a:lstStyle/>
-                    <a:p>
-                      <a14:m>
-                        <m:oMathPara xmlns:m="http://schemas.openxmlformats.org/officeDocument/2006/math">
-                          <m:oMathParaPr>
-                            <m:jc m:val="centerGroup"/>
-                          </m:oMathParaPr>
-                          <m:oMath xmlns:m="http://schemas.openxmlformats.org/officeDocument/2006/math">
-                            <m:sSub>
-                              <m:sSubPr>
-                                <m:ctrlPr>
-                                  <a:rPr lang="en-US" sz="2400" b="0" i="1" smtClean="0">
-                                    <a:ln>
-                                      <a:noFill/>
-                                    </a:ln>
-                                    <a:solidFill>
-                                      <a:srgbClr val="FF0000"/>
-                                    </a:solidFill>
-                                    <a:latin typeface="Cambria Math" panose="02040503050406030204" pitchFamily="18" charset="0"/>
-                                  </a:rPr>
-                                </m:ctrlPr>
-                              </m:sSubPr>
-                              <m:e>
-                                <m:r>
-                                  <a:rPr lang="en-US" sz="2400" i="1" smtClean="0">
-                                    <a:ln>
-                                      <a:noFill/>
-                                    </a:ln>
-                                    <a:solidFill>
-                                      <a:srgbClr val="FF0000"/>
-                                    </a:solidFill>
-                                    <a:latin typeface="Cambria Math" panose="02040503050406030204" pitchFamily="18" charset="0"/>
-                                  </a:rPr>
-                                  <m:t>𝑧</m:t>
-                                </m:r>
-                              </m:e>
-                              <m:sub>
-                                <m:r>
-                                  <a:rPr lang="en-US" sz="2400" b="0" i="1" smtClean="0">
-                                    <a:ln>
-                                      <a:noFill/>
-                                    </a:ln>
-                                    <a:solidFill>
-                                      <a:srgbClr val="FF0000"/>
-                                    </a:solidFill>
-                                    <a:latin typeface="Cambria Math" panose="02040503050406030204" pitchFamily="18" charset="0"/>
-                                  </a:rPr>
-                                  <m:t>𝑑</m:t>
-                                </m:r>
-                              </m:sub>
-                            </m:sSub>
-                          </m:oMath>
-                        </m:oMathPara>
-                      </a14:m>
-                      <a:endParaRPr lang="en-US" sz="2400" dirty="0">
-                        <a:ln>
-                          <a:noFill/>
-                        </a:ln>
-                        <a:solidFill>
-                          <a:srgbClr val="FF0000"/>
-                        </a:solidFill>
-                      </a:endParaRPr>
-                    </a:p>
-                  </p:txBody>
-                </p:sp>
-              </mc:Choice>
-              <mc:Fallback>
-                <p:sp>
-                  <p:nvSpPr>
-                    <p:cNvPr id="111" name="TextBox 110">
-                      <a:extLst>
-                        <a:ext uri="{FF2B5EF4-FFF2-40B4-BE49-F238E27FC236}">
-                          <a16:creationId xmlns:a16="http://schemas.microsoft.com/office/drawing/2014/main" id="{C94ADF84-C945-D8AC-BCB8-C5E39C0FDE1E}"/>
-                        </a:ext>
-                      </a:extLst>
-                    </p:cNvPr>
-                    <p:cNvSpPr txBox="1">
-                      <a:spLocks noRot="1" noChangeAspect="1" noMove="1" noResize="1" noEditPoints="1" noAdjustHandles="1" noChangeArrowheads="1" noChangeShapeType="1" noTextEdit="1"/>
-                    </p:cNvSpPr>
-                    <p:nvPr/>
-                  </p:nvSpPr>
-                  <p:spPr>
-                    <a:xfrm>
-                      <a:off x="8957365" y="1223109"/>
-                      <a:ext cx="471763" cy="461665"/>
-                    </a:xfrm>
-                    <a:prstGeom prst="rect">
-                      <a:avLst/>
-                    </a:prstGeom>
-                    <a:blipFill>
-                      <a:blip r:embed="rId21"/>
-                      <a:stretch>
-                        <a:fillRect b="-1333"/>
-                      </a:stretch>
-                    </a:blipFill>
-                  </p:spPr>
-                  <p:txBody>
-                    <a:bodyPr/>
-                    <a:lstStyle/>
-                    <a:p>
-                      <a:r>
-                        <a:rPr lang="en-US">
-                          <a:noFill/>
-                        </a:rPr>
-                        <a:t> </a:t>
-                      </a:r>
-                    </a:p>
-                  </p:txBody>
-                </p:sp>
-              </mc:Fallback>
-            </mc:AlternateContent>
-            <mc:AlternateContent xmlns:mc="http://schemas.openxmlformats.org/markup-compatibility/2006">
-              <mc:Choice xmlns:a14="http://schemas.microsoft.com/office/drawing/2010/main" Requires="a14">
-                <p:sp>
-                  <p:nvSpPr>
-                    <p:cNvPr id="112" name="TextBox 111">
-                      <a:extLst>
-                        <a:ext uri="{FF2B5EF4-FFF2-40B4-BE49-F238E27FC236}">
-                          <a16:creationId xmlns:a16="http://schemas.microsoft.com/office/drawing/2014/main" id="{13E65EE4-9F64-6B93-C0B8-7932663E4328}"/>
-                        </a:ext>
-                      </a:extLst>
-                    </p:cNvPr>
-                    <p:cNvSpPr txBox="1"/>
-                    <p:nvPr/>
-                  </p:nvSpPr>
-                  <p:spPr>
-                    <a:xfrm>
-                      <a:off x="8071103" y="1483099"/>
-                      <a:ext cx="580305" cy="461665"/>
-                    </a:xfrm>
-                    <a:prstGeom prst="rect">
-                      <a:avLst/>
-                    </a:prstGeom>
-                    <a:noFill/>
-                  </p:spPr>
-                  <p:txBody>
-                    <a:bodyPr wrap="square" rtlCol="0">
-                      <a:spAutoFit/>
-                    </a:bodyPr>
-                    <a:lstStyle/>
-                    <a:p>
-                      <a14:m>
-                        <m:oMathPara xmlns:m="http://schemas.openxmlformats.org/officeDocument/2006/math">
-                          <m:oMathParaPr>
-                            <m:jc m:val="centerGroup"/>
-                          </m:oMathParaPr>
-                          <m:oMath xmlns:m="http://schemas.openxmlformats.org/officeDocument/2006/math">
-                            <m:sSub>
-                              <m:sSubPr>
-                                <m:ctrlPr>
-                                  <a:rPr lang="en-US" sz="2400" b="0" i="1" smtClean="0">
-                                    <a:ln>
-                                      <a:noFill/>
-                                    </a:ln>
-                                    <a:solidFill>
-                                      <a:srgbClr val="FF0000"/>
-                                    </a:solidFill>
-                                    <a:latin typeface="Cambria Math" panose="02040503050406030204" pitchFamily="18" charset="0"/>
-                                  </a:rPr>
-                                </m:ctrlPr>
-                              </m:sSubPr>
-                              <m:e>
-                                <m:r>
-                                  <a:rPr lang="en-US" sz="2400" i="1" smtClean="0">
-                                    <a:ln>
-                                      <a:noFill/>
-                                    </a:ln>
-                                    <a:solidFill>
-                                      <a:srgbClr val="FF0000"/>
-                                    </a:solidFill>
-                                    <a:latin typeface="Cambria Math" panose="02040503050406030204" pitchFamily="18" charset="0"/>
-                                  </a:rPr>
-                                  <m:t>𝑥</m:t>
-                                </m:r>
-                              </m:e>
-                              <m:sub>
-                                <m:r>
-                                  <a:rPr lang="en-US" sz="2400" b="0" i="1" smtClean="0">
-                                    <a:ln>
-                                      <a:noFill/>
-                                    </a:ln>
-                                    <a:solidFill>
-                                      <a:srgbClr val="FF0000"/>
-                                    </a:solidFill>
-                                    <a:latin typeface="Cambria Math" panose="02040503050406030204" pitchFamily="18" charset="0"/>
-                                  </a:rPr>
-                                  <m:t>𝑑</m:t>
-                                </m:r>
-                              </m:sub>
-                            </m:sSub>
-                          </m:oMath>
-                        </m:oMathPara>
-                      </a14:m>
-                      <a:endParaRPr lang="en-US" sz="2400" dirty="0">
-                        <a:ln>
-                          <a:noFill/>
-                        </a:ln>
-                        <a:solidFill>
-                          <a:srgbClr val="FF0000"/>
-                        </a:solidFill>
-                      </a:endParaRPr>
-                    </a:p>
-                  </p:txBody>
-                </p:sp>
-              </mc:Choice>
-              <mc:Fallback>
-                <p:sp>
-                  <p:nvSpPr>
-                    <p:cNvPr id="112" name="TextBox 111">
-                      <a:extLst>
-                        <a:ext uri="{FF2B5EF4-FFF2-40B4-BE49-F238E27FC236}">
-                          <a16:creationId xmlns:a16="http://schemas.microsoft.com/office/drawing/2014/main" id="{13E65EE4-9F64-6B93-C0B8-7932663E4328}"/>
-                        </a:ext>
-                      </a:extLst>
-                    </p:cNvPr>
-                    <p:cNvSpPr txBox="1">
-                      <a:spLocks noRot="1" noChangeAspect="1" noMove="1" noResize="1" noEditPoints="1" noAdjustHandles="1" noChangeArrowheads="1" noChangeShapeType="1" noTextEdit="1"/>
-                    </p:cNvSpPr>
-                    <p:nvPr/>
-                  </p:nvSpPr>
-                  <p:spPr>
-                    <a:xfrm>
-                      <a:off x="8071103" y="1483099"/>
-                      <a:ext cx="580305" cy="461665"/>
-                    </a:xfrm>
-                    <a:prstGeom prst="rect">
-                      <a:avLst/>
-                    </a:prstGeom>
-                    <a:blipFill>
-                      <a:blip r:embed="rId22"/>
-                      <a:stretch>
-                        <a:fillRect b="-1316"/>
-                      </a:stretch>
-                    </a:blipFill>
-                  </p:spPr>
-                  <p:txBody>
-                    <a:bodyPr/>
-                    <a:lstStyle/>
-                    <a:p>
-                      <a:r>
-                        <a:rPr lang="en-US">
-                          <a:noFill/>
-                        </a:rPr>
-                        <a:t> </a:t>
-                      </a:r>
-                    </a:p>
-                  </p:txBody>
-                </p:sp>
-              </mc:Fallback>
-            </mc:AlternateContent>
-          </p:grpSp>
-        </p:grpSp>
-        <p:sp>
-          <p:nvSpPr>
-            <p:cNvPr id="123" name="TextBox 122">
-              <a:extLst>
-                <a:ext uri="{FF2B5EF4-FFF2-40B4-BE49-F238E27FC236}">
-                  <a16:creationId xmlns:a16="http://schemas.microsoft.com/office/drawing/2014/main" id="{8D03BD76-B2DF-0FCB-D024-C0A0E2EDF0C7}"/>
-                </a:ext>
-              </a:extLst>
-            </p:cNvPr>
-            <p:cNvSpPr txBox="1"/>
-            <p:nvPr/>
-          </p:nvSpPr>
-          <p:spPr>
-            <a:xfrm>
-              <a:off x="6398969" y="5377608"/>
-              <a:ext cx="2072640" cy="369332"/>
-            </a:xfrm>
-            <a:prstGeom prst="rect">
-              <a:avLst/>
-            </a:prstGeom>
-            <a:noFill/>
-          </p:spPr>
-          <p:txBody>
-            <a:bodyPr wrap="square" rtlCol="0">
-              <a:spAutoFit/>
-            </a:bodyPr>
-            <a:lstStyle/>
-            <a:p>
-              <a:r>
-                <a:rPr lang="en-US" dirty="0">
-                  <a:solidFill>
-                    <a:srgbClr val="FFC000"/>
-                  </a:solidFill>
-                </a:rPr>
-                <a:t>X-ray beam</a:t>
-              </a:r>
-            </a:p>
-          </p:txBody>
-        </p:sp>
-      </p:grpSp>
       <p:cxnSp>
         <p:nvCxnSpPr>
           <p:cNvPr id="166" name="Straight Arrow Connector 165">
@@ -8815,7 +6128,7 @@
                 <a:avLst/>
               </a:prstGeom>
               <a:blipFill>
-                <a:blip r:embed="rId23"/>
+                <a:blip r:embed="rId13"/>
                 <a:stretch>
                   <a:fillRect/>
                 </a:stretch>
@@ -8836,14 +6149,2679 @@
           </p:sp>
         </mc:Fallback>
       </mc:AlternateContent>
-      <mc:AlternateContent xmlns:mc="http://schemas.openxmlformats.org/markup-compatibility/2006">
-        <mc:Choice xmlns:a14="http://schemas.microsoft.com/office/drawing/2010/main" Requires="a14">
+      <p:grpSp>
+        <p:nvGrpSpPr>
+          <p:cNvPr id="178" name="Group 177">
+            <a:extLst>
+              <a:ext uri="{FF2B5EF4-FFF2-40B4-BE49-F238E27FC236}">
+                <a16:creationId xmlns:a16="http://schemas.microsoft.com/office/drawing/2014/main" id="{193E0BF2-34C4-228A-1D11-2EA9A99226DF}"/>
+              </a:ext>
+            </a:extLst>
+          </p:cNvPr>
+          <p:cNvGrpSpPr/>
+          <p:nvPr/>
+        </p:nvGrpSpPr>
+        <p:grpSpPr>
+          <a:xfrm>
+            <a:off x="6328074" y="896230"/>
+            <a:ext cx="4476565" cy="4973320"/>
+            <a:chOff x="6328074" y="896230"/>
+            <a:chExt cx="4476565" cy="4973320"/>
+          </a:xfrm>
+        </p:grpSpPr>
+        <p:grpSp>
+          <p:nvGrpSpPr>
+            <p:cNvPr id="165" name="Group 164">
+              <a:extLst>
+                <a:ext uri="{FF2B5EF4-FFF2-40B4-BE49-F238E27FC236}">
+                  <a16:creationId xmlns:a16="http://schemas.microsoft.com/office/drawing/2014/main" id="{FB47E748-DD75-567B-3F5D-8F3C1D55FF39}"/>
+                </a:ext>
+              </a:extLst>
+            </p:cNvPr>
+            <p:cNvGrpSpPr/>
+            <p:nvPr/>
+          </p:nvGrpSpPr>
+          <p:grpSpPr>
+            <a:xfrm>
+              <a:off x="6328074" y="896230"/>
+              <a:ext cx="4476565" cy="4973320"/>
+              <a:chOff x="6328074" y="896230"/>
+              <a:chExt cx="4476565" cy="4973320"/>
+            </a:xfrm>
+          </p:grpSpPr>
+          <p:grpSp>
+            <p:nvGrpSpPr>
+              <p:cNvPr id="119" name="Group 118">
+                <a:extLst>
+                  <a:ext uri="{FF2B5EF4-FFF2-40B4-BE49-F238E27FC236}">
+                    <a16:creationId xmlns:a16="http://schemas.microsoft.com/office/drawing/2014/main" id="{9C6B6D6C-7B6B-DACC-AA77-58E3CBB35040}"/>
+                  </a:ext>
+                </a:extLst>
+              </p:cNvPr>
+              <p:cNvGrpSpPr/>
+              <p:nvPr/>
+            </p:nvGrpSpPr>
+            <p:grpSpPr>
+              <a:xfrm>
+                <a:off x="6328074" y="896230"/>
+                <a:ext cx="4476565" cy="4973320"/>
+                <a:chOff x="6328074" y="896230"/>
+                <a:chExt cx="4476565" cy="4973320"/>
+              </a:xfrm>
+            </p:grpSpPr>
+            <p:sp>
+              <p:nvSpPr>
+                <p:cNvPr id="118" name="Rectangle 117">
+                  <a:extLst>
+                    <a:ext uri="{FF2B5EF4-FFF2-40B4-BE49-F238E27FC236}">
+                      <a16:creationId xmlns:a16="http://schemas.microsoft.com/office/drawing/2014/main" id="{028312D0-345A-FB8B-F2D8-51248F4D42CE}"/>
+                    </a:ext>
+                  </a:extLst>
+                </p:cNvPr>
+                <p:cNvSpPr/>
+                <p:nvPr/>
+              </p:nvSpPr>
+              <p:spPr>
+                <a:xfrm>
+                  <a:off x="6328074" y="896230"/>
+                  <a:ext cx="4476565" cy="4973320"/>
+                </a:xfrm>
+                <a:prstGeom prst="rect">
+                  <a:avLst/>
+                </a:prstGeom>
+                <a:solidFill>
+                  <a:schemeClr val="bg1"/>
+                </a:solidFill>
+              </p:spPr>
+              <p:style>
+                <a:lnRef idx="2">
+                  <a:schemeClr val="accent1">
+                    <a:shade val="15000"/>
+                  </a:schemeClr>
+                </a:lnRef>
+                <a:fillRef idx="1">
+                  <a:schemeClr val="accent1"/>
+                </a:fillRef>
+                <a:effectRef idx="0">
+                  <a:schemeClr val="accent1"/>
+                </a:effectRef>
+                <a:fontRef idx="minor">
+                  <a:schemeClr val="lt1"/>
+                </a:fontRef>
+              </p:style>
+              <p:txBody>
+                <a:bodyPr rtlCol="0" anchor="ctr"/>
+                <a:lstStyle/>
+                <a:p>
+                  <a:pPr algn="ctr"/>
+                  <a:endParaRPr lang="en-US" dirty="0"/>
+                </a:p>
+              </p:txBody>
+            </p:sp>
+            <p:grpSp>
+              <p:nvGrpSpPr>
+                <p:cNvPr id="116" name="Group 115">
+                  <a:extLst>
+                    <a:ext uri="{FF2B5EF4-FFF2-40B4-BE49-F238E27FC236}">
+                      <a16:creationId xmlns:a16="http://schemas.microsoft.com/office/drawing/2014/main" id="{0551DB48-29E0-D677-0C07-A3CF5A2A2998}"/>
+                    </a:ext>
+                  </a:extLst>
+                </p:cNvPr>
+                <p:cNvGrpSpPr/>
+                <p:nvPr/>
+              </p:nvGrpSpPr>
+              <p:grpSpPr>
+                <a:xfrm>
+                  <a:off x="6979911" y="973536"/>
+                  <a:ext cx="3348036" cy="4365544"/>
+                  <a:chOff x="6979911" y="973536"/>
+                  <a:chExt cx="3348036" cy="4365544"/>
+                </a:xfrm>
+              </p:grpSpPr>
+              <p:pic>
+                <p:nvPicPr>
+                  <p:cNvPr id="73" name="Picture 10">
+                    <a:extLst>
+                      <a:ext uri="{FF2B5EF4-FFF2-40B4-BE49-F238E27FC236}">
+                        <a16:creationId xmlns:a16="http://schemas.microsoft.com/office/drawing/2014/main" id="{5BC98E7B-033C-2BE4-B811-D5A794543182}"/>
+                      </a:ext>
+                    </a:extLst>
+                  </p:cNvPr>
+                  <p:cNvPicPr>
+                    <a:picLocks noChangeAspect="1" noChangeArrowheads="1"/>
+                  </p:cNvPicPr>
+                  <p:nvPr/>
+                </p:nvPicPr>
+                <p:blipFill rotWithShape="1">
+                  <a:blip r:embed="rId2" cstate="hqprint">
+                    <a:extLst>
+                      <a:ext uri="{28A0092B-C50C-407E-A947-70E740481C1C}">
+                        <a14:useLocalDpi xmlns:a14="http://schemas.microsoft.com/office/drawing/2010/main"/>
+                      </a:ext>
+                    </a:extLst>
+                  </a:blip>
+                  <a:srcRect l="14125" t="21826" r="49123" b="31208"/>
+                  <a:stretch>
+                    <a:fillRect/>
+                  </a:stretch>
+                </p:blipFill>
+                <p:spPr bwMode="auto">
+                  <a:xfrm>
+                    <a:off x="7935704" y="1126293"/>
+                    <a:ext cx="1886849" cy="1458264"/>
+                  </a:xfrm>
+                  <a:prstGeom prst="rect">
+                    <a:avLst/>
+                  </a:prstGeom>
+                  <a:noFill/>
+                  <a:extLst>
+                    <a:ext uri="{909E8E84-426E-40DD-AFC4-6F175D3DCCD1}">
+                      <a14:hiddenFill xmlns:a14="http://schemas.microsoft.com/office/drawing/2010/main">
+                        <a:solidFill>
+                          <a:srgbClr val="FFFFFF"/>
+                        </a:solidFill>
+                      </a14:hiddenFill>
+                    </a:ext>
+                  </a:extLst>
+                </p:spPr>
+              </p:pic>
+              <p:cxnSp>
+                <p:nvCxnSpPr>
+                  <p:cNvPr id="74" name="Straight Arrow Connector 73">
+                    <a:extLst>
+                      <a:ext uri="{FF2B5EF4-FFF2-40B4-BE49-F238E27FC236}">
+                        <a16:creationId xmlns:a16="http://schemas.microsoft.com/office/drawing/2014/main" id="{9EF40B54-E5AB-73D8-7250-465BDD2A165E}"/>
+                      </a:ext>
+                    </a:extLst>
+                  </p:cNvPr>
+                  <p:cNvCxnSpPr>
+                    <a:cxnSpLocks/>
+                  </p:cNvCxnSpPr>
+                  <p:nvPr/>
+                </p:nvCxnSpPr>
+                <p:spPr>
+                  <a:xfrm flipV="1">
+                    <a:off x="8354062" y="1974208"/>
+                    <a:ext cx="1326300" cy="1808805"/>
+                  </a:xfrm>
+                  <a:prstGeom prst="straightConnector1">
+                    <a:avLst/>
+                  </a:prstGeom>
+                  <a:ln w="38100">
+                    <a:solidFill>
+                      <a:srgbClr val="FFC000"/>
+                    </a:solidFill>
+                    <a:tailEnd type="triangle"/>
+                  </a:ln>
+                </p:spPr>
+                <p:style>
+                  <a:lnRef idx="2">
+                    <a:schemeClr val="accent1"/>
+                  </a:lnRef>
+                  <a:fillRef idx="0">
+                    <a:schemeClr val="accent1"/>
+                  </a:fillRef>
+                  <a:effectRef idx="1">
+                    <a:schemeClr val="accent1"/>
+                  </a:effectRef>
+                  <a:fontRef idx="minor">
+                    <a:schemeClr val="tx1"/>
+                  </a:fontRef>
+                </p:style>
+              </p:cxnSp>
+              <p:cxnSp>
+                <p:nvCxnSpPr>
+                  <p:cNvPr id="75" name="Straight Arrow Connector 74">
+                    <a:extLst>
+                      <a:ext uri="{FF2B5EF4-FFF2-40B4-BE49-F238E27FC236}">
+                        <a16:creationId xmlns:a16="http://schemas.microsoft.com/office/drawing/2014/main" id="{EAA7A676-AD4D-088F-B410-D190A90A6C67}"/>
+                      </a:ext>
+                    </a:extLst>
+                  </p:cNvPr>
+                  <p:cNvCxnSpPr>
+                    <a:cxnSpLocks/>
+                  </p:cNvCxnSpPr>
+                  <p:nvPr/>
+                </p:nvCxnSpPr>
+                <p:spPr>
+                  <a:xfrm flipV="1">
+                    <a:off x="8338822" y="1951569"/>
+                    <a:ext cx="611905" cy="1850171"/>
+                  </a:xfrm>
+                  <a:prstGeom prst="straightConnector1">
+                    <a:avLst/>
+                  </a:prstGeom>
+                  <a:ln w="38100">
+                    <a:solidFill>
+                      <a:schemeClr val="accent1">
+                        <a:lumMod val="20000"/>
+                        <a:lumOff val="80000"/>
+                      </a:schemeClr>
+                    </a:solidFill>
+                    <a:prstDash val="sysDash"/>
+                    <a:tailEnd type="triangle"/>
+                  </a:ln>
+                </p:spPr>
+                <p:style>
+                  <a:lnRef idx="2">
+                    <a:schemeClr val="accent1"/>
+                  </a:lnRef>
+                  <a:fillRef idx="0">
+                    <a:schemeClr val="accent1"/>
+                  </a:fillRef>
+                  <a:effectRef idx="1">
+                    <a:schemeClr val="accent1"/>
+                  </a:effectRef>
+                  <a:fontRef idx="minor">
+                    <a:schemeClr val="tx1"/>
+                  </a:fontRef>
+                </p:style>
+              </p:cxnSp>
+              <p:sp>
+                <p:nvSpPr>
+                  <p:cNvPr id="76" name="Rectangle 75">
+                    <a:extLst>
+                      <a:ext uri="{FF2B5EF4-FFF2-40B4-BE49-F238E27FC236}">
+                        <a16:creationId xmlns:a16="http://schemas.microsoft.com/office/drawing/2014/main" id="{CD33A66E-A3E5-D5CA-6343-B618303D33A6}"/>
+                      </a:ext>
+                    </a:extLst>
+                  </p:cNvPr>
+                  <p:cNvSpPr/>
+                  <p:nvPr/>
+                </p:nvSpPr>
+                <p:spPr>
+                  <a:xfrm>
+                    <a:off x="7524460" y="2716641"/>
+                    <a:ext cx="1828800" cy="1828800"/>
+                  </a:xfrm>
+                  <a:prstGeom prst="rect">
+                    <a:avLst/>
+                  </a:prstGeom>
+                  <a:solidFill>
+                    <a:schemeClr val="bg2">
+                      <a:lumMod val="90000"/>
+                    </a:schemeClr>
+                  </a:solidFill>
+                  <a:scene3d>
+                    <a:camera prst="isometricOffAxis2Left"/>
+                    <a:lightRig rig="threePt" dir="t"/>
+                  </a:scene3d>
+                  <a:sp3d extrusionH="127000"/>
+                </p:spPr>
+                <p:style>
+                  <a:lnRef idx="2">
+                    <a:schemeClr val="accent1">
+                      <a:shade val="15000"/>
+                    </a:schemeClr>
+                  </a:lnRef>
+                  <a:fillRef idx="1">
+                    <a:schemeClr val="accent1"/>
+                  </a:fillRef>
+                  <a:effectRef idx="0">
+                    <a:schemeClr val="accent1"/>
+                  </a:effectRef>
+                  <a:fontRef idx="minor">
+                    <a:schemeClr val="lt1"/>
+                  </a:fontRef>
+                </p:style>
+                <p:txBody>
+                  <a:bodyPr rtlCol="0" anchor="ctr"/>
+                  <a:lstStyle/>
+                  <a:p>
+                    <a:pPr algn="ctr"/>
+                    <a:endParaRPr lang="en-US"/>
+                  </a:p>
+                </p:txBody>
+              </p:sp>
+              <p:sp>
+                <p:nvSpPr>
+                  <p:cNvPr id="77" name="Rectangle 76">
+                    <a:extLst>
+                      <a:ext uri="{FF2B5EF4-FFF2-40B4-BE49-F238E27FC236}">
+                        <a16:creationId xmlns:a16="http://schemas.microsoft.com/office/drawing/2014/main" id="{99A0937C-F92B-63E4-912B-4C29B04A498B}"/>
+                      </a:ext>
+                    </a:extLst>
+                  </p:cNvPr>
+                  <p:cNvSpPr/>
+                  <p:nvPr/>
+                </p:nvSpPr>
+                <p:spPr>
+                  <a:xfrm>
+                    <a:off x="7514255" y="2640441"/>
+                    <a:ext cx="182880" cy="1828800"/>
+                  </a:xfrm>
+                  <a:prstGeom prst="rect">
+                    <a:avLst/>
+                  </a:prstGeom>
+                  <a:solidFill>
+                    <a:schemeClr val="tx2">
+                      <a:lumMod val="25000"/>
+                      <a:lumOff val="75000"/>
+                    </a:schemeClr>
+                  </a:solidFill>
+                  <a:ln>
+                    <a:noFill/>
+                  </a:ln>
+                  <a:scene3d>
+                    <a:camera prst="isometricOffAxis2Left"/>
+                    <a:lightRig rig="soft" dir="t"/>
+                  </a:scene3d>
+                  <a:sp3d extrusionH="127000" contourW="12700">
+                    <a:contourClr>
+                      <a:schemeClr val="bg2"/>
+                    </a:contourClr>
+                  </a:sp3d>
+                </p:spPr>
+                <p:style>
+                  <a:lnRef idx="2">
+                    <a:schemeClr val="accent1">
+                      <a:shade val="15000"/>
+                    </a:schemeClr>
+                  </a:lnRef>
+                  <a:fillRef idx="1">
+                    <a:schemeClr val="accent1"/>
+                  </a:fillRef>
+                  <a:effectRef idx="0">
+                    <a:schemeClr val="accent1"/>
+                  </a:effectRef>
+                  <a:fontRef idx="minor">
+                    <a:schemeClr val="lt1"/>
+                  </a:fontRef>
+                </p:style>
+                <p:txBody>
+                  <a:bodyPr rtlCol="0" anchor="ctr"/>
+                  <a:lstStyle/>
+                  <a:p>
+                    <a:pPr algn="ctr"/>
+                    <a:endParaRPr lang="en-US"/>
+                  </a:p>
+                </p:txBody>
+              </p:sp>
+              <p:sp>
+                <p:nvSpPr>
+                  <p:cNvPr id="78" name="Rectangle 77">
+                    <a:extLst>
+                      <a:ext uri="{FF2B5EF4-FFF2-40B4-BE49-F238E27FC236}">
+                        <a16:creationId xmlns:a16="http://schemas.microsoft.com/office/drawing/2014/main" id="{32B682AE-B9D3-8767-2BC7-51ACD4A876B0}"/>
+                      </a:ext>
+                    </a:extLst>
+                  </p:cNvPr>
+                  <p:cNvSpPr/>
+                  <p:nvPr/>
+                </p:nvSpPr>
+                <p:spPr>
+                  <a:xfrm>
+                    <a:off x="9012855" y="2878566"/>
+                    <a:ext cx="182880" cy="1828800"/>
+                  </a:xfrm>
+                  <a:prstGeom prst="rect">
+                    <a:avLst/>
+                  </a:prstGeom>
+                  <a:solidFill>
+                    <a:schemeClr val="tx2">
+                      <a:lumMod val="25000"/>
+                      <a:lumOff val="75000"/>
+                    </a:schemeClr>
+                  </a:solidFill>
+                  <a:ln>
+                    <a:noFill/>
+                  </a:ln>
+                  <a:scene3d>
+                    <a:camera prst="isometricOffAxis2Left"/>
+                    <a:lightRig rig="soft" dir="t"/>
+                  </a:scene3d>
+                  <a:sp3d extrusionH="127000" contourW="12700">
+                    <a:contourClr>
+                      <a:schemeClr val="bg2"/>
+                    </a:contourClr>
+                  </a:sp3d>
+                </p:spPr>
+                <p:style>
+                  <a:lnRef idx="2">
+                    <a:schemeClr val="accent1">
+                      <a:shade val="15000"/>
+                    </a:schemeClr>
+                  </a:lnRef>
+                  <a:fillRef idx="1">
+                    <a:schemeClr val="accent1"/>
+                  </a:fillRef>
+                  <a:effectRef idx="0">
+                    <a:schemeClr val="accent1"/>
+                  </a:effectRef>
+                  <a:fontRef idx="minor">
+                    <a:schemeClr val="lt1"/>
+                  </a:fontRef>
+                </p:style>
+                <p:txBody>
+                  <a:bodyPr rtlCol="0" anchor="ctr"/>
+                  <a:lstStyle/>
+                  <a:p>
+                    <a:pPr algn="ctr"/>
+                    <a:endParaRPr lang="en-US"/>
+                  </a:p>
+                </p:txBody>
+              </p:sp>
+              <p:sp>
+                <p:nvSpPr>
+                  <p:cNvPr id="79" name="Rectangle 78">
+                    <a:extLst>
+                      <a:ext uri="{FF2B5EF4-FFF2-40B4-BE49-F238E27FC236}">
+                        <a16:creationId xmlns:a16="http://schemas.microsoft.com/office/drawing/2014/main" id="{FB866357-5ADD-F0C2-FDD9-CF7033A57DB4}"/>
+                      </a:ext>
+                    </a:extLst>
+                  </p:cNvPr>
+                  <p:cNvSpPr/>
+                  <p:nvPr/>
+                </p:nvSpPr>
+                <p:spPr>
+                  <a:xfrm>
+                    <a:off x="7813975" y="2688066"/>
+                    <a:ext cx="182880" cy="1828800"/>
+                  </a:xfrm>
+                  <a:prstGeom prst="rect">
+                    <a:avLst/>
+                  </a:prstGeom>
+                  <a:solidFill>
+                    <a:schemeClr val="tx2">
+                      <a:lumMod val="25000"/>
+                      <a:lumOff val="75000"/>
+                    </a:schemeClr>
+                  </a:solidFill>
+                  <a:ln>
+                    <a:noFill/>
+                  </a:ln>
+                  <a:scene3d>
+                    <a:camera prst="isometricOffAxis2Left"/>
+                    <a:lightRig rig="soft" dir="t"/>
+                  </a:scene3d>
+                  <a:sp3d extrusionH="127000" contourW="12700">
+                    <a:contourClr>
+                      <a:schemeClr val="bg2"/>
+                    </a:contourClr>
+                  </a:sp3d>
+                </p:spPr>
+                <p:style>
+                  <a:lnRef idx="2">
+                    <a:schemeClr val="accent1">
+                      <a:shade val="15000"/>
+                    </a:schemeClr>
+                  </a:lnRef>
+                  <a:fillRef idx="1">
+                    <a:schemeClr val="accent1"/>
+                  </a:fillRef>
+                  <a:effectRef idx="0">
+                    <a:schemeClr val="accent1"/>
+                  </a:effectRef>
+                  <a:fontRef idx="minor">
+                    <a:schemeClr val="lt1"/>
+                  </a:fontRef>
+                </p:style>
+                <p:txBody>
+                  <a:bodyPr rtlCol="0" anchor="ctr"/>
+                  <a:lstStyle/>
+                  <a:p>
+                    <a:pPr algn="ctr"/>
+                    <a:endParaRPr lang="en-US"/>
+                  </a:p>
+                </p:txBody>
+              </p:sp>
+              <p:sp>
+                <p:nvSpPr>
+                  <p:cNvPr id="80" name="Rectangle 79">
+                    <a:extLst>
+                      <a:ext uri="{FF2B5EF4-FFF2-40B4-BE49-F238E27FC236}">
+                        <a16:creationId xmlns:a16="http://schemas.microsoft.com/office/drawing/2014/main" id="{643D4D03-482E-CE76-0A41-81689B815BB9}"/>
+                      </a:ext>
+                    </a:extLst>
+                  </p:cNvPr>
+                  <p:cNvSpPr/>
+                  <p:nvPr/>
+                </p:nvSpPr>
+                <p:spPr>
+                  <a:xfrm>
+                    <a:off x="8713135" y="2830941"/>
+                    <a:ext cx="182880" cy="1828800"/>
+                  </a:xfrm>
+                  <a:prstGeom prst="rect">
+                    <a:avLst/>
+                  </a:prstGeom>
+                  <a:solidFill>
+                    <a:schemeClr val="tx2">
+                      <a:lumMod val="25000"/>
+                      <a:lumOff val="75000"/>
+                    </a:schemeClr>
+                  </a:solidFill>
+                  <a:ln>
+                    <a:noFill/>
+                  </a:ln>
+                  <a:scene3d>
+                    <a:camera prst="isometricOffAxis2Left"/>
+                    <a:lightRig rig="soft" dir="t"/>
+                  </a:scene3d>
+                  <a:sp3d extrusionH="127000" contourW="12700">
+                    <a:contourClr>
+                      <a:schemeClr val="bg2"/>
+                    </a:contourClr>
+                  </a:sp3d>
+                </p:spPr>
+                <p:style>
+                  <a:lnRef idx="2">
+                    <a:schemeClr val="accent1">
+                      <a:shade val="15000"/>
+                    </a:schemeClr>
+                  </a:lnRef>
+                  <a:fillRef idx="1">
+                    <a:schemeClr val="accent1"/>
+                  </a:fillRef>
+                  <a:effectRef idx="0">
+                    <a:schemeClr val="accent1"/>
+                  </a:effectRef>
+                  <a:fontRef idx="minor">
+                    <a:schemeClr val="lt1"/>
+                  </a:fontRef>
+                </p:style>
+                <p:txBody>
+                  <a:bodyPr rtlCol="0" anchor="ctr"/>
+                  <a:lstStyle/>
+                  <a:p>
+                    <a:pPr algn="ctr"/>
+                    <a:endParaRPr lang="en-US"/>
+                  </a:p>
+                </p:txBody>
+              </p:sp>
+              <p:sp>
+                <p:nvSpPr>
+                  <p:cNvPr id="81" name="Rectangle 80">
+                    <a:extLst>
+                      <a:ext uri="{FF2B5EF4-FFF2-40B4-BE49-F238E27FC236}">
+                        <a16:creationId xmlns:a16="http://schemas.microsoft.com/office/drawing/2014/main" id="{7430B77A-D992-A102-AA81-7C7023B1D587}"/>
+                      </a:ext>
+                    </a:extLst>
+                  </p:cNvPr>
+                  <p:cNvSpPr/>
+                  <p:nvPr/>
+                </p:nvSpPr>
+                <p:spPr>
+                  <a:xfrm>
+                    <a:off x="8113695" y="2735691"/>
+                    <a:ext cx="182880" cy="1828800"/>
+                  </a:xfrm>
+                  <a:prstGeom prst="rect">
+                    <a:avLst/>
+                  </a:prstGeom>
+                  <a:solidFill>
+                    <a:schemeClr val="tx2">
+                      <a:lumMod val="25000"/>
+                      <a:lumOff val="75000"/>
+                    </a:schemeClr>
+                  </a:solidFill>
+                  <a:ln>
+                    <a:noFill/>
+                  </a:ln>
+                  <a:scene3d>
+                    <a:camera prst="isometricOffAxis2Left"/>
+                    <a:lightRig rig="soft" dir="t"/>
+                  </a:scene3d>
+                  <a:sp3d extrusionH="127000" contourW="12700">
+                    <a:contourClr>
+                      <a:schemeClr val="bg2"/>
+                    </a:contourClr>
+                  </a:sp3d>
+                </p:spPr>
+                <p:style>
+                  <a:lnRef idx="2">
+                    <a:schemeClr val="accent1">
+                      <a:shade val="15000"/>
+                    </a:schemeClr>
+                  </a:lnRef>
+                  <a:fillRef idx="1">
+                    <a:schemeClr val="accent1"/>
+                  </a:fillRef>
+                  <a:effectRef idx="0">
+                    <a:schemeClr val="accent1"/>
+                  </a:effectRef>
+                  <a:fontRef idx="minor">
+                    <a:schemeClr val="lt1"/>
+                  </a:fontRef>
+                </p:style>
+                <p:txBody>
+                  <a:bodyPr rtlCol="0" anchor="ctr"/>
+                  <a:lstStyle/>
+                  <a:p>
+                    <a:pPr algn="ctr"/>
+                    <a:endParaRPr lang="en-US"/>
+                  </a:p>
+                </p:txBody>
+              </p:sp>
+              <p:sp>
+                <p:nvSpPr>
+                  <p:cNvPr id="82" name="Rectangle 81">
+                    <a:extLst>
+                      <a:ext uri="{FF2B5EF4-FFF2-40B4-BE49-F238E27FC236}">
+                        <a16:creationId xmlns:a16="http://schemas.microsoft.com/office/drawing/2014/main" id="{40BB53D3-B606-EAB2-922E-0D9D2DEB35C1}"/>
+                      </a:ext>
+                    </a:extLst>
+                  </p:cNvPr>
+                  <p:cNvSpPr/>
+                  <p:nvPr/>
+                </p:nvSpPr>
+                <p:spPr>
+                  <a:xfrm>
+                    <a:off x="8413415" y="2783316"/>
+                    <a:ext cx="182880" cy="1828800"/>
+                  </a:xfrm>
+                  <a:prstGeom prst="rect">
+                    <a:avLst/>
+                  </a:prstGeom>
+                  <a:solidFill>
+                    <a:schemeClr val="tx2">
+                      <a:lumMod val="25000"/>
+                      <a:lumOff val="75000"/>
+                    </a:schemeClr>
+                  </a:solidFill>
+                  <a:ln>
+                    <a:noFill/>
+                  </a:ln>
+                  <a:scene3d>
+                    <a:camera prst="isometricOffAxis2Left"/>
+                    <a:lightRig rig="soft" dir="t"/>
+                  </a:scene3d>
+                  <a:sp3d extrusionH="127000" contourW="12700">
+                    <a:contourClr>
+                      <a:schemeClr val="bg2"/>
+                    </a:contourClr>
+                  </a:sp3d>
+                </p:spPr>
+                <p:style>
+                  <a:lnRef idx="2">
+                    <a:schemeClr val="accent1">
+                      <a:shade val="15000"/>
+                    </a:schemeClr>
+                  </a:lnRef>
+                  <a:fillRef idx="1">
+                    <a:schemeClr val="accent1"/>
+                  </a:fillRef>
+                  <a:effectRef idx="0">
+                    <a:schemeClr val="accent1"/>
+                  </a:effectRef>
+                  <a:fontRef idx="minor">
+                    <a:schemeClr val="lt1"/>
+                  </a:fontRef>
+                </p:style>
+                <p:txBody>
+                  <a:bodyPr rtlCol="0" anchor="ctr"/>
+                  <a:lstStyle/>
+                  <a:p>
+                    <a:pPr algn="ctr"/>
+                    <a:endParaRPr lang="en-US"/>
+                  </a:p>
+                </p:txBody>
+              </p:sp>
+              <p:sp>
+                <p:nvSpPr>
+                  <p:cNvPr id="83" name="Arc 82">
+                    <a:extLst>
+                      <a:ext uri="{FF2B5EF4-FFF2-40B4-BE49-F238E27FC236}">
+                        <a16:creationId xmlns:a16="http://schemas.microsoft.com/office/drawing/2014/main" id="{D202FD76-2AF2-9DD6-CB4E-89BD05A5DC51}"/>
+                      </a:ext>
+                    </a:extLst>
+                  </p:cNvPr>
+                  <p:cNvSpPr/>
+                  <p:nvPr/>
+                </p:nvSpPr>
+                <p:spPr>
+                  <a:xfrm>
+                    <a:off x="8293393" y="2455348"/>
+                    <a:ext cx="914400" cy="914400"/>
+                  </a:xfrm>
+                  <a:prstGeom prst="arc">
+                    <a:avLst>
+                      <a:gd name="adj1" fmla="val 16408360"/>
+                      <a:gd name="adj2" fmla="val 19899102"/>
+                    </a:avLst>
+                  </a:prstGeom>
+                  <a:ln w="38100">
+                    <a:solidFill>
+                      <a:schemeClr val="accent1">
+                        <a:lumMod val="20000"/>
+                        <a:lumOff val="80000"/>
+                      </a:schemeClr>
+                    </a:solidFill>
+                  </a:ln>
+                </p:spPr>
+                <p:style>
+                  <a:lnRef idx="2">
+                    <a:schemeClr val="accent1"/>
+                  </a:lnRef>
+                  <a:fillRef idx="0">
+                    <a:schemeClr val="accent1"/>
+                  </a:fillRef>
+                  <a:effectRef idx="1">
+                    <a:schemeClr val="accent1"/>
+                  </a:effectRef>
+                  <a:fontRef idx="minor">
+                    <a:schemeClr val="tx1"/>
+                  </a:fontRef>
+                </p:style>
+                <p:txBody>
+                  <a:bodyPr rtlCol="0" anchor="ctr"/>
+                  <a:lstStyle/>
+                  <a:p>
+                    <a:pPr algn="ctr"/>
+                    <a:endParaRPr lang="en-US"/>
+                  </a:p>
+                </p:txBody>
+              </p:sp>
+              <mc:AlternateContent xmlns:mc="http://schemas.openxmlformats.org/markup-compatibility/2006">
+                <mc:Choice xmlns:a14="http://schemas.microsoft.com/office/drawing/2010/main" Requires="a14">
+                  <p:sp>
+                    <p:nvSpPr>
+                      <p:cNvPr id="84" name="TextBox 83">
+                        <a:extLst>
+                          <a:ext uri="{FF2B5EF4-FFF2-40B4-BE49-F238E27FC236}">
+                            <a16:creationId xmlns:a16="http://schemas.microsoft.com/office/drawing/2014/main" id="{6DC1E686-5ACA-89BE-C6E0-9AB4BC78466E}"/>
+                          </a:ext>
+                        </a:extLst>
+                      </p:cNvPr>
+                      <p:cNvSpPr txBox="1"/>
+                      <p:nvPr/>
+                    </p:nvSpPr>
+                    <p:spPr>
+                      <a:xfrm>
+                        <a:off x="8783742" y="2029329"/>
+                        <a:ext cx="603749" cy="523220"/>
+                      </a:xfrm>
+                      <a:prstGeom prst="rect">
+                        <a:avLst/>
+                      </a:prstGeom>
+                      <a:noFill/>
+                    </p:spPr>
+                    <p:txBody>
+                      <a:bodyPr wrap="square" rtlCol="0">
+                        <a:spAutoFit/>
+                      </a:bodyPr>
+                      <a:lstStyle/>
+                      <a:p>
+                        <a14:m>
+                          <m:oMathPara xmlns:m="http://schemas.openxmlformats.org/officeDocument/2006/math">
+                            <m:oMathParaPr>
+                              <m:jc m:val="centerGroup"/>
+                            </m:oMathParaPr>
+                            <m:oMath xmlns:m="http://schemas.openxmlformats.org/officeDocument/2006/math">
+                              <m:sSub>
+                                <m:sSubPr>
+                                  <m:ctrlPr>
+                                    <a:rPr lang="en-US" sz="2800" b="0" i="1" smtClean="0">
+                                      <a:solidFill>
+                                        <a:schemeClr val="accent1">
+                                          <a:lumMod val="20000"/>
+                                          <a:lumOff val="80000"/>
+                                        </a:schemeClr>
+                                      </a:solidFill>
+                                      <a:latin typeface="Cambria Math" panose="02040503050406030204" pitchFamily="18" charset="0"/>
+                                    </a:rPr>
+                                  </m:ctrlPr>
+                                </m:sSubPr>
+                                <m:e>
+                                  <m:r>
+                                    <a:rPr lang="en-US" sz="2800" b="0" i="1" smtClean="0">
+                                      <a:solidFill>
+                                        <a:schemeClr val="accent1">
+                                          <a:lumMod val="20000"/>
+                                          <a:lumOff val="80000"/>
+                                        </a:schemeClr>
+                                      </a:solidFill>
+                                      <a:latin typeface="Cambria Math" panose="02040503050406030204" pitchFamily="18" charset="0"/>
+                                    </a:rPr>
+                                    <m:t>𝜙</m:t>
+                                  </m:r>
+                                </m:e>
+                                <m:sub>
+                                  <m:r>
+                                    <a:rPr lang="en-US" sz="2800" b="0" i="1" smtClean="0">
+                                      <a:solidFill>
+                                        <a:schemeClr val="accent1">
+                                          <a:lumMod val="20000"/>
+                                          <a:lumOff val="80000"/>
+                                        </a:schemeClr>
+                                      </a:solidFill>
+                                      <a:latin typeface="Cambria Math" panose="02040503050406030204" pitchFamily="18" charset="0"/>
+                                    </a:rPr>
+                                    <m:t>𝑑</m:t>
+                                  </m:r>
+                                </m:sub>
+                              </m:sSub>
+                            </m:oMath>
+                          </m:oMathPara>
+                        </a14:m>
+                        <a:endParaRPr lang="en-US" sz="2800" dirty="0">
+                          <a:solidFill>
+                            <a:schemeClr val="accent1">
+                              <a:lumMod val="20000"/>
+                              <a:lumOff val="80000"/>
+                            </a:schemeClr>
+                          </a:solidFill>
+                        </a:endParaRPr>
+                      </a:p>
+                    </p:txBody>
+                  </p:sp>
+                </mc:Choice>
+                <mc:Fallback>
+                  <p:sp>
+                    <p:nvSpPr>
+                      <p:cNvPr id="84" name="TextBox 83">
+                        <a:extLst>
+                          <a:ext uri="{FF2B5EF4-FFF2-40B4-BE49-F238E27FC236}">
+                            <a16:creationId xmlns:a16="http://schemas.microsoft.com/office/drawing/2014/main" id="{6DC1E686-5ACA-89BE-C6E0-9AB4BC78466E}"/>
+                          </a:ext>
+                        </a:extLst>
+                      </p:cNvPr>
+                      <p:cNvSpPr txBox="1">
+                        <a:spLocks noRot="1" noChangeAspect="1" noMove="1" noResize="1" noEditPoints="1" noAdjustHandles="1" noChangeArrowheads="1" noChangeShapeType="1" noTextEdit="1"/>
+                      </p:cNvSpPr>
+                      <p:nvPr/>
+                    </p:nvSpPr>
+                    <p:spPr>
+                      <a:xfrm>
+                        <a:off x="8783742" y="2029329"/>
+                        <a:ext cx="603749" cy="523220"/>
+                      </a:xfrm>
+                      <a:prstGeom prst="rect">
+                        <a:avLst/>
+                      </a:prstGeom>
+                      <a:blipFill>
+                        <a:blip r:embed="rId14"/>
+                        <a:stretch>
+                          <a:fillRect/>
+                        </a:stretch>
+                      </a:blipFill>
+                    </p:spPr>
+                    <p:txBody>
+                      <a:bodyPr/>
+                      <a:lstStyle/>
+                      <a:p>
+                        <a:r>
+                          <a:rPr lang="en-US">
+                            <a:noFill/>
+                          </a:rPr>
+                          <a:t> </a:t>
+                        </a:r>
+                      </a:p>
+                    </p:txBody>
+                  </p:sp>
+                </mc:Fallback>
+              </mc:AlternateContent>
+              <p:cxnSp>
+                <p:nvCxnSpPr>
+                  <p:cNvPr id="85" name="Straight Arrow Connector 84">
+                    <a:extLst>
+                      <a:ext uri="{FF2B5EF4-FFF2-40B4-BE49-F238E27FC236}">
+                        <a16:creationId xmlns:a16="http://schemas.microsoft.com/office/drawing/2014/main" id="{F8F697F1-77A0-A58C-CC42-8E909A66CBF8}"/>
+                      </a:ext>
+                    </a:extLst>
+                  </p:cNvPr>
+                  <p:cNvCxnSpPr>
+                    <a:cxnSpLocks/>
+                  </p:cNvCxnSpPr>
+                  <p:nvPr/>
+                </p:nvCxnSpPr>
+                <p:spPr>
+                  <a:xfrm flipH="1" flipV="1">
+                    <a:off x="7694921" y="3626485"/>
+                    <a:ext cx="659141" cy="150964"/>
+                  </a:xfrm>
+                  <a:prstGeom prst="straightConnector1">
+                    <a:avLst/>
+                  </a:prstGeom>
+                  <a:ln w="38100">
+                    <a:solidFill>
+                      <a:srgbClr val="FF0000"/>
+                    </a:solidFill>
+                    <a:tailEnd type="triangle"/>
+                  </a:ln>
+                </p:spPr>
+                <p:style>
+                  <a:lnRef idx="2">
+                    <a:schemeClr val="accent1"/>
+                  </a:lnRef>
+                  <a:fillRef idx="0">
+                    <a:schemeClr val="accent1"/>
+                  </a:fillRef>
+                  <a:effectRef idx="1">
+                    <a:schemeClr val="accent1"/>
+                  </a:effectRef>
+                  <a:fontRef idx="minor">
+                    <a:schemeClr val="tx1"/>
+                  </a:fontRef>
+                </p:style>
+              </p:cxnSp>
+              <p:cxnSp>
+                <p:nvCxnSpPr>
+                  <p:cNvPr id="86" name="Straight Arrow Connector 85">
+                    <a:extLst>
+                      <a:ext uri="{FF2B5EF4-FFF2-40B4-BE49-F238E27FC236}">
+                        <a16:creationId xmlns:a16="http://schemas.microsoft.com/office/drawing/2014/main" id="{20E7D437-8CCD-EB9E-4561-28A8EE73E05E}"/>
+                      </a:ext>
+                    </a:extLst>
+                  </p:cNvPr>
+                  <p:cNvCxnSpPr>
+                    <a:cxnSpLocks/>
+                  </p:cNvCxnSpPr>
+                  <p:nvPr/>
+                </p:nvCxnSpPr>
+                <p:spPr>
+                  <a:xfrm flipH="1" flipV="1">
+                    <a:off x="8348466" y="2937815"/>
+                    <a:ext cx="8602" cy="839634"/>
+                  </a:xfrm>
+                  <a:prstGeom prst="straightConnector1">
+                    <a:avLst/>
+                  </a:prstGeom>
+                  <a:ln w="38100">
+                    <a:solidFill>
+                      <a:srgbClr val="FF0000"/>
+                    </a:solidFill>
+                    <a:tailEnd type="triangle"/>
+                  </a:ln>
+                </p:spPr>
+                <p:style>
+                  <a:lnRef idx="2">
+                    <a:schemeClr val="accent1"/>
+                  </a:lnRef>
+                  <a:fillRef idx="0">
+                    <a:schemeClr val="accent1"/>
+                  </a:fillRef>
+                  <a:effectRef idx="1">
+                    <a:schemeClr val="accent1"/>
+                  </a:effectRef>
+                  <a:fontRef idx="minor">
+                    <a:schemeClr val="tx1"/>
+                  </a:fontRef>
+                </p:style>
+              </p:cxnSp>
+              <p:cxnSp>
+                <p:nvCxnSpPr>
+                  <p:cNvPr id="87" name="Straight Arrow Connector 86">
+                    <a:extLst>
+                      <a:ext uri="{FF2B5EF4-FFF2-40B4-BE49-F238E27FC236}">
+                        <a16:creationId xmlns:a16="http://schemas.microsoft.com/office/drawing/2014/main" id="{543195C1-5484-C531-6CBC-F7A99160E4BB}"/>
+                      </a:ext>
+                    </a:extLst>
+                  </p:cNvPr>
+                  <p:cNvCxnSpPr>
+                    <a:cxnSpLocks/>
+                  </p:cNvCxnSpPr>
+                  <p:nvPr/>
+                </p:nvCxnSpPr>
+                <p:spPr>
+                  <a:xfrm flipV="1">
+                    <a:off x="6979911" y="3764902"/>
+                    <a:ext cx="1374151" cy="1574178"/>
+                  </a:xfrm>
+                  <a:prstGeom prst="straightConnector1">
+                    <a:avLst/>
+                  </a:prstGeom>
+                  <a:ln w="38100">
+                    <a:solidFill>
+                      <a:srgbClr val="FFC000"/>
+                    </a:solidFill>
+                    <a:tailEnd type="triangle"/>
+                  </a:ln>
+                </p:spPr>
+                <p:style>
+                  <a:lnRef idx="2">
+                    <a:schemeClr val="accent1"/>
+                  </a:lnRef>
+                  <a:fillRef idx="0">
+                    <a:schemeClr val="accent1"/>
+                  </a:fillRef>
+                  <a:effectRef idx="1">
+                    <a:schemeClr val="accent1"/>
+                  </a:effectRef>
+                  <a:fontRef idx="minor">
+                    <a:schemeClr val="tx1"/>
+                  </a:fontRef>
+                </p:style>
+              </p:cxnSp>
+              <p:cxnSp>
+                <p:nvCxnSpPr>
+                  <p:cNvPr id="88" name="Straight Arrow Connector 87">
+                    <a:extLst>
+                      <a:ext uri="{FF2B5EF4-FFF2-40B4-BE49-F238E27FC236}">
+                        <a16:creationId xmlns:a16="http://schemas.microsoft.com/office/drawing/2014/main" id="{4E33439A-844F-D426-0CC2-2C37459F687F}"/>
+                      </a:ext>
+                    </a:extLst>
+                  </p:cNvPr>
+                  <p:cNvCxnSpPr>
+                    <a:cxnSpLocks/>
+                  </p:cNvCxnSpPr>
+                  <p:nvPr/>
+                </p:nvCxnSpPr>
+                <p:spPr>
+                  <a:xfrm flipV="1">
+                    <a:off x="8348466" y="3346146"/>
+                    <a:ext cx="353785" cy="415084"/>
+                  </a:xfrm>
+                  <a:prstGeom prst="straightConnector1">
+                    <a:avLst/>
+                  </a:prstGeom>
+                  <a:ln w="38100">
+                    <a:solidFill>
+                      <a:srgbClr val="FF0000"/>
+                    </a:solidFill>
+                    <a:prstDash val="sysDot"/>
+                    <a:tailEnd type="triangle"/>
+                  </a:ln>
+                </p:spPr>
+                <p:style>
+                  <a:lnRef idx="2">
+                    <a:schemeClr val="accent1"/>
+                  </a:lnRef>
+                  <a:fillRef idx="0">
+                    <a:schemeClr val="accent1"/>
+                  </a:fillRef>
+                  <a:effectRef idx="1">
+                    <a:schemeClr val="accent1"/>
+                  </a:effectRef>
+                  <a:fontRef idx="minor">
+                    <a:schemeClr val="tx1"/>
+                  </a:fontRef>
+                </p:style>
+              </p:cxnSp>
+              <p:cxnSp>
+                <p:nvCxnSpPr>
+                  <p:cNvPr id="92" name="Straight Arrow Connector 91">
+                    <a:extLst>
+                      <a:ext uri="{FF2B5EF4-FFF2-40B4-BE49-F238E27FC236}">
+                        <a16:creationId xmlns:a16="http://schemas.microsoft.com/office/drawing/2014/main" id="{0C4C9419-C147-A72F-5A39-6310D008238A}"/>
+                      </a:ext>
+                    </a:extLst>
+                  </p:cNvPr>
+                  <p:cNvCxnSpPr>
+                    <a:cxnSpLocks/>
+                  </p:cNvCxnSpPr>
+                  <p:nvPr/>
+                </p:nvCxnSpPr>
+                <p:spPr>
+                  <a:xfrm flipH="1" flipV="1">
+                    <a:off x="9304867" y="1877148"/>
+                    <a:ext cx="390735" cy="66330"/>
+                  </a:xfrm>
+                  <a:prstGeom prst="straightConnector1">
+                    <a:avLst/>
+                  </a:prstGeom>
+                  <a:ln w="38100">
+                    <a:solidFill>
+                      <a:srgbClr val="FF0000"/>
+                    </a:solidFill>
+                    <a:tailEnd type="triangle"/>
+                  </a:ln>
+                </p:spPr>
+                <p:style>
+                  <a:lnRef idx="2">
+                    <a:schemeClr val="accent1"/>
+                  </a:lnRef>
+                  <a:fillRef idx="0">
+                    <a:schemeClr val="accent1"/>
+                  </a:fillRef>
+                  <a:effectRef idx="1">
+                    <a:schemeClr val="accent1"/>
+                  </a:effectRef>
+                  <a:fontRef idx="minor">
+                    <a:schemeClr val="tx1"/>
+                  </a:fontRef>
+                </p:style>
+              </p:cxnSp>
+              <p:cxnSp>
+                <p:nvCxnSpPr>
+                  <p:cNvPr id="93" name="Straight Arrow Connector 92">
+                    <a:extLst>
+                      <a:ext uri="{FF2B5EF4-FFF2-40B4-BE49-F238E27FC236}">
+                        <a16:creationId xmlns:a16="http://schemas.microsoft.com/office/drawing/2014/main" id="{05F2915D-4D4D-14B2-2BA1-31FAD1EE1A9B}"/>
+                      </a:ext>
+                    </a:extLst>
+                  </p:cNvPr>
+                  <p:cNvCxnSpPr>
+                    <a:cxnSpLocks/>
+                  </p:cNvCxnSpPr>
+                  <p:nvPr/>
+                </p:nvCxnSpPr>
+                <p:spPr>
+                  <a:xfrm flipH="1" flipV="1">
+                    <a:off x="9683732" y="1436842"/>
+                    <a:ext cx="5232" cy="541308"/>
+                  </a:xfrm>
+                  <a:prstGeom prst="straightConnector1">
+                    <a:avLst/>
+                  </a:prstGeom>
+                  <a:ln w="38100">
+                    <a:solidFill>
+                      <a:srgbClr val="FF0000"/>
+                    </a:solidFill>
+                    <a:tailEnd type="triangle"/>
+                  </a:ln>
+                </p:spPr>
+                <p:style>
+                  <a:lnRef idx="2">
+                    <a:schemeClr val="accent1"/>
+                  </a:lnRef>
+                  <a:fillRef idx="0">
+                    <a:schemeClr val="accent1"/>
+                  </a:fillRef>
+                  <a:effectRef idx="1">
+                    <a:schemeClr val="accent1"/>
+                  </a:effectRef>
+                  <a:fontRef idx="minor">
+                    <a:schemeClr val="tx1"/>
+                  </a:fontRef>
+                </p:style>
+              </p:cxnSp>
+              <p:cxnSp>
+                <p:nvCxnSpPr>
+                  <p:cNvPr id="94" name="Straight Arrow Connector 93">
+                    <a:extLst>
+                      <a:ext uri="{FF2B5EF4-FFF2-40B4-BE49-F238E27FC236}">
+                        <a16:creationId xmlns:a16="http://schemas.microsoft.com/office/drawing/2014/main" id="{44A67F2D-15E6-E9E8-844F-B543B9585D25}"/>
+                      </a:ext>
+                    </a:extLst>
+                  </p:cNvPr>
+                  <p:cNvCxnSpPr>
+                    <a:cxnSpLocks/>
+                  </p:cNvCxnSpPr>
+                  <p:nvPr/>
+                </p:nvCxnSpPr>
+                <p:spPr>
+                  <a:xfrm flipV="1">
+                    <a:off x="9680362" y="1678371"/>
+                    <a:ext cx="263920" cy="283560"/>
+                  </a:xfrm>
+                  <a:prstGeom prst="straightConnector1">
+                    <a:avLst/>
+                  </a:prstGeom>
+                  <a:ln w="38100">
+                    <a:solidFill>
+                      <a:srgbClr val="FF0000"/>
+                    </a:solidFill>
+                    <a:prstDash val="sysDot"/>
+                    <a:tailEnd type="triangle"/>
+                  </a:ln>
+                </p:spPr>
+                <p:style>
+                  <a:lnRef idx="2">
+                    <a:schemeClr val="accent1"/>
+                  </a:lnRef>
+                  <a:fillRef idx="0">
+                    <a:schemeClr val="accent1"/>
+                  </a:fillRef>
+                  <a:effectRef idx="1">
+                    <a:schemeClr val="accent1"/>
+                  </a:effectRef>
+                  <a:fontRef idx="minor">
+                    <a:schemeClr val="tx1"/>
+                  </a:fontRef>
+                </p:style>
+              </p:cxnSp>
+              <mc:AlternateContent xmlns:mc="http://schemas.openxmlformats.org/markup-compatibility/2006">
+                <mc:Choice xmlns:a14="http://schemas.microsoft.com/office/drawing/2010/main" Requires="a14">
+                  <p:sp>
+                    <p:nvSpPr>
+                      <p:cNvPr id="95" name="TextBox 94">
+                        <a:extLst>
+                          <a:ext uri="{FF2B5EF4-FFF2-40B4-BE49-F238E27FC236}">
+                            <a16:creationId xmlns:a16="http://schemas.microsoft.com/office/drawing/2014/main" id="{DE5BE3E4-E2D9-91AE-5EAE-2541BB566727}"/>
+                          </a:ext>
+                        </a:extLst>
+                      </p:cNvPr>
+                      <p:cNvSpPr txBox="1"/>
+                      <p:nvPr/>
+                    </p:nvSpPr>
+                    <p:spPr>
+                      <a:xfrm>
+                        <a:off x="9113409" y="973536"/>
+                        <a:ext cx="1214538" cy="461665"/>
+                      </a:xfrm>
+                      <a:prstGeom prst="rect">
+                        <a:avLst/>
+                      </a:prstGeom>
+                      <a:noFill/>
+                    </p:spPr>
+                    <p:txBody>
+                      <a:bodyPr wrap="square" rtlCol="0">
+                        <a:spAutoFit/>
+                      </a:bodyPr>
+                      <a:lstStyle/>
+                      <a:p>
+                        <a14:m>
+                          <m:oMathPara xmlns:m="http://schemas.openxmlformats.org/officeDocument/2006/math">
+                            <m:oMathParaPr>
+                              <m:jc m:val="centerGroup"/>
+                            </m:oMathParaPr>
+                            <m:oMath xmlns:m="http://schemas.openxmlformats.org/officeDocument/2006/math">
+                              <m:sSub>
+                                <m:sSubPr>
+                                  <m:ctrlPr>
+                                    <a:rPr lang="en-US" sz="2400" b="0" i="1" smtClean="0">
+                                      <a:ln>
+                                        <a:noFill/>
+                                      </a:ln>
+                                      <a:solidFill>
+                                        <a:srgbClr val="FF0000"/>
+                                      </a:solidFill>
+                                      <a:latin typeface="Cambria Math" panose="02040503050406030204" pitchFamily="18" charset="0"/>
+                                    </a:rPr>
+                                  </m:ctrlPr>
+                                </m:sSubPr>
+                                <m:e>
+                                  <m:r>
+                                    <a:rPr lang="en-US" sz="2400" i="1" smtClean="0">
+                                      <a:ln>
+                                        <a:noFill/>
+                                      </a:ln>
+                                      <a:solidFill>
+                                        <a:srgbClr val="FF0000"/>
+                                      </a:solidFill>
+                                      <a:latin typeface="Cambria Math" panose="02040503050406030204" pitchFamily="18" charset="0"/>
+                                    </a:rPr>
+                                    <m:t>𝑦</m:t>
+                                  </m:r>
+                                </m:e>
+                                <m:sub>
+                                  <m:r>
+                                    <a:rPr lang="en-US" sz="2400" b="0" i="1" smtClean="0">
+                                      <a:ln>
+                                        <a:noFill/>
+                                      </a:ln>
+                                      <a:solidFill>
+                                        <a:srgbClr val="FF0000"/>
+                                      </a:solidFill>
+                                      <a:latin typeface="Cambria Math" panose="02040503050406030204" pitchFamily="18" charset="0"/>
+                                    </a:rPr>
+                                    <m:t>𝑏</m:t>
+                                  </m:r>
+                                </m:sub>
+                              </m:sSub>
+                            </m:oMath>
+                          </m:oMathPara>
+                        </a14:m>
+                        <a:endParaRPr lang="en-US" sz="2400" dirty="0">
+                          <a:ln>
+                            <a:noFill/>
+                          </a:ln>
+                          <a:solidFill>
+                            <a:srgbClr val="FF0000"/>
+                          </a:solidFill>
+                        </a:endParaRPr>
+                      </a:p>
+                    </p:txBody>
+                  </p:sp>
+                </mc:Choice>
+                <mc:Fallback>
+                  <p:sp>
+                    <p:nvSpPr>
+                      <p:cNvPr id="95" name="TextBox 94">
+                        <a:extLst>
+                          <a:ext uri="{FF2B5EF4-FFF2-40B4-BE49-F238E27FC236}">
+                            <a16:creationId xmlns:a16="http://schemas.microsoft.com/office/drawing/2014/main" id="{DE5BE3E4-E2D9-91AE-5EAE-2541BB566727}"/>
+                          </a:ext>
+                        </a:extLst>
+                      </p:cNvPr>
+                      <p:cNvSpPr txBox="1">
+                        <a:spLocks noRot="1" noChangeAspect="1" noMove="1" noResize="1" noEditPoints="1" noAdjustHandles="1" noChangeArrowheads="1" noChangeShapeType="1" noTextEdit="1"/>
+                      </p:cNvSpPr>
+                      <p:nvPr/>
+                    </p:nvSpPr>
+                    <p:spPr>
+                      <a:xfrm>
+                        <a:off x="9113409" y="973536"/>
+                        <a:ext cx="1214538" cy="461665"/>
+                      </a:xfrm>
+                      <a:prstGeom prst="rect">
+                        <a:avLst/>
+                      </a:prstGeom>
+                      <a:blipFill>
+                        <a:blip r:embed="rId15"/>
+                        <a:stretch>
+                          <a:fillRect b="-9333"/>
+                        </a:stretch>
+                      </a:blipFill>
+                    </p:spPr>
+                    <p:txBody>
+                      <a:bodyPr/>
+                      <a:lstStyle/>
+                      <a:p>
+                        <a:r>
+                          <a:rPr lang="en-US">
+                            <a:noFill/>
+                          </a:rPr>
+                          <a:t> </a:t>
+                        </a:r>
+                      </a:p>
+                    </p:txBody>
+                  </p:sp>
+                </mc:Fallback>
+              </mc:AlternateContent>
+              <mc:AlternateContent xmlns:mc="http://schemas.openxmlformats.org/markup-compatibility/2006">
+                <mc:Choice xmlns:a14="http://schemas.microsoft.com/office/drawing/2010/main" Requires="a14">
+                  <p:sp>
+                    <p:nvSpPr>
+                      <p:cNvPr id="96" name="TextBox 95">
+                        <a:extLst>
+                          <a:ext uri="{FF2B5EF4-FFF2-40B4-BE49-F238E27FC236}">
+                            <a16:creationId xmlns:a16="http://schemas.microsoft.com/office/drawing/2014/main" id="{3D8B43E6-6039-47C5-A9AA-5CFE605BD923}"/>
+                          </a:ext>
+                        </a:extLst>
+                      </p:cNvPr>
+                      <p:cNvSpPr txBox="1"/>
+                      <p:nvPr/>
+                    </p:nvSpPr>
+                    <p:spPr>
+                      <a:xfrm>
+                        <a:off x="9799678" y="1289248"/>
+                        <a:ext cx="471763" cy="461665"/>
+                      </a:xfrm>
+                      <a:prstGeom prst="rect">
+                        <a:avLst/>
+                      </a:prstGeom>
+                      <a:noFill/>
+                    </p:spPr>
+                    <p:txBody>
+                      <a:bodyPr wrap="square" rtlCol="0">
+                        <a:spAutoFit/>
+                      </a:bodyPr>
+                      <a:lstStyle/>
+                      <a:p>
+                        <a14:m>
+                          <m:oMathPara xmlns:m="http://schemas.openxmlformats.org/officeDocument/2006/math">
+                            <m:oMathParaPr>
+                              <m:jc m:val="centerGroup"/>
+                            </m:oMathParaPr>
+                            <m:oMath xmlns:m="http://schemas.openxmlformats.org/officeDocument/2006/math">
+                              <m:sSub>
+                                <m:sSubPr>
+                                  <m:ctrlPr>
+                                    <a:rPr lang="en-US" sz="2400" b="0" i="1" smtClean="0">
+                                      <a:ln>
+                                        <a:noFill/>
+                                      </a:ln>
+                                      <a:solidFill>
+                                        <a:srgbClr val="FF0000"/>
+                                      </a:solidFill>
+                                      <a:latin typeface="Cambria Math" panose="02040503050406030204" pitchFamily="18" charset="0"/>
+                                    </a:rPr>
+                                  </m:ctrlPr>
+                                </m:sSubPr>
+                                <m:e>
+                                  <m:r>
+                                    <a:rPr lang="en-US" sz="2400" i="1" smtClean="0">
+                                      <a:ln>
+                                        <a:noFill/>
+                                      </a:ln>
+                                      <a:solidFill>
+                                        <a:srgbClr val="FF0000"/>
+                                      </a:solidFill>
+                                      <a:latin typeface="Cambria Math" panose="02040503050406030204" pitchFamily="18" charset="0"/>
+                                    </a:rPr>
+                                    <m:t>𝑧</m:t>
+                                  </m:r>
+                                </m:e>
+                                <m:sub>
+                                  <m:r>
+                                    <a:rPr lang="en-US" sz="2400" b="0" i="1" smtClean="0">
+                                      <a:ln>
+                                        <a:noFill/>
+                                      </a:ln>
+                                      <a:solidFill>
+                                        <a:srgbClr val="FF0000"/>
+                                      </a:solidFill>
+                                      <a:latin typeface="Cambria Math" panose="02040503050406030204" pitchFamily="18" charset="0"/>
+                                    </a:rPr>
+                                    <m:t>𝑏</m:t>
+                                  </m:r>
+                                </m:sub>
+                              </m:sSub>
+                            </m:oMath>
+                          </m:oMathPara>
+                        </a14:m>
+                        <a:endParaRPr lang="en-US" sz="2400" dirty="0">
+                          <a:ln>
+                            <a:noFill/>
+                          </a:ln>
+                          <a:solidFill>
+                            <a:srgbClr val="FF0000"/>
+                          </a:solidFill>
+                        </a:endParaRPr>
+                      </a:p>
+                    </p:txBody>
+                  </p:sp>
+                </mc:Choice>
+                <mc:Fallback>
+                  <p:sp>
+                    <p:nvSpPr>
+                      <p:cNvPr id="96" name="TextBox 95">
+                        <a:extLst>
+                          <a:ext uri="{FF2B5EF4-FFF2-40B4-BE49-F238E27FC236}">
+                            <a16:creationId xmlns:a16="http://schemas.microsoft.com/office/drawing/2014/main" id="{3D8B43E6-6039-47C5-A9AA-5CFE605BD923}"/>
+                          </a:ext>
+                        </a:extLst>
+                      </p:cNvPr>
+                      <p:cNvSpPr txBox="1">
+                        <a:spLocks noRot="1" noChangeAspect="1" noMove="1" noResize="1" noEditPoints="1" noAdjustHandles="1" noChangeArrowheads="1" noChangeShapeType="1" noTextEdit="1"/>
+                      </p:cNvSpPr>
+                      <p:nvPr/>
+                    </p:nvSpPr>
+                    <p:spPr>
+                      <a:xfrm>
+                        <a:off x="9799678" y="1289248"/>
+                        <a:ext cx="471763" cy="461665"/>
+                      </a:xfrm>
+                      <a:prstGeom prst="rect">
+                        <a:avLst/>
+                      </a:prstGeom>
+                      <a:blipFill>
+                        <a:blip r:embed="rId16"/>
+                        <a:stretch>
+                          <a:fillRect b="-1316"/>
+                        </a:stretch>
+                      </a:blipFill>
+                    </p:spPr>
+                    <p:txBody>
+                      <a:bodyPr/>
+                      <a:lstStyle/>
+                      <a:p>
+                        <a:r>
+                          <a:rPr lang="en-US">
+                            <a:noFill/>
+                          </a:rPr>
+                          <a:t> </a:t>
+                        </a:r>
+                      </a:p>
+                    </p:txBody>
+                  </p:sp>
+                </mc:Fallback>
+              </mc:AlternateContent>
+              <mc:AlternateContent xmlns:mc="http://schemas.openxmlformats.org/markup-compatibility/2006">
+                <mc:Choice xmlns:a14="http://schemas.microsoft.com/office/drawing/2010/main" Requires="a14">
+                  <p:sp>
+                    <p:nvSpPr>
+                      <p:cNvPr id="97" name="TextBox 96">
+                        <a:extLst>
+                          <a:ext uri="{FF2B5EF4-FFF2-40B4-BE49-F238E27FC236}">
+                            <a16:creationId xmlns:a16="http://schemas.microsoft.com/office/drawing/2014/main" id="{26194C53-F6B3-BF8C-C3CB-1749FBB306B7}"/>
+                          </a:ext>
+                        </a:extLst>
+                      </p:cNvPr>
+                      <p:cNvSpPr txBox="1"/>
+                      <p:nvPr/>
+                    </p:nvSpPr>
+                    <p:spPr>
+                      <a:xfrm>
+                        <a:off x="9200836" y="1474499"/>
+                        <a:ext cx="604895" cy="461665"/>
+                      </a:xfrm>
+                      <a:prstGeom prst="rect">
+                        <a:avLst/>
+                      </a:prstGeom>
+                      <a:noFill/>
+                    </p:spPr>
+                    <p:txBody>
+                      <a:bodyPr wrap="square" rtlCol="0">
+                        <a:spAutoFit/>
+                      </a:bodyPr>
+                      <a:lstStyle/>
+                      <a:p>
+                        <a14:m>
+                          <m:oMathPara xmlns:m="http://schemas.openxmlformats.org/officeDocument/2006/math">
+                            <m:oMathParaPr>
+                              <m:jc m:val="centerGroup"/>
+                            </m:oMathParaPr>
+                            <m:oMath xmlns:m="http://schemas.openxmlformats.org/officeDocument/2006/math">
+                              <m:sSub>
+                                <m:sSubPr>
+                                  <m:ctrlPr>
+                                    <a:rPr lang="en-US" sz="2400" b="0" i="1" smtClean="0">
+                                      <a:ln>
+                                        <a:noFill/>
+                                      </a:ln>
+                                      <a:solidFill>
+                                        <a:srgbClr val="FF0000"/>
+                                      </a:solidFill>
+                                      <a:latin typeface="Cambria Math" panose="02040503050406030204" pitchFamily="18" charset="0"/>
+                                    </a:rPr>
+                                  </m:ctrlPr>
+                                </m:sSubPr>
+                                <m:e>
+                                  <m:r>
+                                    <a:rPr lang="en-US" sz="2400" i="1" smtClean="0">
+                                      <a:ln>
+                                        <a:noFill/>
+                                      </a:ln>
+                                      <a:solidFill>
+                                        <a:srgbClr val="FF0000"/>
+                                      </a:solidFill>
+                                      <a:latin typeface="Cambria Math" panose="02040503050406030204" pitchFamily="18" charset="0"/>
+                                    </a:rPr>
+                                    <m:t>𝑥</m:t>
+                                  </m:r>
+                                </m:e>
+                                <m:sub>
+                                  <m:r>
+                                    <a:rPr lang="en-US" sz="2400" b="0" i="1" smtClean="0">
+                                      <a:ln>
+                                        <a:noFill/>
+                                      </a:ln>
+                                      <a:solidFill>
+                                        <a:srgbClr val="FF0000"/>
+                                      </a:solidFill>
+                                      <a:latin typeface="Cambria Math" panose="02040503050406030204" pitchFamily="18" charset="0"/>
+                                    </a:rPr>
+                                    <m:t>𝑏</m:t>
+                                  </m:r>
+                                </m:sub>
+                              </m:sSub>
+                            </m:oMath>
+                          </m:oMathPara>
+                        </a14:m>
+                        <a:endParaRPr lang="en-US" sz="2400" dirty="0">
+                          <a:ln>
+                            <a:noFill/>
+                          </a:ln>
+                          <a:solidFill>
+                            <a:srgbClr val="FF0000"/>
+                          </a:solidFill>
+                        </a:endParaRPr>
+                      </a:p>
+                    </p:txBody>
+                  </p:sp>
+                </mc:Choice>
+                <mc:Fallback>
+                  <p:sp>
+                    <p:nvSpPr>
+                      <p:cNvPr id="97" name="TextBox 96">
+                        <a:extLst>
+                          <a:ext uri="{FF2B5EF4-FFF2-40B4-BE49-F238E27FC236}">
+                            <a16:creationId xmlns:a16="http://schemas.microsoft.com/office/drawing/2014/main" id="{26194C53-F6B3-BF8C-C3CB-1749FBB306B7}"/>
+                          </a:ext>
+                        </a:extLst>
+                      </p:cNvPr>
+                      <p:cNvSpPr txBox="1">
+                        <a:spLocks noRot="1" noChangeAspect="1" noMove="1" noResize="1" noEditPoints="1" noAdjustHandles="1" noChangeArrowheads="1" noChangeShapeType="1" noTextEdit="1"/>
+                      </p:cNvSpPr>
+                      <p:nvPr/>
+                    </p:nvSpPr>
+                    <p:spPr>
+                      <a:xfrm>
+                        <a:off x="9200836" y="1474499"/>
+                        <a:ext cx="604895" cy="461665"/>
+                      </a:xfrm>
+                      <a:prstGeom prst="rect">
+                        <a:avLst/>
+                      </a:prstGeom>
+                      <a:blipFill>
+                        <a:blip r:embed="rId17"/>
+                        <a:stretch>
+                          <a:fillRect/>
+                        </a:stretch>
+                      </a:blipFill>
+                    </p:spPr>
+                    <p:txBody>
+                      <a:bodyPr/>
+                      <a:lstStyle/>
+                      <a:p>
+                        <a:r>
+                          <a:rPr lang="en-US">
+                            <a:noFill/>
+                          </a:rPr>
+                          <a:t> </a:t>
+                        </a:r>
+                      </a:p>
+                    </p:txBody>
+                  </p:sp>
+                </mc:Fallback>
+              </mc:AlternateContent>
+              <p:sp>
+                <p:nvSpPr>
+                  <p:cNvPr id="98" name="Arc 97">
+                    <a:extLst>
+                      <a:ext uri="{FF2B5EF4-FFF2-40B4-BE49-F238E27FC236}">
+                        <a16:creationId xmlns:a16="http://schemas.microsoft.com/office/drawing/2014/main" id="{28AC83C2-F08A-6620-A1B0-49133047F5C4}"/>
+                      </a:ext>
+                    </a:extLst>
+                  </p:cNvPr>
+                  <p:cNvSpPr/>
+                  <p:nvPr/>
+                </p:nvSpPr>
+                <p:spPr>
+                  <a:xfrm>
+                    <a:off x="7945884" y="3458550"/>
+                    <a:ext cx="145784" cy="492971"/>
+                  </a:xfrm>
+                  <a:prstGeom prst="arc">
+                    <a:avLst>
+                      <a:gd name="adj1" fmla="val 2678578"/>
+                      <a:gd name="adj2" fmla="val 19252713"/>
+                    </a:avLst>
+                  </a:prstGeom>
+                  <a:ln>
+                    <a:solidFill>
+                      <a:srgbClr val="FFFF00"/>
+                    </a:solidFill>
+                    <a:headEnd type="none" w="med" len="med"/>
+                    <a:tailEnd type="arrow" w="med" len="med"/>
+                  </a:ln>
+                </p:spPr>
+                <p:style>
+                  <a:lnRef idx="2">
+                    <a:schemeClr val="accent1"/>
+                  </a:lnRef>
+                  <a:fillRef idx="0">
+                    <a:schemeClr val="accent1"/>
+                  </a:fillRef>
+                  <a:effectRef idx="1">
+                    <a:schemeClr val="accent1"/>
+                  </a:effectRef>
+                  <a:fontRef idx="minor">
+                    <a:schemeClr val="tx1"/>
+                  </a:fontRef>
+                </p:style>
+                <p:txBody>
+                  <a:bodyPr rtlCol="0" anchor="ctr"/>
+                  <a:lstStyle/>
+                  <a:p>
+                    <a:pPr algn="ctr"/>
+                    <a:endParaRPr lang="en-US"/>
+                  </a:p>
+                </p:txBody>
+              </p:sp>
+              <p:sp>
+                <p:nvSpPr>
+                  <p:cNvPr id="99" name="Arc 98">
+                    <a:extLst>
+                      <a:ext uri="{FF2B5EF4-FFF2-40B4-BE49-F238E27FC236}">
+                        <a16:creationId xmlns:a16="http://schemas.microsoft.com/office/drawing/2014/main" id="{B94F435A-58A0-5AA0-01A8-6CABE205238F}"/>
+                      </a:ext>
+                    </a:extLst>
+                  </p:cNvPr>
+                  <p:cNvSpPr/>
+                  <p:nvPr/>
+                </p:nvSpPr>
+                <p:spPr>
+                  <a:xfrm rot="5573780" flipH="1">
+                    <a:off x="8275140" y="3001302"/>
+                    <a:ext cx="140639" cy="432736"/>
+                  </a:xfrm>
+                  <a:prstGeom prst="arc">
+                    <a:avLst>
+                      <a:gd name="adj1" fmla="val 2678578"/>
+                      <a:gd name="adj2" fmla="val 19252713"/>
+                    </a:avLst>
+                  </a:prstGeom>
+                  <a:ln>
+                    <a:solidFill>
+                      <a:srgbClr val="FFFF00"/>
+                    </a:solidFill>
+                    <a:headEnd type="none" w="med" len="med"/>
+                    <a:tailEnd type="arrow" w="med" len="med"/>
+                  </a:ln>
+                </p:spPr>
+                <p:style>
+                  <a:lnRef idx="2">
+                    <a:schemeClr val="accent1"/>
+                  </a:lnRef>
+                  <a:fillRef idx="0">
+                    <a:schemeClr val="accent1"/>
+                  </a:fillRef>
+                  <a:effectRef idx="1">
+                    <a:schemeClr val="accent1"/>
+                  </a:effectRef>
+                  <a:fontRef idx="minor">
+                    <a:schemeClr val="tx1"/>
+                  </a:fontRef>
+                </p:style>
+                <p:txBody>
+                  <a:bodyPr rtlCol="0" anchor="ctr"/>
+                  <a:lstStyle/>
+                  <a:p>
+                    <a:pPr algn="ctr"/>
+                    <a:endParaRPr lang="en-US"/>
+                  </a:p>
+                </p:txBody>
+              </p:sp>
+              <p:sp>
+                <p:nvSpPr>
+                  <p:cNvPr id="100" name="Arc 99">
+                    <a:extLst>
+                      <a:ext uri="{FF2B5EF4-FFF2-40B4-BE49-F238E27FC236}">
+                        <a16:creationId xmlns:a16="http://schemas.microsoft.com/office/drawing/2014/main" id="{10339A4D-364F-C9DE-AB68-2AE9EC15E02C}"/>
+                      </a:ext>
+                    </a:extLst>
+                  </p:cNvPr>
+                  <p:cNvSpPr/>
+                  <p:nvPr/>
+                </p:nvSpPr>
+                <p:spPr>
+                  <a:xfrm rot="7200403" flipH="1">
+                    <a:off x="8509750" y="3341029"/>
+                    <a:ext cx="104426" cy="350246"/>
+                  </a:xfrm>
+                  <a:prstGeom prst="arc">
+                    <a:avLst>
+                      <a:gd name="adj1" fmla="val 2678578"/>
+                      <a:gd name="adj2" fmla="val 19252713"/>
+                    </a:avLst>
+                  </a:prstGeom>
+                  <a:ln>
+                    <a:solidFill>
+                      <a:srgbClr val="FFFF00"/>
+                    </a:solidFill>
+                    <a:headEnd type="none" w="med" len="med"/>
+                    <a:tailEnd type="arrow" w="med" len="med"/>
+                  </a:ln>
+                </p:spPr>
+                <p:style>
+                  <a:lnRef idx="2">
+                    <a:schemeClr val="accent1"/>
+                  </a:lnRef>
+                  <a:fillRef idx="0">
+                    <a:schemeClr val="accent1"/>
+                  </a:fillRef>
+                  <a:effectRef idx="1">
+                    <a:schemeClr val="accent1"/>
+                  </a:effectRef>
+                  <a:fontRef idx="minor">
+                    <a:schemeClr val="tx1"/>
+                  </a:fontRef>
+                </p:style>
+                <p:txBody>
+                  <a:bodyPr rtlCol="0" anchor="ctr"/>
+                  <a:lstStyle/>
+                  <a:p>
+                    <a:pPr algn="ctr"/>
+                    <a:endParaRPr lang="en-US"/>
+                  </a:p>
+                </p:txBody>
+              </p:sp>
+              <mc:AlternateContent xmlns:mc="http://schemas.openxmlformats.org/markup-compatibility/2006">
+                <mc:Choice xmlns:a14="http://schemas.microsoft.com/office/drawing/2010/main" Requires="a14">
+                  <p:sp>
+                    <p:nvSpPr>
+                      <p:cNvPr id="101" name="TextBox 100">
+                        <a:extLst>
+                          <a:ext uri="{FF2B5EF4-FFF2-40B4-BE49-F238E27FC236}">
+                            <a16:creationId xmlns:a16="http://schemas.microsoft.com/office/drawing/2014/main" id="{43ED1EEF-9CE3-7E49-54CA-0C3C77460C25}"/>
+                          </a:ext>
+                        </a:extLst>
+                      </p:cNvPr>
+                      <p:cNvSpPr txBox="1"/>
+                      <p:nvPr/>
+                    </p:nvSpPr>
+                    <p:spPr>
+                      <a:xfrm>
+                        <a:off x="7781430" y="2905674"/>
+                        <a:ext cx="471763" cy="461665"/>
+                      </a:xfrm>
+                      <a:prstGeom prst="rect">
+                        <a:avLst/>
+                      </a:prstGeom>
+                      <a:noFill/>
+                    </p:spPr>
+                    <p:txBody>
+                      <a:bodyPr wrap="square" rtlCol="0">
+                        <a:spAutoFit/>
+                      </a:bodyPr>
+                      <a:lstStyle/>
+                      <a:p>
+                        <a14:m>
+                          <m:oMathPara xmlns:m="http://schemas.openxmlformats.org/officeDocument/2006/math">
+                            <m:oMathParaPr>
+                              <m:jc m:val="centerGroup"/>
+                            </m:oMathParaPr>
+                            <m:oMath xmlns:m="http://schemas.openxmlformats.org/officeDocument/2006/math">
+                              <m:r>
+                                <a:rPr lang="en-US" sz="2400" i="1" smtClean="0">
+                                  <a:ln>
+                                    <a:noFill/>
+                                  </a:ln>
+                                  <a:solidFill>
+                                    <a:srgbClr val="FFFF00"/>
+                                  </a:solidFill>
+                                  <a:latin typeface="Cambria Math" panose="02040503050406030204" pitchFamily="18" charset="0"/>
+                                </a:rPr>
+                                <m:t>𝜙</m:t>
+                              </m:r>
+                            </m:oMath>
+                          </m:oMathPara>
+                        </a14:m>
+                        <a:endParaRPr lang="en-US" sz="2400" dirty="0">
+                          <a:ln>
+                            <a:noFill/>
+                          </a:ln>
+                          <a:solidFill>
+                            <a:srgbClr val="FFFF00"/>
+                          </a:solidFill>
+                        </a:endParaRPr>
+                      </a:p>
+                    </p:txBody>
+                  </p:sp>
+                </mc:Choice>
+                <mc:Fallback>
+                  <p:sp>
+                    <p:nvSpPr>
+                      <p:cNvPr id="101" name="TextBox 100">
+                        <a:extLst>
+                          <a:ext uri="{FF2B5EF4-FFF2-40B4-BE49-F238E27FC236}">
+                            <a16:creationId xmlns:a16="http://schemas.microsoft.com/office/drawing/2014/main" id="{43ED1EEF-9CE3-7E49-54CA-0C3C77460C25}"/>
+                          </a:ext>
+                        </a:extLst>
+                      </p:cNvPr>
+                      <p:cNvSpPr txBox="1">
+                        <a:spLocks noRot="1" noChangeAspect="1" noMove="1" noResize="1" noEditPoints="1" noAdjustHandles="1" noChangeArrowheads="1" noChangeShapeType="1" noTextEdit="1"/>
+                      </p:cNvSpPr>
+                      <p:nvPr/>
+                    </p:nvSpPr>
+                    <p:spPr>
+                      <a:xfrm>
+                        <a:off x="7781430" y="2905674"/>
+                        <a:ext cx="471763" cy="461665"/>
+                      </a:xfrm>
+                      <a:prstGeom prst="rect">
+                        <a:avLst/>
+                      </a:prstGeom>
+                      <a:blipFill>
+                        <a:blip r:embed="rId18"/>
+                        <a:stretch>
+                          <a:fillRect l="-2564" b="-16000"/>
+                        </a:stretch>
+                      </a:blipFill>
+                    </p:spPr>
+                    <p:txBody>
+                      <a:bodyPr/>
+                      <a:lstStyle/>
+                      <a:p>
+                        <a:r>
+                          <a:rPr lang="en-US">
+                            <a:noFill/>
+                          </a:rPr>
+                          <a:t> </a:t>
+                        </a:r>
+                      </a:p>
+                    </p:txBody>
+                  </p:sp>
+                </mc:Fallback>
+              </mc:AlternateContent>
+              <mc:AlternateContent xmlns:mc="http://schemas.openxmlformats.org/markup-compatibility/2006">
+                <mc:Choice xmlns:a14="http://schemas.microsoft.com/office/drawing/2010/main" Requires="a14">
+                  <p:sp>
+                    <p:nvSpPr>
+                      <p:cNvPr id="102" name="TextBox 101">
+                        <a:extLst>
+                          <a:ext uri="{FF2B5EF4-FFF2-40B4-BE49-F238E27FC236}">
+                            <a16:creationId xmlns:a16="http://schemas.microsoft.com/office/drawing/2014/main" id="{6127D515-1749-EDA4-C574-DD2BB0A093AA}"/>
+                          </a:ext>
+                        </a:extLst>
+                      </p:cNvPr>
+                      <p:cNvSpPr txBox="1"/>
+                      <p:nvPr/>
+                    </p:nvSpPr>
+                    <p:spPr>
+                      <a:xfrm>
+                        <a:off x="7577419" y="3613723"/>
+                        <a:ext cx="471763" cy="461665"/>
+                      </a:xfrm>
+                      <a:prstGeom prst="rect">
+                        <a:avLst/>
+                      </a:prstGeom>
+                      <a:noFill/>
+                    </p:spPr>
+                    <p:txBody>
+                      <a:bodyPr wrap="square" rtlCol="0">
+                        <a:spAutoFit/>
+                      </a:bodyPr>
+                      <a:lstStyle/>
+                      <a:p>
+                        <a14:m>
+                          <m:oMathPara xmlns:m="http://schemas.openxmlformats.org/officeDocument/2006/math">
+                            <m:oMathParaPr>
+                              <m:jc m:val="centerGroup"/>
+                            </m:oMathParaPr>
+                            <m:oMath xmlns:m="http://schemas.openxmlformats.org/officeDocument/2006/math">
+                              <m:r>
+                                <a:rPr lang="en-US" sz="2400" b="0" i="1" smtClean="0">
+                                  <a:ln>
+                                    <a:noFill/>
+                                  </a:ln>
+                                  <a:solidFill>
+                                    <a:srgbClr val="FFFF00"/>
+                                  </a:solidFill>
+                                  <a:latin typeface="Cambria Math" panose="02040503050406030204" pitchFamily="18" charset="0"/>
+                                </a:rPr>
+                                <m:t>𝜔</m:t>
+                              </m:r>
+                            </m:oMath>
+                          </m:oMathPara>
+                        </a14:m>
+                        <a:endParaRPr lang="en-US" sz="2400" dirty="0">
+                          <a:ln>
+                            <a:noFill/>
+                          </a:ln>
+                          <a:solidFill>
+                            <a:srgbClr val="FFFF00"/>
+                          </a:solidFill>
+                        </a:endParaRPr>
+                      </a:p>
+                    </p:txBody>
+                  </p:sp>
+                </mc:Choice>
+                <mc:Fallback>
+                  <p:sp>
+                    <p:nvSpPr>
+                      <p:cNvPr id="102" name="TextBox 101">
+                        <a:extLst>
+                          <a:ext uri="{FF2B5EF4-FFF2-40B4-BE49-F238E27FC236}">
+                            <a16:creationId xmlns:a16="http://schemas.microsoft.com/office/drawing/2014/main" id="{6127D515-1749-EDA4-C574-DD2BB0A093AA}"/>
+                          </a:ext>
+                        </a:extLst>
+                      </p:cNvPr>
+                      <p:cNvSpPr txBox="1">
+                        <a:spLocks noRot="1" noChangeAspect="1" noMove="1" noResize="1" noEditPoints="1" noAdjustHandles="1" noChangeArrowheads="1" noChangeShapeType="1" noTextEdit="1"/>
+                      </p:cNvSpPr>
+                      <p:nvPr/>
+                    </p:nvSpPr>
+                    <p:spPr>
+                      <a:xfrm>
+                        <a:off x="7577419" y="3613723"/>
+                        <a:ext cx="471763" cy="461665"/>
+                      </a:xfrm>
+                      <a:prstGeom prst="rect">
+                        <a:avLst/>
+                      </a:prstGeom>
+                      <a:blipFill>
+                        <a:blip r:embed="rId19"/>
+                        <a:stretch>
+                          <a:fillRect/>
+                        </a:stretch>
+                      </a:blipFill>
+                    </p:spPr>
+                    <p:txBody>
+                      <a:bodyPr/>
+                      <a:lstStyle/>
+                      <a:p>
+                        <a:r>
+                          <a:rPr lang="en-US">
+                            <a:noFill/>
+                          </a:rPr>
+                          <a:t> </a:t>
+                        </a:r>
+                      </a:p>
+                    </p:txBody>
+                  </p:sp>
+                </mc:Fallback>
+              </mc:AlternateContent>
+              <mc:AlternateContent xmlns:mc="http://schemas.openxmlformats.org/markup-compatibility/2006">
+                <mc:Choice xmlns:a14="http://schemas.microsoft.com/office/drawing/2010/main" Requires="a14">
+                  <p:sp>
+                    <p:nvSpPr>
+                      <p:cNvPr id="103" name="TextBox 102">
+                        <a:extLst>
+                          <a:ext uri="{FF2B5EF4-FFF2-40B4-BE49-F238E27FC236}">
+                            <a16:creationId xmlns:a16="http://schemas.microsoft.com/office/drawing/2014/main" id="{0668F678-9DAA-C260-C1D6-9BADAA53E723}"/>
+                          </a:ext>
+                        </a:extLst>
+                      </p:cNvPr>
+                      <p:cNvSpPr txBox="1"/>
+                      <p:nvPr/>
+                    </p:nvSpPr>
+                    <p:spPr>
+                      <a:xfrm>
+                        <a:off x="8612406" y="3382891"/>
+                        <a:ext cx="471763" cy="461665"/>
+                      </a:xfrm>
+                      <a:prstGeom prst="rect">
+                        <a:avLst/>
+                      </a:prstGeom>
+                      <a:noFill/>
+                    </p:spPr>
+                    <p:txBody>
+                      <a:bodyPr wrap="square" rtlCol="0">
+                        <a:spAutoFit/>
+                      </a:bodyPr>
+                      <a:lstStyle/>
+                      <a:p>
+                        <a14:m>
+                          <m:oMathPara xmlns:m="http://schemas.openxmlformats.org/officeDocument/2006/math">
+                            <m:oMathParaPr>
+                              <m:jc m:val="centerGroup"/>
+                            </m:oMathParaPr>
+                            <m:oMath xmlns:m="http://schemas.openxmlformats.org/officeDocument/2006/math">
+                              <m:r>
+                                <a:rPr lang="en-US" sz="2400" b="0" i="1" smtClean="0">
+                                  <a:ln>
+                                    <a:noFill/>
+                                  </a:ln>
+                                  <a:solidFill>
+                                    <a:srgbClr val="FFFF00"/>
+                                  </a:solidFill>
+                                  <a:latin typeface="Cambria Math" panose="02040503050406030204" pitchFamily="18" charset="0"/>
+                                </a:rPr>
+                                <m:t>𝜒</m:t>
+                              </m:r>
+                            </m:oMath>
+                          </m:oMathPara>
+                        </a14:m>
+                        <a:endParaRPr lang="en-US" sz="2400" dirty="0">
+                          <a:ln>
+                            <a:noFill/>
+                          </a:ln>
+                          <a:solidFill>
+                            <a:srgbClr val="FFFF00"/>
+                          </a:solidFill>
+                        </a:endParaRPr>
+                      </a:p>
+                    </p:txBody>
+                  </p:sp>
+                </mc:Choice>
+                <mc:Fallback>
+                  <p:sp>
+                    <p:nvSpPr>
+                      <p:cNvPr id="103" name="TextBox 102">
+                        <a:extLst>
+                          <a:ext uri="{FF2B5EF4-FFF2-40B4-BE49-F238E27FC236}">
+                            <a16:creationId xmlns:a16="http://schemas.microsoft.com/office/drawing/2014/main" id="{0668F678-9DAA-C260-C1D6-9BADAA53E723}"/>
+                          </a:ext>
+                        </a:extLst>
+                      </p:cNvPr>
+                      <p:cNvSpPr txBox="1">
+                        <a:spLocks noRot="1" noChangeAspect="1" noMove="1" noResize="1" noEditPoints="1" noAdjustHandles="1" noChangeArrowheads="1" noChangeShapeType="1" noTextEdit="1"/>
+                      </p:cNvSpPr>
+                      <p:nvPr/>
+                    </p:nvSpPr>
+                    <p:spPr>
+                      <a:xfrm>
+                        <a:off x="8612406" y="3382891"/>
+                        <a:ext cx="471763" cy="461665"/>
+                      </a:xfrm>
+                      <a:prstGeom prst="rect">
+                        <a:avLst/>
+                      </a:prstGeom>
+                      <a:blipFill>
+                        <a:blip r:embed="rId20"/>
+                        <a:stretch>
+                          <a:fillRect b="-6579"/>
+                        </a:stretch>
+                      </a:blipFill>
+                    </p:spPr>
+                    <p:txBody>
+                      <a:bodyPr/>
+                      <a:lstStyle/>
+                      <a:p>
+                        <a:r>
+                          <a:rPr lang="en-US">
+                            <a:noFill/>
+                          </a:rPr>
+                          <a:t> </a:t>
+                        </a:r>
+                      </a:p>
+                    </p:txBody>
+                  </p:sp>
+                </mc:Fallback>
+              </mc:AlternateContent>
+              <p:cxnSp>
+                <p:nvCxnSpPr>
+                  <p:cNvPr id="107" name="Straight Arrow Connector 106">
+                    <a:extLst>
+                      <a:ext uri="{FF2B5EF4-FFF2-40B4-BE49-F238E27FC236}">
+                        <a16:creationId xmlns:a16="http://schemas.microsoft.com/office/drawing/2014/main" id="{1DFE7E19-FD63-922A-4FFE-CF4BE541B118}"/>
+                      </a:ext>
+                    </a:extLst>
+                  </p:cNvPr>
+                  <p:cNvCxnSpPr>
+                    <a:cxnSpLocks/>
+                  </p:cNvCxnSpPr>
+                  <p:nvPr/>
+                </p:nvCxnSpPr>
+                <p:spPr>
+                  <a:xfrm flipH="1" flipV="1">
+                    <a:off x="8467808" y="1946469"/>
+                    <a:ext cx="489557" cy="8998"/>
+                  </a:xfrm>
+                  <a:prstGeom prst="straightConnector1">
+                    <a:avLst/>
+                  </a:prstGeom>
+                  <a:ln w="38100">
+                    <a:solidFill>
+                      <a:srgbClr val="FF0000"/>
+                    </a:solidFill>
+                    <a:tailEnd type="triangle"/>
+                  </a:ln>
+                </p:spPr>
+                <p:style>
+                  <a:lnRef idx="2">
+                    <a:schemeClr val="accent1"/>
+                  </a:lnRef>
+                  <a:fillRef idx="0">
+                    <a:schemeClr val="accent1"/>
+                  </a:fillRef>
+                  <a:effectRef idx="1">
+                    <a:schemeClr val="accent1"/>
+                  </a:effectRef>
+                  <a:fontRef idx="minor">
+                    <a:schemeClr val="tx1"/>
+                  </a:fontRef>
+                </p:style>
+              </p:cxnSp>
+              <p:cxnSp>
+                <p:nvCxnSpPr>
+                  <p:cNvPr id="108" name="Straight Arrow Connector 107">
+                    <a:extLst>
+                      <a:ext uri="{FF2B5EF4-FFF2-40B4-BE49-F238E27FC236}">
+                        <a16:creationId xmlns:a16="http://schemas.microsoft.com/office/drawing/2014/main" id="{41CA21A3-7B22-B5DD-263C-51B93D4E3F68}"/>
+                      </a:ext>
+                    </a:extLst>
+                  </p:cNvPr>
+                  <p:cNvCxnSpPr>
+                    <a:cxnSpLocks/>
+                  </p:cNvCxnSpPr>
+                  <p:nvPr/>
+                </p:nvCxnSpPr>
+                <p:spPr>
+                  <a:xfrm flipH="1" flipV="1">
+                    <a:off x="8945495" y="1428040"/>
+                    <a:ext cx="5232" cy="541308"/>
+                  </a:xfrm>
+                  <a:prstGeom prst="straightConnector1">
+                    <a:avLst/>
+                  </a:prstGeom>
+                  <a:ln w="38100">
+                    <a:solidFill>
+                      <a:srgbClr val="FF0000"/>
+                    </a:solidFill>
+                    <a:tailEnd type="triangle"/>
+                  </a:ln>
+                </p:spPr>
+                <p:style>
+                  <a:lnRef idx="2">
+                    <a:schemeClr val="accent1"/>
+                  </a:lnRef>
+                  <a:fillRef idx="0">
+                    <a:schemeClr val="accent1"/>
+                  </a:fillRef>
+                  <a:effectRef idx="1">
+                    <a:schemeClr val="accent1"/>
+                  </a:effectRef>
+                  <a:fontRef idx="minor">
+                    <a:schemeClr val="tx1"/>
+                  </a:fontRef>
+                </p:style>
+              </p:cxnSp>
+              <p:cxnSp>
+                <p:nvCxnSpPr>
+                  <p:cNvPr id="109" name="Straight Arrow Connector 108">
+                    <a:extLst>
+                      <a:ext uri="{FF2B5EF4-FFF2-40B4-BE49-F238E27FC236}">
+                        <a16:creationId xmlns:a16="http://schemas.microsoft.com/office/drawing/2014/main" id="{EAFB59C4-3BBE-2948-6250-8EC557C875B4}"/>
+                      </a:ext>
+                    </a:extLst>
+                  </p:cNvPr>
+                  <p:cNvCxnSpPr>
+                    <a:cxnSpLocks/>
+                  </p:cNvCxnSpPr>
+                  <p:nvPr/>
+                </p:nvCxnSpPr>
+                <p:spPr>
+                  <a:xfrm flipV="1">
+                    <a:off x="8942125" y="1669569"/>
+                    <a:ext cx="263920" cy="283560"/>
+                  </a:xfrm>
+                  <a:prstGeom prst="straightConnector1">
+                    <a:avLst/>
+                  </a:prstGeom>
+                  <a:ln w="38100">
+                    <a:solidFill>
+                      <a:srgbClr val="FF0000"/>
+                    </a:solidFill>
+                    <a:prstDash val="sysDot"/>
+                    <a:tailEnd type="triangle"/>
+                  </a:ln>
+                </p:spPr>
+                <p:style>
+                  <a:lnRef idx="2">
+                    <a:schemeClr val="accent1"/>
+                  </a:lnRef>
+                  <a:fillRef idx="0">
+                    <a:schemeClr val="accent1"/>
+                  </a:fillRef>
+                  <a:effectRef idx="1">
+                    <a:schemeClr val="accent1"/>
+                  </a:effectRef>
+                  <a:fontRef idx="minor">
+                    <a:schemeClr val="tx1"/>
+                  </a:fontRef>
+                </p:style>
+              </p:cxnSp>
+              <mc:AlternateContent xmlns:mc="http://schemas.openxmlformats.org/markup-compatibility/2006">
+                <mc:Choice xmlns:a14="http://schemas.microsoft.com/office/drawing/2010/main" Requires="a14">
+                  <p:sp>
+                    <p:nvSpPr>
+                      <p:cNvPr id="110" name="TextBox 109">
+                        <a:extLst>
+                          <a:ext uri="{FF2B5EF4-FFF2-40B4-BE49-F238E27FC236}">
+                            <a16:creationId xmlns:a16="http://schemas.microsoft.com/office/drawing/2014/main" id="{E4E908AB-E1A2-59FA-75E3-061E711F1242}"/>
+                          </a:ext>
+                        </a:extLst>
+                      </p:cNvPr>
+                      <p:cNvSpPr txBox="1"/>
+                      <p:nvPr/>
+                    </p:nvSpPr>
+                    <p:spPr>
+                      <a:xfrm>
+                        <a:off x="8288746" y="976558"/>
+                        <a:ext cx="1214538" cy="461665"/>
+                      </a:xfrm>
+                      <a:prstGeom prst="rect">
+                        <a:avLst/>
+                      </a:prstGeom>
+                      <a:noFill/>
+                    </p:spPr>
+                    <p:txBody>
+                      <a:bodyPr wrap="square" rtlCol="0">
+                        <a:spAutoFit/>
+                      </a:bodyPr>
+                      <a:lstStyle/>
+                      <a:p>
+                        <a14:m>
+                          <m:oMathPara xmlns:m="http://schemas.openxmlformats.org/officeDocument/2006/math">
+                            <m:oMathParaPr>
+                              <m:jc m:val="centerGroup"/>
+                            </m:oMathParaPr>
+                            <m:oMath xmlns:m="http://schemas.openxmlformats.org/officeDocument/2006/math">
+                              <m:sSub>
+                                <m:sSubPr>
+                                  <m:ctrlPr>
+                                    <a:rPr lang="en-US" sz="2400" b="0" i="1" smtClean="0">
+                                      <a:ln>
+                                        <a:noFill/>
+                                      </a:ln>
+                                      <a:solidFill>
+                                        <a:srgbClr val="FF0000"/>
+                                      </a:solidFill>
+                                      <a:latin typeface="Cambria Math" panose="02040503050406030204" pitchFamily="18" charset="0"/>
+                                    </a:rPr>
+                                  </m:ctrlPr>
+                                </m:sSubPr>
+                                <m:e>
+                                  <m:r>
+                                    <a:rPr lang="en-US" sz="2400" b="0" i="1" smtClean="0">
+                                      <a:ln>
+                                        <a:noFill/>
+                                      </a:ln>
+                                      <a:solidFill>
+                                        <a:srgbClr val="FF0000"/>
+                                      </a:solidFill>
+                                      <a:latin typeface="Cambria Math" panose="02040503050406030204" pitchFamily="18" charset="0"/>
+                                    </a:rPr>
+                                    <m:t>𝑦</m:t>
+                                  </m:r>
+                                </m:e>
+                                <m:sub>
+                                  <m:r>
+                                    <a:rPr lang="en-US" sz="2400" b="0" i="1" smtClean="0">
+                                      <a:ln>
+                                        <a:noFill/>
+                                      </a:ln>
+                                      <a:solidFill>
+                                        <a:srgbClr val="FF0000"/>
+                                      </a:solidFill>
+                                      <a:latin typeface="Cambria Math" panose="02040503050406030204" pitchFamily="18" charset="0"/>
+                                    </a:rPr>
+                                    <m:t>𝑑</m:t>
+                                  </m:r>
+                                </m:sub>
+                              </m:sSub>
+                            </m:oMath>
+                          </m:oMathPara>
+                        </a14:m>
+                        <a:endParaRPr lang="en-US" sz="2400" dirty="0">
+                          <a:ln>
+                            <a:noFill/>
+                          </a:ln>
+                          <a:solidFill>
+                            <a:srgbClr val="FF0000"/>
+                          </a:solidFill>
+                        </a:endParaRPr>
+                      </a:p>
+                    </p:txBody>
+                  </p:sp>
+                </mc:Choice>
+                <mc:Fallback>
+                  <p:sp>
+                    <p:nvSpPr>
+                      <p:cNvPr id="110" name="TextBox 109">
+                        <a:extLst>
+                          <a:ext uri="{FF2B5EF4-FFF2-40B4-BE49-F238E27FC236}">
+                            <a16:creationId xmlns:a16="http://schemas.microsoft.com/office/drawing/2014/main" id="{E4E908AB-E1A2-59FA-75E3-061E711F1242}"/>
+                          </a:ext>
+                        </a:extLst>
+                      </p:cNvPr>
+                      <p:cNvSpPr txBox="1">
+                        <a:spLocks noRot="1" noChangeAspect="1" noMove="1" noResize="1" noEditPoints="1" noAdjustHandles="1" noChangeArrowheads="1" noChangeShapeType="1" noTextEdit="1"/>
+                      </p:cNvSpPr>
+                      <p:nvPr/>
+                    </p:nvSpPr>
+                    <p:spPr>
+                      <a:xfrm>
+                        <a:off x="8288746" y="976558"/>
+                        <a:ext cx="1214538" cy="461665"/>
+                      </a:xfrm>
+                      <a:prstGeom prst="rect">
+                        <a:avLst/>
+                      </a:prstGeom>
+                      <a:blipFill>
+                        <a:blip r:embed="rId21"/>
+                        <a:stretch>
+                          <a:fillRect b="-9211"/>
+                        </a:stretch>
+                      </a:blipFill>
+                    </p:spPr>
+                    <p:txBody>
+                      <a:bodyPr/>
+                      <a:lstStyle/>
+                      <a:p>
+                        <a:r>
+                          <a:rPr lang="en-US">
+                            <a:noFill/>
+                          </a:rPr>
+                          <a:t> </a:t>
+                        </a:r>
+                      </a:p>
+                    </p:txBody>
+                  </p:sp>
+                </mc:Fallback>
+              </mc:AlternateContent>
+              <mc:AlternateContent xmlns:mc="http://schemas.openxmlformats.org/markup-compatibility/2006">
+                <mc:Choice xmlns:a14="http://schemas.microsoft.com/office/drawing/2010/main" Requires="a14">
+                  <p:sp>
+                    <p:nvSpPr>
+                      <p:cNvPr id="111" name="TextBox 110">
+                        <a:extLst>
+                          <a:ext uri="{FF2B5EF4-FFF2-40B4-BE49-F238E27FC236}">
+                            <a16:creationId xmlns:a16="http://schemas.microsoft.com/office/drawing/2014/main" id="{C94ADF84-C945-D8AC-BCB8-C5E39C0FDE1E}"/>
+                          </a:ext>
+                        </a:extLst>
+                      </p:cNvPr>
+                      <p:cNvSpPr txBox="1"/>
+                      <p:nvPr/>
+                    </p:nvSpPr>
+                    <p:spPr>
+                      <a:xfrm>
+                        <a:off x="8957365" y="1223109"/>
+                        <a:ext cx="471763" cy="461665"/>
+                      </a:xfrm>
+                      <a:prstGeom prst="rect">
+                        <a:avLst/>
+                      </a:prstGeom>
+                      <a:noFill/>
+                    </p:spPr>
+                    <p:txBody>
+                      <a:bodyPr wrap="square" rtlCol="0">
+                        <a:spAutoFit/>
+                      </a:bodyPr>
+                      <a:lstStyle/>
+                      <a:p>
+                        <a14:m>
+                          <m:oMathPara xmlns:m="http://schemas.openxmlformats.org/officeDocument/2006/math">
+                            <m:oMathParaPr>
+                              <m:jc m:val="centerGroup"/>
+                            </m:oMathParaPr>
+                            <m:oMath xmlns:m="http://schemas.openxmlformats.org/officeDocument/2006/math">
+                              <m:sSub>
+                                <m:sSubPr>
+                                  <m:ctrlPr>
+                                    <a:rPr lang="en-US" sz="2400" b="0" i="1" smtClean="0">
+                                      <a:ln>
+                                        <a:noFill/>
+                                      </a:ln>
+                                      <a:solidFill>
+                                        <a:srgbClr val="FF0000"/>
+                                      </a:solidFill>
+                                      <a:latin typeface="Cambria Math" panose="02040503050406030204" pitchFamily="18" charset="0"/>
+                                    </a:rPr>
+                                  </m:ctrlPr>
+                                </m:sSubPr>
+                                <m:e>
+                                  <m:r>
+                                    <a:rPr lang="en-US" sz="2400" i="1" smtClean="0">
+                                      <a:ln>
+                                        <a:noFill/>
+                                      </a:ln>
+                                      <a:solidFill>
+                                        <a:srgbClr val="FF0000"/>
+                                      </a:solidFill>
+                                      <a:latin typeface="Cambria Math" panose="02040503050406030204" pitchFamily="18" charset="0"/>
+                                    </a:rPr>
+                                    <m:t>𝑧</m:t>
+                                  </m:r>
+                                </m:e>
+                                <m:sub>
+                                  <m:r>
+                                    <a:rPr lang="en-US" sz="2400" b="0" i="1" smtClean="0">
+                                      <a:ln>
+                                        <a:noFill/>
+                                      </a:ln>
+                                      <a:solidFill>
+                                        <a:srgbClr val="FF0000"/>
+                                      </a:solidFill>
+                                      <a:latin typeface="Cambria Math" panose="02040503050406030204" pitchFamily="18" charset="0"/>
+                                    </a:rPr>
+                                    <m:t>𝑑</m:t>
+                                  </m:r>
+                                </m:sub>
+                              </m:sSub>
+                            </m:oMath>
+                          </m:oMathPara>
+                        </a14:m>
+                        <a:endParaRPr lang="en-US" sz="2400" dirty="0">
+                          <a:ln>
+                            <a:noFill/>
+                          </a:ln>
+                          <a:solidFill>
+                            <a:srgbClr val="FF0000"/>
+                          </a:solidFill>
+                        </a:endParaRPr>
+                      </a:p>
+                    </p:txBody>
+                  </p:sp>
+                </mc:Choice>
+                <mc:Fallback>
+                  <p:sp>
+                    <p:nvSpPr>
+                      <p:cNvPr id="111" name="TextBox 110">
+                        <a:extLst>
+                          <a:ext uri="{FF2B5EF4-FFF2-40B4-BE49-F238E27FC236}">
+                            <a16:creationId xmlns:a16="http://schemas.microsoft.com/office/drawing/2014/main" id="{C94ADF84-C945-D8AC-BCB8-C5E39C0FDE1E}"/>
+                          </a:ext>
+                        </a:extLst>
+                      </p:cNvPr>
+                      <p:cNvSpPr txBox="1">
+                        <a:spLocks noRot="1" noChangeAspect="1" noMove="1" noResize="1" noEditPoints="1" noAdjustHandles="1" noChangeArrowheads="1" noChangeShapeType="1" noTextEdit="1"/>
+                      </p:cNvSpPr>
+                      <p:nvPr/>
+                    </p:nvSpPr>
+                    <p:spPr>
+                      <a:xfrm>
+                        <a:off x="8957365" y="1223109"/>
+                        <a:ext cx="471763" cy="461665"/>
+                      </a:xfrm>
+                      <a:prstGeom prst="rect">
+                        <a:avLst/>
+                      </a:prstGeom>
+                      <a:blipFill>
+                        <a:blip r:embed="rId22"/>
+                        <a:stretch>
+                          <a:fillRect b="-1333"/>
+                        </a:stretch>
+                      </a:blipFill>
+                    </p:spPr>
+                    <p:txBody>
+                      <a:bodyPr/>
+                      <a:lstStyle/>
+                      <a:p>
+                        <a:r>
+                          <a:rPr lang="en-US">
+                            <a:noFill/>
+                          </a:rPr>
+                          <a:t> </a:t>
+                        </a:r>
+                      </a:p>
+                    </p:txBody>
+                  </p:sp>
+                </mc:Fallback>
+              </mc:AlternateContent>
+              <mc:AlternateContent xmlns:mc="http://schemas.openxmlformats.org/markup-compatibility/2006">
+                <mc:Choice xmlns:a14="http://schemas.microsoft.com/office/drawing/2010/main" Requires="a14">
+                  <p:sp>
+                    <p:nvSpPr>
+                      <p:cNvPr id="112" name="TextBox 111">
+                        <a:extLst>
+                          <a:ext uri="{FF2B5EF4-FFF2-40B4-BE49-F238E27FC236}">
+                            <a16:creationId xmlns:a16="http://schemas.microsoft.com/office/drawing/2014/main" id="{13E65EE4-9F64-6B93-C0B8-7932663E4328}"/>
+                          </a:ext>
+                        </a:extLst>
+                      </p:cNvPr>
+                      <p:cNvSpPr txBox="1"/>
+                      <p:nvPr/>
+                    </p:nvSpPr>
+                    <p:spPr>
+                      <a:xfrm>
+                        <a:off x="8071103" y="1483099"/>
+                        <a:ext cx="580305" cy="461665"/>
+                      </a:xfrm>
+                      <a:prstGeom prst="rect">
+                        <a:avLst/>
+                      </a:prstGeom>
+                      <a:noFill/>
+                    </p:spPr>
+                    <p:txBody>
+                      <a:bodyPr wrap="square" rtlCol="0">
+                        <a:spAutoFit/>
+                      </a:bodyPr>
+                      <a:lstStyle/>
+                      <a:p>
+                        <a14:m>
+                          <m:oMathPara xmlns:m="http://schemas.openxmlformats.org/officeDocument/2006/math">
+                            <m:oMathParaPr>
+                              <m:jc m:val="centerGroup"/>
+                            </m:oMathParaPr>
+                            <m:oMath xmlns:m="http://schemas.openxmlformats.org/officeDocument/2006/math">
+                              <m:sSub>
+                                <m:sSubPr>
+                                  <m:ctrlPr>
+                                    <a:rPr lang="en-US" sz="2400" b="0" i="1" smtClean="0">
+                                      <a:ln>
+                                        <a:noFill/>
+                                      </a:ln>
+                                      <a:solidFill>
+                                        <a:srgbClr val="FF0000"/>
+                                      </a:solidFill>
+                                      <a:latin typeface="Cambria Math" panose="02040503050406030204" pitchFamily="18" charset="0"/>
+                                    </a:rPr>
+                                  </m:ctrlPr>
+                                </m:sSubPr>
+                                <m:e>
+                                  <m:r>
+                                    <a:rPr lang="en-US" sz="2400" i="1" smtClean="0">
+                                      <a:ln>
+                                        <a:noFill/>
+                                      </a:ln>
+                                      <a:solidFill>
+                                        <a:srgbClr val="FF0000"/>
+                                      </a:solidFill>
+                                      <a:latin typeface="Cambria Math" panose="02040503050406030204" pitchFamily="18" charset="0"/>
+                                    </a:rPr>
+                                    <m:t>𝑥</m:t>
+                                  </m:r>
+                                </m:e>
+                                <m:sub>
+                                  <m:r>
+                                    <a:rPr lang="en-US" sz="2400" b="0" i="1" smtClean="0">
+                                      <a:ln>
+                                        <a:noFill/>
+                                      </a:ln>
+                                      <a:solidFill>
+                                        <a:srgbClr val="FF0000"/>
+                                      </a:solidFill>
+                                      <a:latin typeface="Cambria Math" panose="02040503050406030204" pitchFamily="18" charset="0"/>
+                                    </a:rPr>
+                                    <m:t>𝑑</m:t>
+                                  </m:r>
+                                </m:sub>
+                              </m:sSub>
+                            </m:oMath>
+                          </m:oMathPara>
+                        </a14:m>
+                        <a:endParaRPr lang="en-US" sz="2400" dirty="0">
+                          <a:ln>
+                            <a:noFill/>
+                          </a:ln>
+                          <a:solidFill>
+                            <a:srgbClr val="FF0000"/>
+                          </a:solidFill>
+                        </a:endParaRPr>
+                      </a:p>
+                    </p:txBody>
+                  </p:sp>
+                </mc:Choice>
+                <mc:Fallback>
+                  <p:sp>
+                    <p:nvSpPr>
+                      <p:cNvPr id="112" name="TextBox 111">
+                        <a:extLst>
+                          <a:ext uri="{FF2B5EF4-FFF2-40B4-BE49-F238E27FC236}">
+                            <a16:creationId xmlns:a16="http://schemas.microsoft.com/office/drawing/2014/main" id="{13E65EE4-9F64-6B93-C0B8-7932663E4328}"/>
+                          </a:ext>
+                        </a:extLst>
+                      </p:cNvPr>
+                      <p:cNvSpPr txBox="1">
+                        <a:spLocks noRot="1" noChangeAspect="1" noMove="1" noResize="1" noEditPoints="1" noAdjustHandles="1" noChangeArrowheads="1" noChangeShapeType="1" noTextEdit="1"/>
+                      </p:cNvSpPr>
+                      <p:nvPr/>
+                    </p:nvSpPr>
+                    <p:spPr>
+                      <a:xfrm>
+                        <a:off x="8071103" y="1483099"/>
+                        <a:ext cx="580305" cy="461665"/>
+                      </a:xfrm>
+                      <a:prstGeom prst="rect">
+                        <a:avLst/>
+                      </a:prstGeom>
+                      <a:blipFill>
+                        <a:blip r:embed="rId23"/>
+                        <a:stretch>
+                          <a:fillRect b="-1316"/>
+                        </a:stretch>
+                      </a:blipFill>
+                    </p:spPr>
+                    <p:txBody>
+                      <a:bodyPr/>
+                      <a:lstStyle/>
+                      <a:p>
+                        <a:r>
+                          <a:rPr lang="en-US">
+                            <a:noFill/>
+                          </a:rPr>
+                          <a:t> </a:t>
+                        </a:r>
+                      </a:p>
+                    </p:txBody>
+                  </p:sp>
+                </mc:Fallback>
+              </mc:AlternateContent>
+            </p:grpSp>
+          </p:grpSp>
           <p:sp>
             <p:nvSpPr>
-              <p:cNvPr id="170" name="TextBox 169">
+              <p:cNvPr id="123" name="TextBox 122">
                 <a:extLst>
                   <a:ext uri="{FF2B5EF4-FFF2-40B4-BE49-F238E27FC236}">
-                    <a16:creationId xmlns:a16="http://schemas.microsoft.com/office/drawing/2014/main" id="{7EE1CA6D-0BDD-334D-7204-7D9E3E080BCD}"/>
+                    <a16:creationId xmlns:a16="http://schemas.microsoft.com/office/drawing/2014/main" id="{8D03BD76-B2DF-0FCB-D024-C0A0E2EDF0C7}"/>
                   </a:ext>
                 </a:extLst>
               </p:cNvPr>
@@ -8852,8 +8830,8 @@
             </p:nvSpPr>
             <p:spPr>
               <a:xfrm>
-                <a:off x="7313339" y="3269438"/>
-                <a:ext cx="471763" cy="461665"/>
+                <a:off x="6398969" y="5377608"/>
+                <a:ext cx="2072640" cy="369332"/>
               </a:xfrm>
               <a:prstGeom prst="rect">
                 <a:avLst/>
@@ -8866,574 +8844,617 @@
               </a:bodyPr>
               <a:lstStyle/>
               <a:p>
-                <a14:m>
-                  <m:oMathPara xmlns:m="http://schemas.openxmlformats.org/officeDocument/2006/math">
-                    <m:oMathParaPr>
-                      <m:jc m:val="centerGroup"/>
-                    </m:oMathParaPr>
-                    <m:oMath xmlns:m="http://schemas.openxmlformats.org/officeDocument/2006/math">
-                      <m:sSub>
-                        <m:sSubPr>
-                          <m:ctrlPr>
-                            <a:rPr lang="en-US" sz="2400" b="0" i="1" smtClean="0">
-                              <a:ln>
-                                <a:noFill/>
-                              </a:ln>
-                              <a:solidFill>
-                                <a:srgbClr val="FF0000"/>
-                              </a:solidFill>
-                              <a:latin typeface="Cambria Math" panose="02040503050406030204" pitchFamily="18" charset="0"/>
-                            </a:rPr>
-                          </m:ctrlPr>
-                        </m:sSubPr>
-                        <m:e>
-                          <m:r>
-                            <a:rPr lang="en-US" sz="2400" b="0" i="1" smtClean="0">
-                              <a:ln>
-                                <a:noFill/>
-                              </a:ln>
-                              <a:solidFill>
-                                <a:srgbClr val="FF0000"/>
-                              </a:solidFill>
-                              <a:latin typeface="Cambria Math" panose="02040503050406030204" pitchFamily="18" charset="0"/>
-                            </a:rPr>
-                            <m:t>𝑥</m:t>
-                          </m:r>
-                        </m:e>
-                        <m:sub>
-                          <m:r>
-                            <a:rPr lang="en-US" sz="2400" b="0" i="1" smtClean="0">
-                              <a:ln>
-                                <a:noFill/>
-                              </a:ln>
-                              <a:solidFill>
-                                <a:srgbClr val="FF0000"/>
-                              </a:solidFill>
-                              <a:latin typeface="Cambria Math" panose="02040503050406030204" pitchFamily="18" charset="0"/>
-                            </a:rPr>
-                            <m:t>𝑠</m:t>
-                          </m:r>
-                        </m:sub>
-                      </m:sSub>
-                    </m:oMath>
-                  </m:oMathPara>
-                </a14:m>
-                <a:endParaRPr lang="en-US" sz="2400" dirty="0">
-                  <a:ln>
-                    <a:noFill/>
-                  </a:ln>
-                  <a:solidFill>
-                    <a:srgbClr val="FF0000"/>
-                  </a:solidFill>
-                </a:endParaRPr>
-              </a:p>
-            </p:txBody>
-          </p:sp>
-        </mc:Choice>
-        <mc:Fallback>
-          <p:sp>
-            <p:nvSpPr>
-              <p:cNvPr id="170" name="TextBox 169">
-                <a:extLst>
-                  <a:ext uri="{FF2B5EF4-FFF2-40B4-BE49-F238E27FC236}">
-                    <a16:creationId xmlns:a16="http://schemas.microsoft.com/office/drawing/2014/main" id="{7EE1CA6D-0BDD-334D-7204-7D9E3E080BCD}"/>
-                  </a:ext>
-                </a:extLst>
-              </p:cNvPr>
-              <p:cNvSpPr txBox="1">
-                <a:spLocks noRot="1" noChangeAspect="1" noMove="1" noResize="1" noEditPoints="1" noAdjustHandles="1" noChangeArrowheads="1" noChangeShapeType="1" noTextEdit="1"/>
-              </p:cNvSpPr>
-              <p:nvPr/>
-            </p:nvSpPr>
-            <p:spPr>
-              <a:xfrm>
-                <a:off x="7313339" y="3269438"/>
-                <a:ext cx="471763" cy="461665"/>
-              </a:xfrm>
-              <a:prstGeom prst="rect">
-                <a:avLst/>
-              </a:prstGeom>
-              <a:blipFill>
-                <a:blip r:embed="rId24"/>
-                <a:stretch>
-                  <a:fillRect/>
-                </a:stretch>
-              </a:blipFill>
-            </p:spPr>
-            <p:txBody>
-              <a:bodyPr/>
-              <a:lstStyle/>
-              <a:p>
                 <a:r>
-                  <a:rPr lang="en-US">
-                    <a:noFill/>
+                  <a:rPr lang="en-US" dirty="0">
+                    <a:solidFill>
+                      <a:srgbClr val="FFC000"/>
+                    </a:solidFill>
                   </a:rPr>
-                  <a:t> </a:t>
+                  <a:t>X-ray beam</a:t>
                 </a:r>
               </a:p>
             </p:txBody>
           </p:sp>
-        </mc:Fallback>
-      </mc:AlternateContent>
-      <mc:AlternateContent xmlns:mc="http://schemas.openxmlformats.org/markup-compatibility/2006">
-        <mc:Choice xmlns:a14="http://schemas.microsoft.com/office/drawing/2010/main" Requires="a14">
-          <p:sp>
-            <p:nvSpPr>
-              <p:cNvPr id="171" name="TextBox 170">
-                <a:extLst>
-                  <a:ext uri="{FF2B5EF4-FFF2-40B4-BE49-F238E27FC236}">
-                    <a16:creationId xmlns:a16="http://schemas.microsoft.com/office/drawing/2014/main" id="{1A6E1396-D59C-A924-D9BA-C7D0EA1F2E67}"/>
-                  </a:ext>
-                </a:extLst>
-              </p:cNvPr>
-              <p:cNvSpPr txBox="1"/>
-              <p:nvPr/>
-            </p:nvSpPr>
-            <p:spPr>
-              <a:xfrm>
-                <a:off x="8018914" y="2473127"/>
-                <a:ext cx="471763" cy="461665"/>
-              </a:xfrm>
-              <a:prstGeom prst="rect">
-                <a:avLst/>
-              </a:prstGeom>
-              <a:noFill/>
-            </p:spPr>
-            <p:txBody>
-              <a:bodyPr wrap="square" rtlCol="0">
-                <a:spAutoFit/>
-              </a:bodyPr>
-              <a:lstStyle/>
-              <a:p>
-                <a14:m>
-                  <m:oMathPara xmlns:m="http://schemas.openxmlformats.org/officeDocument/2006/math">
-                    <m:oMathParaPr>
-                      <m:jc m:val="centerGroup"/>
-                    </m:oMathParaPr>
-                    <m:oMath xmlns:m="http://schemas.openxmlformats.org/officeDocument/2006/math">
-                      <m:sSub>
-                        <m:sSubPr>
-                          <m:ctrlPr>
-                            <a:rPr lang="en-US" sz="2400" b="0" i="1" smtClean="0">
-                              <a:ln>
-                                <a:noFill/>
-                              </a:ln>
-                              <a:solidFill>
-                                <a:srgbClr val="FF0000"/>
-                              </a:solidFill>
-                              <a:latin typeface="Cambria Math" panose="02040503050406030204" pitchFamily="18" charset="0"/>
-                            </a:rPr>
-                          </m:ctrlPr>
-                        </m:sSubPr>
-                        <m:e>
-                          <m:r>
-                            <a:rPr lang="en-US" sz="2400" i="1" smtClean="0">
-                              <a:ln>
-                                <a:noFill/>
-                              </a:ln>
-                              <a:solidFill>
-                                <a:srgbClr val="FF0000"/>
-                              </a:solidFill>
-                              <a:latin typeface="Cambria Math" panose="02040503050406030204" pitchFamily="18" charset="0"/>
-                            </a:rPr>
-                            <m:t>𝑦</m:t>
-                          </m:r>
-                        </m:e>
-                        <m:sub>
-                          <m:r>
-                            <a:rPr lang="en-US" sz="2400" b="0" i="1" smtClean="0">
-                              <a:ln>
-                                <a:noFill/>
-                              </a:ln>
-                              <a:solidFill>
-                                <a:srgbClr val="FF0000"/>
-                              </a:solidFill>
-                              <a:latin typeface="Cambria Math" panose="02040503050406030204" pitchFamily="18" charset="0"/>
-                            </a:rPr>
-                            <m:t>𝑠</m:t>
-                          </m:r>
-                        </m:sub>
-                      </m:sSub>
-                    </m:oMath>
-                  </m:oMathPara>
-                </a14:m>
-                <a:endParaRPr lang="en-US" sz="2400" dirty="0">
-                  <a:ln>
-                    <a:noFill/>
-                  </a:ln>
-                  <a:solidFill>
-                    <a:srgbClr val="FF0000"/>
-                  </a:solidFill>
-                </a:endParaRPr>
-              </a:p>
-            </p:txBody>
-          </p:sp>
-        </mc:Choice>
-        <mc:Fallback>
-          <p:sp>
-            <p:nvSpPr>
-              <p:cNvPr id="171" name="TextBox 170">
-                <a:extLst>
-                  <a:ext uri="{FF2B5EF4-FFF2-40B4-BE49-F238E27FC236}">
-                    <a16:creationId xmlns:a16="http://schemas.microsoft.com/office/drawing/2014/main" id="{1A6E1396-D59C-A924-D9BA-C7D0EA1F2E67}"/>
-                  </a:ext>
-                </a:extLst>
-              </p:cNvPr>
-              <p:cNvSpPr txBox="1">
-                <a:spLocks noRot="1" noChangeAspect="1" noMove="1" noResize="1" noEditPoints="1" noAdjustHandles="1" noChangeArrowheads="1" noChangeShapeType="1" noTextEdit="1"/>
-              </p:cNvSpPr>
-              <p:nvPr/>
-            </p:nvSpPr>
-            <p:spPr>
-              <a:xfrm>
-                <a:off x="8018914" y="2473127"/>
-                <a:ext cx="471763" cy="461665"/>
-              </a:xfrm>
-              <a:prstGeom prst="rect">
-                <a:avLst/>
-              </a:prstGeom>
-              <a:blipFill>
-                <a:blip r:embed="rId25"/>
-                <a:stretch>
-                  <a:fillRect l="-1282" b="-9333"/>
-                </a:stretch>
-              </a:blipFill>
-            </p:spPr>
-            <p:txBody>
-              <a:bodyPr/>
-              <a:lstStyle/>
-              <a:p>
-                <a:r>
-                  <a:rPr lang="en-US">
-                    <a:noFill/>
-                  </a:rPr>
-                  <a:t> </a:t>
-                </a:r>
-              </a:p>
-            </p:txBody>
-          </p:sp>
-        </mc:Fallback>
-      </mc:AlternateContent>
-      <mc:AlternateContent xmlns:mc="http://schemas.openxmlformats.org/markup-compatibility/2006">
-        <mc:Choice xmlns:a14="http://schemas.microsoft.com/office/drawing/2010/main" Requires="a14">
-          <p:sp>
-            <p:nvSpPr>
-              <p:cNvPr id="172" name="TextBox 171">
-                <a:extLst>
-                  <a:ext uri="{FF2B5EF4-FFF2-40B4-BE49-F238E27FC236}">
-                    <a16:creationId xmlns:a16="http://schemas.microsoft.com/office/drawing/2014/main" id="{E617827D-CACF-6123-22EF-77319CC328CC}"/>
-                  </a:ext>
-                </a:extLst>
-              </p:cNvPr>
-              <p:cNvSpPr txBox="1"/>
-              <p:nvPr/>
-            </p:nvSpPr>
-            <p:spPr>
-              <a:xfrm>
-                <a:off x="8591624" y="2918974"/>
-                <a:ext cx="471763" cy="461665"/>
-              </a:xfrm>
-              <a:prstGeom prst="rect">
-                <a:avLst/>
-              </a:prstGeom>
-              <a:noFill/>
-            </p:spPr>
-            <p:txBody>
-              <a:bodyPr wrap="square" rtlCol="0">
-                <a:spAutoFit/>
-              </a:bodyPr>
-              <a:lstStyle/>
-              <a:p>
-                <a14:m>
-                  <m:oMathPara xmlns:m="http://schemas.openxmlformats.org/officeDocument/2006/math">
-                    <m:oMathParaPr>
-                      <m:jc m:val="centerGroup"/>
-                    </m:oMathParaPr>
-                    <m:oMath xmlns:m="http://schemas.openxmlformats.org/officeDocument/2006/math">
-                      <m:sSub>
-                        <m:sSubPr>
-                          <m:ctrlPr>
-                            <a:rPr lang="en-US" sz="2400" b="0" i="1" smtClean="0">
-                              <a:ln>
-                                <a:noFill/>
-                              </a:ln>
-                              <a:solidFill>
-                                <a:srgbClr val="FF0000"/>
-                              </a:solidFill>
-                              <a:latin typeface="Cambria Math" panose="02040503050406030204" pitchFamily="18" charset="0"/>
-                            </a:rPr>
-                          </m:ctrlPr>
-                        </m:sSubPr>
-                        <m:e>
-                          <m:r>
-                            <a:rPr lang="en-US" sz="2400" b="0" i="1" smtClean="0">
-                              <a:ln>
-                                <a:noFill/>
-                              </a:ln>
-                              <a:solidFill>
-                                <a:srgbClr val="FF0000"/>
-                              </a:solidFill>
-                              <a:latin typeface="Cambria Math" panose="02040503050406030204" pitchFamily="18" charset="0"/>
-                            </a:rPr>
-                            <m:t>𝑧</m:t>
-                          </m:r>
-                        </m:e>
-                        <m:sub>
-                          <m:r>
-                            <a:rPr lang="en-US" sz="2400" b="0" i="1" smtClean="0">
-                              <a:ln>
-                                <a:noFill/>
-                              </a:ln>
-                              <a:solidFill>
-                                <a:srgbClr val="FF0000"/>
-                              </a:solidFill>
-                              <a:latin typeface="Cambria Math" panose="02040503050406030204" pitchFamily="18" charset="0"/>
-                            </a:rPr>
-                            <m:t>𝑠</m:t>
-                          </m:r>
-                        </m:sub>
-                      </m:sSub>
-                    </m:oMath>
-                  </m:oMathPara>
-                </a14:m>
-                <a:endParaRPr lang="en-US" sz="2400" dirty="0">
-                  <a:ln>
-                    <a:noFill/>
-                  </a:ln>
-                  <a:solidFill>
-                    <a:srgbClr val="FF0000"/>
-                  </a:solidFill>
-                </a:endParaRPr>
-              </a:p>
-            </p:txBody>
-          </p:sp>
-        </mc:Choice>
-        <mc:Fallback>
-          <p:sp>
-            <p:nvSpPr>
-              <p:cNvPr id="172" name="TextBox 171">
-                <a:extLst>
-                  <a:ext uri="{FF2B5EF4-FFF2-40B4-BE49-F238E27FC236}">
-                    <a16:creationId xmlns:a16="http://schemas.microsoft.com/office/drawing/2014/main" id="{E617827D-CACF-6123-22EF-77319CC328CC}"/>
-                  </a:ext>
-                </a:extLst>
-              </p:cNvPr>
-              <p:cNvSpPr txBox="1">
-                <a:spLocks noRot="1" noChangeAspect="1" noMove="1" noResize="1" noEditPoints="1" noAdjustHandles="1" noChangeArrowheads="1" noChangeShapeType="1" noTextEdit="1"/>
-              </p:cNvSpPr>
-              <p:nvPr/>
-            </p:nvSpPr>
-            <p:spPr>
-              <a:xfrm>
-                <a:off x="8591624" y="2918974"/>
-                <a:ext cx="471763" cy="461665"/>
-              </a:xfrm>
-              <a:prstGeom prst="rect">
-                <a:avLst/>
-              </a:prstGeom>
-              <a:blipFill>
-                <a:blip r:embed="rId26"/>
-                <a:stretch>
-                  <a:fillRect/>
-                </a:stretch>
-              </a:blipFill>
-            </p:spPr>
-            <p:txBody>
-              <a:bodyPr/>
-              <a:lstStyle/>
-              <a:p>
-                <a:r>
-                  <a:rPr lang="en-US">
-                    <a:noFill/>
-                  </a:rPr>
-                  <a:t> </a:t>
-                </a:r>
-              </a:p>
-            </p:txBody>
-          </p:sp>
-        </mc:Fallback>
-      </mc:AlternateContent>
-      <p:cxnSp>
-        <p:nvCxnSpPr>
-          <p:cNvPr id="176" name="Straight Arrow Connector 175">
-            <a:extLst>
-              <a:ext uri="{FF2B5EF4-FFF2-40B4-BE49-F238E27FC236}">
-                <a16:creationId xmlns:a16="http://schemas.microsoft.com/office/drawing/2014/main" id="{1C2B4816-81A8-2646-0898-B137118A7BDB}"/>
-              </a:ext>
-            </a:extLst>
-          </p:cNvPr>
-          <p:cNvCxnSpPr/>
-          <p:nvPr/>
-        </p:nvCxnSpPr>
-        <p:spPr>
-          <a:xfrm flipV="1">
-            <a:off x="9944282" y="1900981"/>
-            <a:ext cx="0" cy="314844"/>
-          </a:xfrm>
-          <a:prstGeom prst="straightConnector1">
-            <a:avLst/>
-          </a:prstGeom>
-          <a:ln w="38100">
-            <a:solidFill>
+        </p:grpSp>
+        <mc:AlternateContent xmlns:mc="http://schemas.openxmlformats.org/markup-compatibility/2006">
+          <mc:Choice xmlns:a14="http://schemas.microsoft.com/office/drawing/2010/main" Requires="a14">
+            <p:sp>
+              <p:nvSpPr>
+                <p:cNvPr id="170" name="TextBox 169">
+                  <a:extLst>
+                    <a:ext uri="{FF2B5EF4-FFF2-40B4-BE49-F238E27FC236}">
+                      <a16:creationId xmlns:a16="http://schemas.microsoft.com/office/drawing/2014/main" id="{7EE1CA6D-0BDD-334D-7204-7D9E3E080BCD}"/>
+                    </a:ext>
+                  </a:extLst>
+                </p:cNvPr>
+                <p:cNvSpPr txBox="1"/>
+                <p:nvPr/>
+              </p:nvSpPr>
+              <p:spPr>
+                <a:xfrm>
+                  <a:off x="7313339" y="3269438"/>
+                  <a:ext cx="471763" cy="461665"/>
+                </a:xfrm>
+                <a:prstGeom prst="rect">
+                  <a:avLst/>
+                </a:prstGeom>
+                <a:noFill/>
+              </p:spPr>
+              <p:txBody>
+                <a:bodyPr wrap="square" rtlCol="0">
+                  <a:spAutoFit/>
+                </a:bodyPr>
+                <a:lstStyle/>
+                <a:p>
+                  <a14:m>
+                    <m:oMathPara xmlns:m="http://schemas.openxmlformats.org/officeDocument/2006/math">
+                      <m:oMathParaPr>
+                        <m:jc m:val="centerGroup"/>
+                      </m:oMathParaPr>
+                      <m:oMath xmlns:m="http://schemas.openxmlformats.org/officeDocument/2006/math">
+                        <m:sSub>
+                          <m:sSubPr>
+                            <m:ctrlPr>
+                              <a:rPr lang="en-US" sz="2400" b="0" i="1" smtClean="0">
+                                <a:ln>
+                                  <a:noFill/>
+                                </a:ln>
+                                <a:solidFill>
+                                  <a:srgbClr val="FF0000"/>
+                                </a:solidFill>
+                                <a:latin typeface="Cambria Math" panose="02040503050406030204" pitchFamily="18" charset="0"/>
+                              </a:rPr>
+                            </m:ctrlPr>
+                          </m:sSubPr>
+                          <m:e>
+                            <m:r>
+                              <a:rPr lang="en-US" sz="2400" b="0" i="1" smtClean="0">
+                                <a:ln>
+                                  <a:noFill/>
+                                </a:ln>
+                                <a:solidFill>
+                                  <a:srgbClr val="FF0000"/>
+                                </a:solidFill>
+                                <a:latin typeface="Cambria Math" panose="02040503050406030204" pitchFamily="18" charset="0"/>
+                              </a:rPr>
+                              <m:t>𝑥</m:t>
+                            </m:r>
+                          </m:e>
+                          <m:sub>
+                            <m:r>
+                              <a:rPr lang="en-US" sz="2400" b="0" i="1" smtClean="0">
+                                <a:ln>
+                                  <a:noFill/>
+                                </a:ln>
+                                <a:solidFill>
+                                  <a:srgbClr val="FF0000"/>
+                                </a:solidFill>
+                                <a:latin typeface="Cambria Math" panose="02040503050406030204" pitchFamily="18" charset="0"/>
+                              </a:rPr>
+                              <m:t>𝑠</m:t>
+                            </m:r>
+                          </m:sub>
+                        </m:sSub>
+                      </m:oMath>
+                    </m:oMathPara>
+                  </a14:m>
+                  <a:endParaRPr lang="en-US" sz="2400" dirty="0">
+                    <a:ln>
+                      <a:noFill/>
+                    </a:ln>
+                    <a:solidFill>
+                      <a:srgbClr val="FF0000"/>
+                    </a:solidFill>
+                  </a:endParaRPr>
+                </a:p>
+              </p:txBody>
+            </p:sp>
+          </mc:Choice>
+          <mc:Fallback>
+            <p:sp>
+              <p:nvSpPr>
+                <p:cNvPr id="170" name="TextBox 169">
+                  <a:extLst>
+                    <a:ext uri="{FF2B5EF4-FFF2-40B4-BE49-F238E27FC236}">
+                      <a16:creationId xmlns:a16="http://schemas.microsoft.com/office/drawing/2014/main" id="{7EE1CA6D-0BDD-334D-7204-7D9E3E080BCD}"/>
+                    </a:ext>
+                  </a:extLst>
+                </p:cNvPr>
+                <p:cNvSpPr txBox="1">
+                  <a:spLocks noRot="1" noChangeAspect="1" noMove="1" noResize="1" noEditPoints="1" noAdjustHandles="1" noChangeArrowheads="1" noChangeShapeType="1" noTextEdit="1"/>
+                </p:cNvSpPr>
+                <p:nvPr/>
+              </p:nvSpPr>
+              <p:spPr>
+                <a:xfrm>
+                  <a:off x="7313339" y="3269438"/>
+                  <a:ext cx="471763" cy="461665"/>
+                </a:xfrm>
+                <a:prstGeom prst="rect">
+                  <a:avLst/>
+                </a:prstGeom>
+                <a:blipFill>
+                  <a:blip r:embed="rId24"/>
+                  <a:stretch>
+                    <a:fillRect/>
+                  </a:stretch>
+                </a:blipFill>
+              </p:spPr>
+              <p:txBody>
+                <a:bodyPr/>
+                <a:lstStyle/>
+                <a:p>
+                  <a:r>
+                    <a:rPr lang="en-US">
+                      <a:noFill/>
+                    </a:rPr>
+                    <a:t> </a:t>
+                  </a:r>
+                </a:p>
+              </p:txBody>
+            </p:sp>
+          </mc:Fallback>
+        </mc:AlternateContent>
+        <mc:AlternateContent xmlns:mc="http://schemas.openxmlformats.org/markup-compatibility/2006">
+          <mc:Choice xmlns:a14="http://schemas.microsoft.com/office/drawing/2010/main" Requires="a14">
+            <p:sp>
+              <p:nvSpPr>
+                <p:cNvPr id="171" name="TextBox 170">
+                  <a:extLst>
+                    <a:ext uri="{FF2B5EF4-FFF2-40B4-BE49-F238E27FC236}">
+                      <a16:creationId xmlns:a16="http://schemas.microsoft.com/office/drawing/2014/main" id="{1A6E1396-D59C-A924-D9BA-C7D0EA1F2E67}"/>
+                    </a:ext>
+                  </a:extLst>
+                </p:cNvPr>
+                <p:cNvSpPr txBox="1"/>
+                <p:nvPr/>
+              </p:nvSpPr>
+              <p:spPr>
+                <a:xfrm>
+                  <a:off x="8018914" y="2473127"/>
+                  <a:ext cx="471763" cy="461665"/>
+                </a:xfrm>
+                <a:prstGeom prst="rect">
+                  <a:avLst/>
+                </a:prstGeom>
+                <a:noFill/>
+              </p:spPr>
+              <p:txBody>
+                <a:bodyPr wrap="square" rtlCol="0">
+                  <a:spAutoFit/>
+                </a:bodyPr>
+                <a:lstStyle/>
+                <a:p>
+                  <a14:m>
+                    <m:oMathPara xmlns:m="http://schemas.openxmlformats.org/officeDocument/2006/math">
+                      <m:oMathParaPr>
+                        <m:jc m:val="centerGroup"/>
+                      </m:oMathParaPr>
+                      <m:oMath xmlns:m="http://schemas.openxmlformats.org/officeDocument/2006/math">
+                        <m:sSub>
+                          <m:sSubPr>
+                            <m:ctrlPr>
+                              <a:rPr lang="en-US" sz="2400" b="0" i="1" smtClean="0">
+                                <a:ln>
+                                  <a:noFill/>
+                                </a:ln>
+                                <a:solidFill>
+                                  <a:srgbClr val="FF0000"/>
+                                </a:solidFill>
+                                <a:latin typeface="Cambria Math" panose="02040503050406030204" pitchFamily="18" charset="0"/>
+                              </a:rPr>
+                            </m:ctrlPr>
+                          </m:sSubPr>
+                          <m:e>
+                            <m:r>
+                              <a:rPr lang="en-US" sz="2400" i="1" smtClean="0">
+                                <a:ln>
+                                  <a:noFill/>
+                                </a:ln>
+                                <a:solidFill>
+                                  <a:srgbClr val="FF0000"/>
+                                </a:solidFill>
+                                <a:latin typeface="Cambria Math" panose="02040503050406030204" pitchFamily="18" charset="0"/>
+                              </a:rPr>
+                              <m:t>𝑦</m:t>
+                            </m:r>
+                          </m:e>
+                          <m:sub>
+                            <m:r>
+                              <a:rPr lang="en-US" sz="2400" b="0" i="1" smtClean="0">
+                                <a:ln>
+                                  <a:noFill/>
+                                </a:ln>
+                                <a:solidFill>
+                                  <a:srgbClr val="FF0000"/>
+                                </a:solidFill>
+                                <a:latin typeface="Cambria Math" panose="02040503050406030204" pitchFamily="18" charset="0"/>
+                              </a:rPr>
+                              <m:t>𝑠</m:t>
+                            </m:r>
+                          </m:sub>
+                        </m:sSub>
+                      </m:oMath>
+                    </m:oMathPara>
+                  </a14:m>
+                  <a:endParaRPr lang="en-US" sz="2400" dirty="0">
+                    <a:ln>
+                      <a:noFill/>
+                    </a:ln>
+                    <a:solidFill>
+                      <a:srgbClr val="FF0000"/>
+                    </a:solidFill>
+                  </a:endParaRPr>
+                </a:p>
+              </p:txBody>
+            </p:sp>
+          </mc:Choice>
+          <mc:Fallback>
+            <p:sp>
+              <p:nvSpPr>
+                <p:cNvPr id="171" name="TextBox 170">
+                  <a:extLst>
+                    <a:ext uri="{FF2B5EF4-FFF2-40B4-BE49-F238E27FC236}">
+                      <a16:creationId xmlns:a16="http://schemas.microsoft.com/office/drawing/2014/main" id="{1A6E1396-D59C-A924-D9BA-C7D0EA1F2E67}"/>
+                    </a:ext>
+                  </a:extLst>
+                </p:cNvPr>
+                <p:cNvSpPr txBox="1">
+                  <a:spLocks noRot="1" noChangeAspect="1" noMove="1" noResize="1" noEditPoints="1" noAdjustHandles="1" noChangeArrowheads="1" noChangeShapeType="1" noTextEdit="1"/>
+                </p:cNvSpPr>
+                <p:nvPr/>
+              </p:nvSpPr>
+              <p:spPr>
+                <a:xfrm>
+                  <a:off x="8018914" y="2473127"/>
+                  <a:ext cx="471763" cy="461665"/>
+                </a:xfrm>
+                <a:prstGeom prst="rect">
+                  <a:avLst/>
+                </a:prstGeom>
+                <a:blipFill>
+                  <a:blip r:embed="rId25"/>
+                  <a:stretch>
+                    <a:fillRect l="-1282" b="-9333"/>
+                  </a:stretch>
+                </a:blipFill>
+              </p:spPr>
+              <p:txBody>
+                <a:bodyPr/>
+                <a:lstStyle/>
+                <a:p>
+                  <a:r>
+                    <a:rPr lang="en-US">
+                      <a:noFill/>
+                    </a:rPr>
+                    <a:t> </a:t>
+                  </a:r>
+                </a:p>
+              </p:txBody>
+            </p:sp>
+          </mc:Fallback>
+        </mc:AlternateContent>
+        <mc:AlternateContent xmlns:mc="http://schemas.openxmlformats.org/markup-compatibility/2006">
+          <mc:Choice xmlns:a14="http://schemas.microsoft.com/office/drawing/2010/main" Requires="a14">
+            <p:sp>
+              <p:nvSpPr>
+                <p:cNvPr id="172" name="TextBox 171">
+                  <a:extLst>
+                    <a:ext uri="{FF2B5EF4-FFF2-40B4-BE49-F238E27FC236}">
+                      <a16:creationId xmlns:a16="http://schemas.microsoft.com/office/drawing/2014/main" id="{E617827D-CACF-6123-22EF-77319CC328CC}"/>
+                    </a:ext>
+                  </a:extLst>
+                </p:cNvPr>
+                <p:cNvSpPr txBox="1"/>
+                <p:nvPr/>
+              </p:nvSpPr>
+              <p:spPr>
+                <a:xfrm>
+                  <a:off x="8591624" y="2918974"/>
+                  <a:ext cx="471763" cy="461665"/>
+                </a:xfrm>
+                <a:prstGeom prst="rect">
+                  <a:avLst/>
+                </a:prstGeom>
+                <a:noFill/>
+              </p:spPr>
+              <p:txBody>
+                <a:bodyPr wrap="square" rtlCol="0">
+                  <a:spAutoFit/>
+                </a:bodyPr>
+                <a:lstStyle/>
+                <a:p>
+                  <a14:m>
+                    <m:oMathPara xmlns:m="http://schemas.openxmlformats.org/officeDocument/2006/math">
+                      <m:oMathParaPr>
+                        <m:jc m:val="centerGroup"/>
+                      </m:oMathParaPr>
+                      <m:oMath xmlns:m="http://schemas.openxmlformats.org/officeDocument/2006/math">
+                        <m:sSub>
+                          <m:sSubPr>
+                            <m:ctrlPr>
+                              <a:rPr lang="en-US" sz="2400" b="0" i="1" smtClean="0">
+                                <a:ln>
+                                  <a:noFill/>
+                                </a:ln>
+                                <a:solidFill>
+                                  <a:srgbClr val="FF0000"/>
+                                </a:solidFill>
+                                <a:latin typeface="Cambria Math" panose="02040503050406030204" pitchFamily="18" charset="0"/>
+                              </a:rPr>
+                            </m:ctrlPr>
+                          </m:sSubPr>
+                          <m:e>
+                            <m:r>
+                              <a:rPr lang="en-US" sz="2400" b="0" i="1" smtClean="0">
+                                <a:ln>
+                                  <a:noFill/>
+                                </a:ln>
+                                <a:solidFill>
+                                  <a:srgbClr val="FF0000"/>
+                                </a:solidFill>
+                                <a:latin typeface="Cambria Math" panose="02040503050406030204" pitchFamily="18" charset="0"/>
+                              </a:rPr>
+                              <m:t>𝑧</m:t>
+                            </m:r>
+                          </m:e>
+                          <m:sub>
+                            <m:r>
+                              <a:rPr lang="en-US" sz="2400" b="0" i="1" smtClean="0">
+                                <a:ln>
+                                  <a:noFill/>
+                                </a:ln>
+                                <a:solidFill>
+                                  <a:srgbClr val="FF0000"/>
+                                </a:solidFill>
+                                <a:latin typeface="Cambria Math" panose="02040503050406030204" pitchFamily="18" charset="0"/>
+                              </a:rPr>
+                              <m:t>𝑠</m:t>
+                            </m:r>
+                          </m:sub>
+                        </m:sSub>
+                      </m:oMath>
+                    </m:oMathPara>
+                  </a14:m>
+                  <a:endParaRPr lang="en-US" sz="2400" dirty="0">
+                    <a:ln>
+                      <a:noFill/>
+                    </a:ln>
+                    <a:solidFill>
+                      <a:srgbClr val="FF0000"/>
+                    </a:solidFill>
+                  </a:endParaRPr>
+                </a:p>
+              </p:txBody>
+            </p:sp>
+          </mc:Choice>
+          <mc:Fallback>
+            <p:sp>
+              <p:nvSpPr>
+                <p:cNvPr id="172" name="TextBox 171">
+                  <a:extLst>
+                    <a:ext uri="{FF2B5EF4-FFF2-40B4-BE49-F238E27FC236}">
+                      <a16:creationId xmlns:a16="http://schemas.microsoft.com/office/drawing/2014/main" id="{E617827D-CACF-6123-22EF-77319CC328CC}"/>
+                    </a:ext>
+                  </a:extLst>
+                </p:cNvPr>
+                <p:cNvSpPr txBox="1">
+                  <a:spLocks noRot="1" noChangeAspect="1" noMove="1" noResize="1" noEditPoints="1" noAdjustHandles="1" noChangeArrowheads="1" noChangeShapeType="1" noTextEdit="1"/>
+                </p:cNvSpPr>
+                <p:nvPr/>
+              </p:nvSpPr>
+              <p:spPr>
+                <a:xfrm>
+                  <a:off x="8591624" y="2918974"/>
+                  <a:ext cx="471763" cy="461665"/>
+                </a:xfrm>
+                <a:prstGeom prst="rect">
+                  <a:avLst/>
+                </a:prstGeom>
+                <a:blipFill>
+                  <a:blip r:embed="rId26"/>
+                  <a:stretch>
+                    <a:fillRect/>
+                  </a:stretch>
+                </a:blipFill>
+              </p:spPr>
+              <p:txBody>
+                <a:bodyPr/>
+                <a:lstStyle/>
+                <a:p>
+                  <a:r>
+                    <a:rPr lang="en-US">
+                      <a:noFill/>
+                    </a:rPr>
+                    <a:t> </a:t>
+                  </a:r>
+                </a:p>
+              </p:txBody>
+            </p:sp>
+          </mc:Fallback>
+        </mc:AlternateContent>
+        <p:cxnSp>
+          <p:nvCxnSpPr>
+            <p:cNvPr id="176" name="Straight Arrow Connector 175">
+              <a:extLst>
+                <a:ext uri="{FF2B5EF4-FFF2-40B4-BE49-F238E27FC236}">
+                  <a16:creationId xmlns:a16="http://schemas.microsoft.com/office/drawing/2014/main" id="{1C2B4816-81A8-2646-0898-B137118A7BDB}"/>
+                </a:ext>
+              </a:extLst>
+            </p:cNvPr>
+            <p:cNvCxnSpPr/>
+            <p:nvPr/>
+          </p:nvCxnSpPr>
+          <p:spPr>
+            <a:xfrm flipV="1">
+              <a:off x="9944282" y="1900981"/>
+              <a:ext cx="0" cy="314844"/>
+            </a:xfrm>
+            <a:prstGeom prst="straightConnector1">
+              <a:avLst/>
+            </a:prstGeom>
+            <a:ln w="38100">
+              <a:solidFill>
+                <a:schemeClr val="accent1"/>
+              </a:solidFill>
+              <a:tailEnd type="triangle"/>
+            </a:ln>
+          </p:spPr>
+          <p:style>
+            <a:lnRef idx="2">
               <a:schemeClr val="accent1"/>
-            </a:solidFill>
-            <a:tailEnd type="triangle"/>
-          </a:ln>
-        </p:spPr>
-        <p:style>
-          <a:lnRef idx="2">
-            <a:schemeClr val="accent1"/>
-          </a:lnRef>
-          <a:fillRef idx="0">
-            <a:schemeClr val="accent1"/>
-          </a:fillRef>
-          <a:effectRef idx="1">
-            <a:schemeClr val="accent1"/>
-          </a:effectRef>
-          <a:fontRef idx="minor">
-            <a:schemeClr val="tx1"/>
-          </a:fontRef>
-        </p:style>
-      </p:cxnSp>
-      <mc:AlternateContent xmlns:mc="http://schemas.openxmlformats.org/markup-compatibility/2006">
-        <mc:Choice xmlns:a14="http://schemas.microsoft.com/office/drawing/2010/main" Requires="a14">
-          <p:sp>
-            <p:nvSpPr>
-              <p:cNvPr id="177" name="TextBox 176">
-                <a:extLst>
-                  <a:ext uri="{FF2B5EF4-FFF2-40B4-BE49-F238E27FC236}">
-                    <a16:creationId xmlns:a16="http://schemas.microsoft.com/office/drawing/2014/main" id="{76D35460-8744-A60C-2631-2E88CA0AB897}"/>
-                  </a:ext>
-                </a:extLst>
-              </p:cNvPr>
-              <p:cNvSpPr txBox="1"/>
-              <p:nvPr/>
-            </p:nvSpPr>
-            <p:spPr>
-              <a:xfrm>
-                <a:off x="9976231" y="1788023"/>
-                <a:ext cx="603749" cy="557204"/>
-              </a:xfrm>
-              <a:prstGeom prst="rect">
-                <a:avLst/>
-              </a:prstGeom>
-              <a:noFill/>
-            </p:spPr>
-            <p:txBody>
-              <a:bodyPr wrap="square" rtlCol="0">
-                <a:spAutoFit/>
-              </a:bodyPr>
-              <a:lstStyle/>
-              <a:p>
-                <a14:m>
-                  <m:oMathPara xmlns:m="http://schemas.openxmlformats.org/officeDocument/2006/math">
-                    <m:oMathParaPr>
-                      <m:jc m:val="centerGroup"/>
-                    </m:oMathParaPr>
-                    <m:oMath xmlns:m="http://schemas.openxmlformats.org/officeDocument/2006/math">
-                      <m:r>
-                        <m:rPr>
-                          <m:sty m:val="p"/>
-                        </m:rPr>
-                        <a:rPr lang="en-US" sz="2800" b="0" i="0" smtClean="0">
-                          <a:solidFill>
-                            <a:schemeClr val="accent1"/>
-                          </a:solidFill>
-                          <a:latin typeface="Cambria Math" panose="02040503050406030204" pitchFamily="18" charset="0"/>
-                        </a:rPr>
-                        <m:t>Δ</m:t>
-                      </m:r>
-                      <m:sSub>
-                        <m:sSubPr>
-                          <m:ctrlPr>
-                            <a:rPr lang="en-US" sz="2800" b="0" i="1" smtClean="0">
-                              <a:solidFill>
-                                <a:schemeClr val="accent1"/>
-                              </a:solidFill>
-                              <a:latin typeface="Cambria Math" panose="02040503050406030204" pitchFamily="18" charset="0"/>
-                            </a:rPr>
-                          </m:ctrlPr>
-                        </m:sSubPr>
-                        <m:e>
-                          <m:r>
-                            <a:rPr lang="en-US" sz="2800" b="0" i="1" smtClean="0">
-                              <a:solidFill>
-                                <a:schemeClr val="accent1"/>
-                              </a:solidFill>
-                              <a:latin typeface="Cambria Math" panose="02040503050406030204" pitchFamily="18" charset="0"/>
-                            </a:rPr>
-                            <m:t>𝑑</m:t>
-                          </m:r>
-                        </m:e>
-                        <m:sub>
-                          <m:r>
-                            <a:rPr lang="en-US" sz="2800" b="0" i="1" smtClean="0">
-                              <a:solidFill>
-                                <a:schemeClr val="accent1"/>
-                              </a:solidFill>
-                              <a:latin typeface="Cambria Math" panose="02040503050406030204" pitchFamily="18" charset="0"/>
-                            </a:rPr>
-                            <m:t>𝑦</m:t>
-                          </m:r>
-                        </m:sub>
-                      </m:sSub>
-                    </m:oMath>
-                  </m:oMathPara>
-                </a14:m>
-                <a:endParaRPr lang="en-US" sz="2800" dirty="0">
-                  <a:solidFill>
-                    <a:schemeClr val="accent1"/>
-                  </a:solidFill>
-                </a:endParaRPr>
-              </a:p>
-            </p:txBody>
-          </p:sp>
-        </mc:Choice>
-        <mc:Fallback>
-          <p:sp>
-            <p:nvSpPr>
-              <p:cNvPr id="177" name="TextBox 176">
-                <a:extLst>
-                  <a:ext uri="{FF2B5EF4-FFF2-40B4-BE49-F238E27FC236}">
-                    <a16:creationId xmlns:a16="http://schemas.microsoft.com/office/drawing/2014/main" id="{76D35460-8744-A60C-2631-2E88CA0AB897}"/>
-                  </a:ext>
-                </a:extLst>
-              </p:cNvPr>
-              <p:cNvSpPr txBox="1">
-                <a:spLocks noRot="1" noChangeAspect="1" noMove="1" noResize="1" noEditPoints="1" noAdjustHandles="1" noChangeArrowheads="1" noChangeShapeType="1" noTextEdit="1"/>
-              </p:cNvSpPr>
-              <p:nvPr/>
-            </p:nvSpPr>
-            <p:spPr>
-              <a:xfrm>
-                <a:off x="9976231" y="1788023"/>
-                <a:ext cx="603749" cy="557204"/>
-              </a:xfrm>
-              <a:prstGeom prst="rect">
-                <a:avLst/>
-              </a:prstGeom>
-              <a:blipFill>
-                <a:blip r:embed="rId27"/>
-                <a:stretch>
-                  <a:fillRect r="-11111"/>
-                </a:stretch>
-              </a:blipFill>
-            </p:spPr>
-            <p:txBody>
-              <a:bodyPr/>
-              <a:lstStyle/>
-              <a:p>
-                <a:r>
-                  <a:rPr lang="en-US">
-                    <a:noFill/>
-                  </a:rPr>
-                  <a:t> </a:t>
-                </a:r>
-              </a:p>
-            </p:txBody>
-          </p:sp>
-        </mc:Fallback>
-      </mc:AlternateContent>
+            </a:lnRef>
+            <a:fillRef idx="0">
+              <a:schemeClr val="accent1"/>
+            </a:fillRef>
+            <a:effectRef idx="1">
+              <a:schemeClr val="accent1"/>
+            </a:effectRef>
+            <a:fontRef idx="minor">
+              <a:schemeClr val="tx1"/>
+            </a:fontRef>
+          </p:style>
+        </p:cxnSp>
+        <mc:AlternateContent xmlns:mc="http://schemas.openxmlformats.org/markup-compatibility/2006">
+          <mc:Choice xmlns:a14="http://schemas.microsoft.com/office/drawing/2010/main" Requires="a14">
+            <p:sp>
+              <p:nvSpPr>
+                <p:cNvPr id="177" name="TextBox 176">
+                  <a:extLst>
+                    <a:ext uri="{FF2B5EF4-FFF2-40B4-BE49-F238E27FC236}">
+                      <a16:creationId xmlns:a16="http://schemas.microsoft.com/office/drawing/2014/main" id="{76D35460-8744-A60C-2631-2E88CA0AB897}"/>
+                    </a:ext>
+                  </a:extLst>
+                </p:cNvPr>
+                <p:cNvSpPr txBox="1"/>
+                <p:nvPr/>
+              </p:nvSpPr>
+              <p:spPr>
+                <a:xfrm>
+                  <a:off x="9976231" y="1788023"/>
+                  <a:ext cx="603749" cy="557204"/>
+                </a:xfrm>
+                <a:prstGeom prst="rect">
+                  <a:avLst/>
+                </a:prstGeom>
+                <a:noFill/>
+              </p:spPr>
+              <p:txBody>
+                <a:bodyPr wrap="square" rtlCol="0">
+                  <a:spAutoFit/>
+                </a:bodyPr>
+                <a:lstStyle/>
+                <a:p>
+                  <a14:m>
+                    <m:oMathPara xmlns:m="http://schemas.openxmlformats.org/officeDocument/2006/math">
+                      <m:oMathParaPr>
+                        <m:jc m:val="centerGroup"/>
+                      </m:oMathParaPr>
+                      <m:oMath xmlns:m="http://schemas.openxmlformats.org/officeDocument/2006/math">
+                        <m:r>
+                          <m:rPr>
+                            <m:sty m:val="p"/>
+                          </m:rPr>
+                          <a:rPr lang="en-US" sz="2800" b="0" i="0" smtClean="0">
+                            <a:solidFill>
+                              <a:schemeClr val="accent1"/>
+                            </a:solidFill>
+                            <a:latin typeface="Cambria Math" panose="02040503050406030204" pitchFamily="18" charset="0"/>
+                          </a:rPr>
+                          <m:t>Δ</m:t>
+                        </m:r>
+                        <m:sSub>
+                          <m:sSubPr>
+                            <m:ctrlPr>
+                              <a:rPr lang="en-US" sz="2800" b="0" i="1" smtClean="0">
+                                <a:solidFill>
+                                  <a:schemeClr val="accent1"/>
+                                </a:solidFill>
+                                <a:latin typeface="Cambria Math" panose="02040503050406030204" pitchFamily="18" charset="0"/>
+                              </a:rPr>
+                            </m:ctrlPr>
+                          </m:sSubPr>
+                          <m:e>
+                            <m:r>
+                              <a:rPr lang="en-US" sz="2800" b="0" i="1" smtClean="0">
+                                <a:solidFill>
+                                  <a:schemeClr val="accent1"/>
+                                </a:solidFill>
+                                <a:latin typeface="Cambria Math" panose="02040503050406030204" pitchFamily="18" charset="0"/>
+                              </a:rPr>
+                              <m:t>𝑑</m:t>
+                            </m:r>
+                          </m:e>
+                          <m:sub>
+                            <m:r>
+                              <a:rPr lang="en-US" sz="2800" b="0" i="1" smtClean="0">
+                                <a:solidFill>
+                                  <a:schemeClr val="accent1"/>
+                                </a:solidFill>
+                                <a:latin typeface="Cambria Math" panose="02040503050406030204" pitchFamily="18" charset="0"/>
+                              </a:rPr>
+                              <m:t>𝑦</m:t>
+                            </m:r>
+                          </m:sub>
+                        </m:sSub>
+                      </m:oMath>
+                    </m:oMathPara>
+                  </a14:m>
+                  <a:endParaRPr lang="en-US" sz="2800" dirty="0">
+                    <a:solidFill>
+                      <a:schemeClr val="accent1"/>
+                    </a:solidFill>
+                  </a:endParaRPr>
+                </a:p>
+              </p:txBody>
+            </p:sp>
+          </mc:Choice>
+          <mc:Fallback>
+            <p:sp>
+              <p:nvSpPr>
+                <p:cNvPr id="177" name="TextBox 176">
+                  <a:extLst>
+                    <a:ext uri="{FF2B5EF4-FFF2-40B4-BE49-F238E27FC236}">
+                      <a16:creationId xmlns:a16="http://schemas.microsoft.com/office/drawing/2014/main" id="{76D35460-8744-A60C-2631-2E88CA0AB897}"/>
+                    </a:ext>
+                  </a:extLst>
+                </p:cNvPr>
+                <p:cNvSpPr txBox="1">
+                  <a:spLocks noRot="1" noChangeAspect="1" noMove="1" noResize="1" noEditPoints="1" noAdjustHandles="1" noChangeArrowheads="1" noChangeShapeType="1" noTextEdit="1"/>
+                </p:cNvSpPr>
+                <p:nvPr/>
+              </p:nvSpPr>
+              <p:spPr>
+                <a:xfrm>
+                  <a:off x="9976231" y="1788023"/>
+                  <a:ext cx="603749" cy="557204"/>
+                </a:xfrm>
+                <a:prstGeom prst="rect">
+                  <a:avLst/>
+                </a:prstGeom>
+                <a:blipFill>
+                  <a:blip r:embed="rId27"/>
+                  <a:stretch>
+                    <a:fillRect r="-11111"/>
+                  </a:stretch>
+                </a:blipFill>
+              </p:spPr>
+              <p:txBody>
+                <a:bodyPr/>
+                <a:lstStyle/>
+                <a:p>
+                  <a:r>
+                    <a:rPr lang="en-US">
+                      <a:noFill/>
+                    </a:rPr>
+                    <a:t> </a:t>
+                  </a:r>
+                </a:p>
+              </p:txBody>
+            </p:sp>
+          </mc:Fallback>
+        </mc:AlternateContent>
+      </p:grpSp>
     </p:spTree>
     <p:extLst>
       <p:ext uri="{BB962C8B-B14F-4D97-AF65-F5344CB8AC3E}">

--- a/extras/images/coordinate_images.pptx
+++ b/extras/images/coordinate_images.pptx
@@ -104,6 +104,11 @@
       </a:defRPr>
     </a:lvl9pPr>
   </p:defaultTextStyle>
+  <p:extLst>
+    <p:ext uri="{EFAFB233-063F-42B5-8137-9DF3F51BA10A}">
+      <p15:sldGuideLst xmlns:p15="http://schemas.microsoft.com/office/powerpoint/2012/main"/>
+    </p:ext>
+  </p:extLst>
 </p:presentation>
 </file>
 
@@ -254,7 +259,7 @@
           <a:p>
             <a:fld id="{558BFAFD-BD34-4CE5-A649-EF0E21030FB1}" type="datetimeFigureOut">
               <a:rPr lang="en-US" smtClean="0"/>
-              <a:t>7/7/2026</a:t>
+              <a:t>7/13/2026</a:t>
             </a:fld>
             <a:endParaRPr lang="en-US"/>
           </a:p>
@@ -452,7 +457,7 @@
           <a:p>
             <a:fld id="{558BFAFD-BD34-4CE5-A649-EF0E21030FB1}" type="datetimeFigureOut">
               <a:rPr lang="en-US" smtClean="0"/>
-              <a:t>7/7/2026</a:t>
+              <a:t>7/13/2026</a:t>
             </a:fld>
             <a:endParaRPr lang="en-US"/>
           </a:p>
@@ -660,7 +665,7 @@
           <a:p>
             <a:fld id="{558BFAFD-BD34-4CE5-A649-EF0E21030FB1}" type="datetimeFigureOut">
               <a:rPr lang="en-US" smtClean="0"/>
-              <a:t>7/7/2026</a:t>
+              <a:t>7/13/2026</a:t>
             </a:fld>
             <a:endParaRPr lang="en-US"/>
           </a:p>
@@ -858,7 +863,7 @@
           <a:p>
             <a:fld id="{558BFAFD-BD34-4CE5-A649-EF0E21030FB1}" type="datetimeFigureOut">
               <a:rPr lang="en-US" smtClean="0"/>
-              <a:t>7/7/2026</a:t>
+              <a:t>7/13/2026</a:t>
             </a:fld>
             <a:endParaRPr lang="en-US"/>
           </a:p>
@@ -1133,7 +1138,7 @@
           <a:p>
             <a:fld id="{558BFAFD-BD34-4CE5-A649-EF0E21030FB1}" type="datetimeFigureOut">
               <a:rPr lang="en-US" smtClean="0"/>
-              <a:t>7/7/2026</a:t>
+              <a:t>7/13/2026</a:t>
             </a:fld>
             <a:endParaRPr lang="en-US"/>
           </a:p>
@@ -1398,7 +1403,7 @@
           <a:p>
             <a:fld id="{558BFAFD-BD34-4CE5-A649-EF0E21030FB1}" type="datetimeFigureOut">
               <a:rPr lang="en-US" smtClean="0"/>
-              <a:t>7/7/2026</a:t>
+              <a:t>7/13/2026</a:t>
             </a:fld>
             <a:endParaRPr lang="en-US"/>
           </a:p>
@@ -1810,7 +1815,7 @@
           <a:p>
             <a:fld id="{558BFAFD-BD34-4CE5-A649-EF0E21030FB1}" type="datetimeFigureOut">
               <a:rPr lang="en-US" smtClean="0"/>
-              <a:t>7/7/2026</a:t>
+              <a:t>7/13/2026</a:t>
             </a:fld>
             <a:endParaRPr lang="en-US"/>
           </a:p>
@@ -1951,7 +1956,7 @@
           <a:p>
             <a:fld id="{558BFAFD-BD34-4CE5-A649-EF0E21030FB1}" type="datetimeFigureOut">
               <a:rPr lang="en-US" smtClean="0"/>
-              <a:t>7/7/2026</a:t>
+              <a:t>7/13/2026</a:t>
             </a:fld>
             <a:endParaRPr lang="en-US"/>
           </a:p>
@@ -2064,7 +2069,7 @@
           <a:p>
             <a:fld id="{558BFAFD-BD34-4CE5-A649-EF0E21030FB1}" type="datetimeFigureOut">
               <a:rPr lang="en-US" smtClean="0"/>
-              <a:t>7/7/2026</a:t>
+              <a:t>7/13/2026</a:t>
             </a:fld>
             <a:endParaRPr lang="en-US"/>
           </a:p>
@@ -2375,7 +2380,7 @@
           <a:p>
             <a:fld id="{558BFAFD-BD34-4CE5-A649-EF0E21030FB1}" type="datetimeFigureOut">
               <a:rPr lang="en-US" smtClean="0"/>
-              <a:t>7/7/2026</a:t>
+              <a:t>7/13/2026</a:t>
             </a:fld>
             <a:endParaRPr lang="en-US"/>
           </a:p>
@@ -2663,7 +2668,7 @@
           <a:p>
             <a:fld id="{558BFAFD-BD34-4CE5-A649-EF0E21030FB1}" type="datetimeFigureOut">
               <a:rPr lang="en-US" smtClean="0"/>
-              <a:t>7/7/2026</a:t>
+              <a:t>7/13/2026</a:t>
             </a:fld>
             <a:endParaRPr lang="en-US"/>
           </a:p>
@@ -2904,7 +2909,7 @@
           <a:p>
             <a:fld id="{558BFAFD-BD34-4CE5-A649-EF0E21030FB1}" type="datetimeFigureOut">
               <a:rPr lang="en-US" smtClean="0"/>
-              <a:t>7/7/2026</a:t>
+              <a:t>7/13/2026</a:t>
             </a:fld>
             <a:endParaRPr lang="en-US"/>
           </a:p>
@@ -4064,8 +4069,8 @@
                 </a:p>
               </p:txBody>
             </p:sp>
-            <mc:AlternateContent xmlns:mc="http://schemas.openxmlformats.org/markup-compatibility/2006">
-              <mc:Choice xmlns:a14="http://schemas.microsoft.com/office/drawing/2010/main" Requires="a14">
+            <mc:AlternateContent xmlns:mc="http://schemas.openxmlformats.org/markup-compatibility/2006" xmlns:a14="http://schemas.microsoft.com/office/drawing/2010/main">
+              <mc:Choice Requires="a14">
                 <p:sp>
                   <p:nvSpPr>
                     <p:cNvPr id="26" name="TextBox 25">
@@ -4094,6 +4099,7 @@
                     </a:bodyPr>
                     <a:lstStyle/>
                     <a:p>
+                      <a:pPr/>
                       <a14:m>
                         <m:oMathPara xmlns:m="http://schemas.openxmlformats.org/officeDocument/2006/math">
                           <m:oMathParaPr>
@@ -4121,7 +4127,7 @@
                   </p:txBody>
                 </p:sp>
               </mc:Choice>
-              <mc:Fallback>
+              <mc:Fallback xmlns="">
                 <p:sp>
                   <p:nvSpPr>
                     <p:cNvPr id="26" name="TextBox 25">
@@ -4343,8 +4349,8 @@
                 </a:fontRef>
               </p:style>
             </p:cxnSp>
-            <mc:AlternateContent xmlns:mc="http://schemas.openxmlformats.org/markup-compatibility/2006">
-              <mc:Choice xmlns:a14="http://schemas.microsoft.com/office/drawing/2010/main" Requires="a14">
+            <mc:AlternateContent xmlns:mc="http://schemas.openxmlformats.org/markup-compatibility/2006" xmlns:a14="http://schemas.microsoft.com/office/drawing/2010/main">
+              <mc:Choice Requires="a14">
                 <p:sp>
                   <p:nvSpPr>
                     <p:cNvPr id="50" name="TextBox 49">
@@ -4373,6 +4379,7 @@
                     </a:bodyPr>
                     <a:lstStyle/>
                     <a:p>
+                      <a:pPr/>
                       <a14:m>
                         <m:oMathPara xmlns:m="http://schemas.openxmlformats.org/officeDocument/2006/math">
                           <m:oMathParaPr>
@@ -4437,7 +4444,7 @@
                   </p:txBody>
                 </p:sp>
               </mc:Choice>
-              <mc:Fallback>
+              <mc:Fallback xmlns="">
                 <p:sp>
                   <p:nvSpPr>
                     <p:cNvPr id="50" name="TextBox 49">
@@ -4482,8 +4489,8 @@
                 </p:sp>
               </mc:Fallback>
             </mc:AlternateContent>
-            <mc:AlternateContent xmlns:mc="http://schemas.openxmlformats.org/markup-compatibility/2006">
-              <mc:Choice xmlns:a14="http://schemas.microsoft.com/office/drawing/2010/main" Requires="a14">
+            <mc:AlternateContent xmlns:mc="http://schemas.openxmlformats.org/markup-compatibility/2006" xmlns:a14="http://schemas.microsoft.com/office/drawing/2010/main">
+              <mc:Choice Requires="a14">
                 <p:sp>
                   <p:nvSpPr>
                     <p:cNvPr id="51" name="TextBox 50">
@@ -4512,6 +4519,7 @@
                     </a:bodyPr>
                     <a:lstStyle/>
                     <a:p>
+                      <a:pPr/>
                       <a14:m>
                         <m:oMathPara xmlns:m="http://schemas.openxmlformats.org/officeDocument/2006/math">
                           <m:oMathParaPr>
@@ -4576,7 +4584,7 @@
                   </p:txBody>
                 </p:sp>
               </mc:Choice>
-              <mc:Fallback>
+              <mc:Fallback xmlns="">
                 <p:sp>
                   <p:nvSpPr>
                     <p:cNvPr id="51" name="TextBox 50">
@@ -4621,8 +4629,8 @@
                 </p:sp>
               </mc:Fallback>
             </mc:AlternateContent>
-            <mc:AlternateContent xmlns:mc="http://schemas.openxmlformats.org/markup-compatibility/2006">
-              <mc:Choice xmlns:a14="http://schemas.microsoft.com/office/drawing/2010/main" Requires="a14">
+            <mc:AlternateContent xmlns:mc="http://schemas.openxmlformats.org/markup-compatibility/2006" xmlns:a14="http://schemas.microsoft.com/office/drawing/2010/main">
+              <mc:Choice Requires="a14">
                 <p:sp>
                   <p:nvSpPr>
                     <p:cNvPr id="52" name="TextBox 51">
@@ -4651,6 +4659,7 @@
                     </a:bodyPr>
                     <a:lstStyle/>
                     <a:p>
+                      <a:pPr/>
                       <a14:m>
                         <m:oMathPara xmlns:m="http://schemas.openxmlformats.org/officeDocument/2006/math">
                           <m:oMathParaPr>
@@ -4715,7 +4724,7 @@
                   </p:txBody>
                 </p:sp>
               </mc:Choice>
-              <mc:Fallback>
+              <mc:Fallback xmlns="">
                 <p:sp>
                   <p:nvSpPr>
                     <p:cNvPr id="52" name="TextBox 51">
@@ -4893,8 +4902,8 @@
                 </a:fontRef>
               </p:style>
             </p:cxnSp>
-            <mc:AlternateContent xmlns:mc="http://schemas.openxmlformats.org/markup-compatibility/2006">
-              <mc:Choice xmlns:a14="http://schemas.microsoft.com/office/drawing/2010/main" Requires="a14">
+            <mc:AlternateContent xmlns:mc="http://schemas.openxmlformats.org/markup-compatibility/2006" xmlns:a14="http://schemas.microsoft.com/office/drawing/2010/main">
+              <mc:Choice Requires="a14">
                 <p:sp>
                   <p:nvSpPr>
                     <p:cNvPr id="61" name="TextBox 60">
@@ -4923,6 +4932,7 @@
                     </a:bodyPr>
                     <a:lstStyle/>
                     <a:p>
+                      <a:pPr/>
                       <a14:m>
                         <m:oMathPara xmlns:m="http://schemas.openxmlformats.org/officeDocument/2006/math">
                           <m:oMathParaPr>
@@ -5042,7 +5052,7 @@
                   </p:txBody>
                 </p:sp>
               </mc:Choice>
-              <mc:Fallback>
+              <mc:Fallback xmlns="">
                 <p:sp>
                   <p:nvSpPr>
                     <p:cNvPr id="61" name="TextBox 60">
@@ -5087,8 +5097,8 @@
                 </p:sp>
               </mc:Fallback>
             </mc:AlternateContent>
-            <mc:AlternateContent xmlns:mc="http://schemas.openxmlformats.org/markup-compatibility/2006">
-              <mc:Choice xmlns:a14="http://schemas.microsoft.com/office/drawing/2010/main" Requires="a14">
+            <mc:AlternateContent xmlns:mc="http://schemas.openxmlformats.org/markup-compatibility/2006" xmlns:a14="http://schemas.microsoft.com/office/drawing/2010/main">
+              <mc:Choice Requires="a14">
                 <p:sp>
                   <p:nvSpPr>
                     <p:cNvPr id="62" name="TextBox 61">
@@ -5117,6 +5127,7 @@
                     </a:bodyPr>
                     <a:lstStyle/>
                     <a:p>
+                      <a:pPr/>
                       <a14:m>
                         <m:oMathPara xmlns:m="http://schemas.openxmlformats.org/officeDocument/2006/math">
                           <m:oMathParaPr>
@@ -5236,7 +5247,7 @@
                   </p:txBody>
                 </p:sp>
               </mc:Choice>
-              <mc:Fallback>
+              <mc:Fallback xmlns="">
                 <p:sp>
                   <p:nvSpPr>
                     <p:cNvPr id="62" name="TextBox 61">
@@ -5281,8 +5292,8 @@
                 </p:sp>
               </mc:Fallback>
             </mc:AlternateContent>
-            <mc:AlternateContent xmlns:mc="http://schemas.openxmlformats.org/markup-compatibility/2006">
-              <mc:Choice xmlns:a14="http://schemas.microsoft.com/office/drawing/2010/main" Requires="a14">
+            <mc:AlternateContent xmlns:mc="http://schemas.openxmlformats.org/markup-compatibility/2006" xmlns:a14="http://schemas.microsoft.com/office/drawing/2010/main">
+              <mc:Choice Requires="a14">
                 <p:sp>
                   <p:nvSpPr>
                     <p:cNvPr id="65" name="TextBox 64">
@@ -5311,6 +5322,7 @@
                     </a:bodyPr>
                     <a:lstStyle/>
                     <a:p>
+                      <a:pPr/>
                       <a14:m>
                         <m:oMathPara xmlns:m="http://schemas.openxmlformats.org/officeDocument/2006/math">
                           <m:oMathParaPr>
@@ -5430,7 +5442,7 @@
                   </p:txBody>
                 </p:sp>
               </mc:Choice>
-              <mc:Fallback>
+              <mc:Fallback xmlns="">
                 <p:sp>
                   <p:nvSpPr>
                     <p:cNvPr id="65" name="TextBox 64">
@@ -5637,8 +5649,8 @@
                 </a:p>
               </p:txBody>
             </p:sp>
-            <mc:AlternateContent xmlns:mc="http://schemas.openxmlformats.org/markup-compatibility/2006">
-              <mc:Choice xmlns:a14="http://schemas.microsoft.com/office/drawing/2010/main" Requires="a14">
+            <mc:AlternateContent xmlns:mc="http://schemas.openxmlformats.org/markup-compatibility/2006" xmlns:a14="http://schemas.microsoft.com/office/drawing/2010/main">
+              <mc:Choice Requires="a14">
                 <p:sp>
                   <p:nvSpPr>
                     <p:cNvPr id="70" name="TextBox 69">
@@ -5667,6 +5679,7 @@
                     </a:bodyPr>
                     <a:lstStyle/>
                     <a:p>
+                      <a:pPr/>
                       <a14:m>
                         <m:oMathPara xmlns:m="http://schemas.openxmlformats.org/officeDocument/2006/math">
                           <m:oMathParaPr>
@@ -5700,7 +5713,7 @@
                   </p:txBody>
                 </p:sp>
               </mc:Choice>
-              <mc:Fallback>
+              <mc:Fallback xmlns="">
                 <p:sp>
                   <p:nvSpPr>
                     <p:cNvPr id="70" name="TextBox 69">
@@ -5745,8 +5758,8 @@
                 </p:sp>
               </mc:Fallback>
             </mc:AlternateContent>
-            <mc:AlternateContent xmlns:mc="http://schemas.openxmlformats.org/markup-compatibility/2006">
-              <mc:Choice xmlns:a14="http://schemas.microsoft.com/office/drawing/2010/main" Requires="a14">
+            <mc:AlternateContent xmlns:mc="http://schemas.openxmlformats.org/markup-compatibility/2006" xmlns:a14="http://schemas.microsoft.com/office/drawing/2010/main">
+              <mc:Choice Requires="a14">
                 <p:sp>
                   <p:nvSpPr>
                     <p:cNvPr id="71" name="TextBox 70">
@@ -5775,6 +5788,7 @@
                     </a:bodyPr>
                     <a:lstStyle/>
                     <a:p>
+                      <a:pPr/>
                       <a14:m>
                         <m:oMathPara xmlns:m="http://schemas.openxmlformats.org/officeDocument/2006/math">
                           <m:oMathParaPr>
@@ -5808,7 +5822,7 @@
                   </p:txBody>
                 </p:sp>
               </mc:Choice>
-              <mc:Fallback>
+              <mc:Fallback xmlns="">
                 <p:sp>
                   <p:nvSpPr>
                     <p:cNvPr id="71" name="TextBox 70">
@@ -5853,8 +5867,8 @@
                 </p:sp>
               </mc:Fallback>
             </mc:AlternateContent>
-            <mc:AlternateContent xmlns:mc="http://schemas.openxmlformats.org/markup-compatibility/2006">
-              <mc:Choice xmlns:a14="http://schemas.microsoft.com/office/drawing/2010/main" Requires="a14">
+            <mc:AlternateContent xmlns:mc="http://schemas.openxmlformats.org/markup-compatibility/2006" xmlns:a14="http://schemas.microsoft.com/office/drawing/2010/main">
+              <mc:Choice Requires="a14">
                 <p:sp>
                   <p:nvSpPr>
                     <p:cNvPr id="72" name="TextBox 71">
@@ -5883,6 +5897,7 @@
                     </a:bodyPr>
                     <a:lstStyle/>
                     <a:p>
+                      <a:pPr/>
                       <a14:m>
                         <m:oMathPara xmlns:m="http://schemas.openxmlformats.org/officeDocument/2006/math">
                           <m:oMathParaPr>
@@ -5916,7 +5931,7 @@
                   </p:txBody>
                 </p:sp>
               </mc:Choice>
-              <mc:Fallback>
+              <mc:Fallback xmlns="">
                 <p:sp>
                   <p:nvSpPr>
                     <p:cNvPr id="72" name="TextBox 71">
@@ -6047,8 +6062,8 @@
           </a:fontRef>
         </p:style>
       </p:cxnSp>
-      <mc:AlternateContent xmlns:mc="http://schemas.openxmlformats.org/markup-compatibility/2006">
-        <mc:Choice xmlns:a14="http://schemas.microsoft.com/office/drawing/2010/main" Requires="a14">
+      <mc:AlternateContent xmlns:mc="http://schemas.openxmlformats.org/markup-compatibility/2006" xmlns:a14="http://schemas.microsoft.com/office/drawing/2010/main">
+        <mc:Choice Requires="a14">
           <p:sp>
             <p:nvSpPr>
               <p:cNvPr id="169" name="TextBox 168">
@@ -6077,6 +6092,7 @@
               </a:bodyPr>
               <a:lstStyle/>
               <a:p>
+                <a:pPr/>
                 <a14:m>
                   <m:oMathPara xmlns:m="http://schemas.openxmlformats.org/officeDocument/2006/math">
                     <m:oMathParaPr>
@@ -6104,7 +6120,7 @@
             </p:txBody>
           </p:sp>
         </mc:Choice>
-        <mc:Fallback>
+        <mc:Fallback xmlns="">
           <p:sp>
             <p:nvSpPr>
               <p:cNvPr id="169" name="TextBox 168">
@@ -6912,8 +6928,8 @@
                   </a:p>
                 </p:txBody>
               </p:sp>
-              <mc:AlternateContent xmlns:mc="http://schemas.openxmlformats.org/markup-compatibility/2006">
-                <mc:Choice xmlns:a14="http://schemas.microsoft.com/office/drawing/2010/main" Requires="a14">
+              <mc:AlternateContent xmlns:mc="http://schemas.openxmlformats.org/markup-compatibility/2006" xmlns:a14="http://schemas.microsoft.com/office/drawing/2010/main">
+                <mc:Choice Requires="a14">
                   <p:sp>
                     <p:nvSpPr>
                       <p:cNvPr id="84" name="TextBox 83">
@@ -6942,6 +6958,7 @@
                       </a:bodyPr>
                       <a:lstStyle/>
                       <a:p>
+                        <a:pPr/>
                         <a14:m>
                           <m:oMathPara xmlns:m="http://schemas.openxmlformats.org/officeDocument/2006/math">
                             <m:oMathParaPr>
@@ -7006,7 +7023,7 @@
                     </p:txBody>
                   </p:sp>
                 </mc:Choice>
-                <mc:Fallback>
+                <mc:Fallback xmlns="">
                   <p:sp>
                     <p:nvSpPr>
                       <p:cNvPr id="84" name="TextBox 83">
@@ -7361,8 +7378,8 @@
                   </a:fontRef>
                 </p:style>
               </p:cxnSp>
-              <mc:AlternateContent xmlns:mc="http://schemas.openxmlformats.org/markup-compatibility/2006">
-                <mc:Choice xmlns:a14="http://schemas.microsoft.com/office/drawing/2010/main" Requires="a14">
+              <mc:AlternateContent xmlns:mc="http://schemas.openxmlformats.org/markup-compatibility/2006" xmlns:a14="http://schemas.microsoft.com/office/drawing/2010/main">
+                <mc:Choice Requires="a14">
                   <p:sp>
                     <p:nvSpPr>
                       <p:cNvPr id="95" name="TextBox 94">
@@ -7391,6 +7408,7 @@
                       </a:bodyPr>
                       <a:lstStyle/>
                       <a:p>
+                        <a:pPr/>
                         <a14:m>
                           <m:oMathPara xmlns:m="http://schemas.openxmlformats.org/officeDocument/2006/math">
                             <m:oMathParaPr>
@@ -7455,7 +7473,7 @@
                     </p:txBody>
                   </p:sp>
                 </mc:Choice>
-                <mc:Fallback>
+                <mc:Fallback xmlns="">
                   <p:sp>
                     <p:nvSpPr>
                       <p:cNvPr id="95" name="TextBox 94">
@@ -7500,8 +7518,8 @@
                   </p:sp>
                 </mc:Fallback>
               </mc:AlternateContent>
-              <mc:AlternateContent xmlns:mc="http://schemas.openxmlformats.org/markup-compatibility/2006">
-                <mc:Choice xmlns:a14="http://schemas.microsoft.com/office/drawing/2010/main" Requires="a14">
+              <mc:AlternateContent xmlns:mc="http://schemas.openxmlformats.org/markup-compatibility/2006" xmlns:a14="http://schemas.microsoft.com/office/drawing/2010/main">
+                <mc:Choice Requires="a14">
                   <p:sp>
                     <p:nvSpPr>
                       <p:cNvPr id="96" name="TextBox 95">
@@ -7530,6 +7548,7 @@
                       </a:bodyPr>
                       <a:lstStyle/>
                       <a:p>
+                        <a:pPr/>
                         <a14:m>
                           <m:oMathPara xmlns:m="http://schemas.openxmlformats.org/officeDocument/2006/math">
                             <m:oMathParaPr>
@@ -7594,7 +7613,7 @@
                     </p:txBody>
                   </p:sp>
                 </mc:Choice>
-                <mc:Fallback>
+                <mc:Fallback xmlns="">
                   <p:sp>
                     <p:nvSpPr>
                       <p:cNvPr id="96" name="TextBox 95">
@@ -7639,8 +7658,8 @@
                   </p:sp>
                 </mc:Fallback>
               </mc:AlternateContent>
-              <mc:AlternateContent xmlns:mc="http://schemas.openxmlformats.org/markup-compatibility/2006">
-                <mc:Choice xmlns:a14="http://schemas.microsoft.com/office/drawing/2010/main" Requires="a14">
+              <mc:AlternateContent xmlns:mc="http://schemas.openxmlformats.org/markup-compatibility/2006" xmlns:a14="http://schemas.microsoft.com/office/drawing/2010/main">
+                <mc:Choice Requires="a14">
                   <p:sp>
                     <p:nvSpPr>
                       <p:cNvPr id="97" name="TextBox 96">
@@ -7669,6 +7688,7 @@
                       </a:bodyPr>
                       <a:lstStyle/>
                       <a:p>
+                        <a:pPr/>
                         <a14:m>
                           <m:oMathPara xmlns:m="http://schemas.openxmlformats.org/officeDocument/2006/math">
                             <m:oMathParaPr>
@@ -7733,7 +7753,7 @@
                     </p:txBody>
                   </p:sp>
                 </mc:Choice>
-                <mc:Fallback>
+                <mc:Fallback xmlns="">
                   <p:sp>
                     <p:nvSpPr>
                       <p:cNvPr id="97" name="TextBox 96">
@@ -7940,8 +7960,8 @@
                   </a:p>
                 </p:txBody>
               </p:sp>
-              <mc:AlternateContent xmlns:mc="http://schemas.openxmlformats.org/markup-compatibility/2006">
-                <mc:Choice xmlns:a14="http://schemas.microsoft.com/office/drawing/2010/main" Requires="a14">
+              <mc:AlternateContent xmlns:mc="http://schemas.openxmlformats.org/markup-compatibility/2006" xmlns:a14="http://schemas.microsoft.com/office/drawing/2010/main">
+                <mc:Choice Requires="a14">
                   <p:sp>
                     <p:nvSpPr>
                       <p:cNvPr id="101" name="TextBox 100">
@@ -7970,6 +7990,7 @@
                       </a:bodyPr>
                       <a:lstStyle/>
                       <a:p>
+                        <a:pPr/>
                         <a14:m>
                           <m:oMathPara xmlns:m="http://schemas.openxmlformats.org/officeDocument/2006/math">
                             <m:oMathParaPr>
@@ -8003,7 +8024,7 @@
                     </p:txBody>
                   </p:sp>
                 </mc:Choice>
-                <mc:Fallback>
+                <mc:Fallback xmlns="">
                   <p:sp>
                     <p:nvSpPr>
                       <p:cNvPr id="101" name="TextBox 100">
@@ -8048,8 +8069,8 @@
                   </p:sp>
                 </mc:Fallback>
               </mc:AlternateContent>
-              <mc:AlternateContent xmlns:mc="http://schemas.openxmlformats.org/markup-compatibility/2006">
-                <mc:Choice xmlns:a14="http://schemas.microsoft.com/office/drawing/2010/main" Requires="a14">
+              <mc:AlternateContent xmlns:mc="http://schemas.openxmlformats.org/markup-compatibility/2006" xmlns:a14="http://schemas.microsoft.com/office/drawing/2010/main">
+                <mc:Choice Requires="a14">
                   <p:sp>
                     <p:nvSpPr>
                       <p:cNvPr id="102" name="TextBox 101">
@@ -8078,6 +8099,7 @@
                       </a:bodyPr>
                       <a:lstStyle/>
                       <a:p>
+                        <a:pPr/>
                         <a14:m>
                           <m:oMathPara xmlns:m="http://schemas.openxmlformats.org/officeDocument/2006/math">
                             <m:oMathParaPr>
@@ -8111,7 +8133,7 @@
                     </p:txBody>
                   </p:sp>
                 </mc:Choice>
-                <mc:Fallback>
+                <mc:Fallback xmlns="">
                   <p:sp>
                     <p:nvSpPr>
                       <p:cNvPr id="102" name="TextBox 101">
@@ -8156,8 +8178,8 @@
                   </p:sp>
                 </mc:Fallback>
               </mc:AlternateContent>
-              <mc:AlternateContent xmlns:mc="http://schemas.openxmlformats.org/markup-compatibility/2006">
-                <mc:Choice xmlns:a14="http://schemas.microsoft.com/office/drawing/2010/main" Requires="a14">
+              <mc:AlternateContent xmlns:mc="http://schemas.openxmlformats.org/markup-compatibility/2006" xmlns:a14="http://schemas.microsoft.com/office/drawing/2010/main">
+                <mc:Choice Requires="a14">
                   <p:sp>
                     <p:nvSpPr>
                       <p:cNvPr id="103" name="TextBox 102">
@@ -8186,6 +8208,7 @@
                       </a:bodyPr>
                       <a:lstStyle/>
                       <a:p>
+                        <a:pPr/>
                         <a14:m>
                           <m:oMathPara xmlns:m="http://schemas.openxmlformats.org/officeDocument/2006/math">
                             <m:oMathParaPr>
@@ -8219,7 +8242,7 @@
                     </p:txBody>
                   </p:sp>
                 </mc:Choice>
-                <mc:Fallback>
+                <mc:Fallback xmlns="">
                   <p:sp>
                     <p:nvSpPr>
                       <p:cNvPr id="103" name="TextBox 102">
@@ -8397,8 +8420,8 @@
                   </a:fontRef>
                 </p:style>
               </p:cxnSp>
-              <mc:AlternateContent xmlns:mc="http://schemas.openxmlformats.org/markup-compatibility/2006">
-                <mc:Choice xmlns:a14="http://schemas.microsoft.com/office/drawing/2010/main" Requires="a14">
+              <mc:AlternateContent xmlns:mc="http://schemas.openxmlformats.org/markup-compatibility/2006" xmlns:a14="http://schemas.microsoft.com/office/drawing/2010/main">
+                <mc:Choice Requires="a14">
                   <p:sp>
                     <p:nvSpPr>
                       <p:cNvPr id="110" name="TextBox 109">
@@ -8427,6 +8450,7 @@
                       </a:bodyPr>
                       <a:lstStyle/>
                       <a:p>
+                        <a:pPr/>
                         <a14:m>
                           <m:oMathPara xmlns:m="http://schemas.openxmlformats.org/officeDocument/2006/math">
                             <m:oMathParaPr>
@@ -8491,7 +8515,7 @@
                     </p:txBody>
                   </p:sp>
                 </mc:Choice>
-                <mc:Fallback>
+                <mc:Fallback xmlns="">
                   <p:sp>
                     <p:nvSpPr>
                       <p:cNvPr id="110" name="TextBox 109">
@@ -8536,8 +8560,8 @@
                   </p:sp>
                 </mc:Fallback>
               </mc:AlternateContent>
-              <mc:AlternateContent xmlns:mc="http://schemas.openxmlformats.org/markup-compatibility/2006">
-                <mc:Choice xmlns:a14="http://schemas.microsoft.com/office/drawing/2010/main" Requires="a14">
+              <mc:AlternateContent xmlns:mc="http://schemas.openxmlformats.org/markup-compatibility/2006" xmlns:a14="http://schemas.microsoft.com/office/drawing/2010/main">
+                <mc:Choice Requires="a14">
                   <p:sp>
                     <p:nvSpPr>
                       <p:cNvPr id="111" name="TextBox 110">
@@ -8566,6 +8590,7 @@
                       </a:bodyPr>
                       <a:lstStyle/>
                       <a:p>
+                        <a:pPr/>
                         <a14:m>
                           <m:oMathPara xmlns:m="http://schemas.openxmlformats.org/officeDocument/2006/math">
                             <m:oMathParaPr>
@@ -8630,7 +8655,7 @@
                     </p:txBody>
                   </p:sp>
                 </mc:Choice>
-                <mc:Fallback>
+                <mc:Fallback xmlns="">
                   <p:sp>
                     <p:nvSpPr>
                       <p:cNvPr id="111" name="TextBox 110">
@@ -8675,8 +8700,8 @@
                   </p:sp>
                 </mc:Fallback>
               </mc:AlternateContent>
-              <mc:AlternateContent xmlns:mc="http://schemas.openxmlformats.org/markup-compatibility/2006">
-                <mc:Choice xmlns:a14="http://schemas.microsoft.com/office/drawing/2010/main" Requires="a14">
+              <mc:AlternateContent xmlns:mc="http://schemas.openxmlformats.org/markup-compatibility/2006" xmlns:a14="http://schemas.microsoft.com/office/drawing/2010/main">
+                <mc:Choice Requires="a14">
                   <p:sp>
                     <p:nvSpPr>
                       <p:cNvPr id="112" name="TextBox 111">
@@ -8705,6 +8730,7 @@
                       </a:bodyPr>
                       <a:lstStyle/>
                       <a:p>
+                        <a:pPr/>
                         <a14:m>
                           <m:oMathPara xmlns:m="http://schemas.openxmlformats.org/officeDocument/2006/math">
                             <m:oMathParaPr>
@@ -8769,7 +8795,7 @@
                     </p:txBody>
                   </p:sp>
                 </mc:Choice>
-                <mc:Fallback>
+                <mc:Fallback xmlns="">
                   <p:sp>
                     <p:nvSpPr>
                       <p:cNvPr id="112" name="TextBox 111">
@@ -8856,8 +8882,8 @@
             </p:txBody>
           </p:sp>
         </p:grpSp>
-        <mc:AlternateContent xmlns:mc="http://schemas.openxmlformats.org/markup-compatibility/2006">
-          <mc:Choice xmlns:a14="http://schemas.microsoft.com/office/drawing/2010/main" Requires="a14">
+        <mc:AlternateContent xmlns:mc="http://schemas.openxmlformats.org/markup-compatibility/2006" xmlns:a14="http://schemas.microsoft.com/office/drawing/2010/main">
+          <mc:Choice Requires="a14">
             <p:sp>
               <p:nvSpPr>
                 <p:cNvPr id="170" name="TextBox 169">
@@ -8886,6 +8912,7 @@
                 </a:bodyPr>
                 <a:lstStyle/>
                 <a:p>
+                  <a:pPr/>
                   <a14:m>
                     <m:oMathPara xmlns:m="http://schemas.openxmlformats.org/officeDocument/2006/math">
                       <m:oMathParaPr>
@@ -8950,7 +8977,7 @@
               </p:txBody>
             </p:sp>
           </mc:Choice>
-          <mc:Fallback>
+          <mc:Fallback xmlns="">
             <p:sp>
               <p:nvSpPr>
                 <p:cNvPr id="170" name="TextBox 169">
@@ -8995,8 +9022,8 @@
             </p:sp>
           </mc:Fallback>
         </mc:AlternateContent>
-        <mc:AlternateContent xmlns:mc="http://schemas.openxmlformats.org/markup-compatibility/2006">
-          <mc:Choice xmlns:a14="http://schemas.microsoft.com/office/drawing/2010/main" Requires="a14">
+        <mc:AlternateContent xmlns:mc="http://schemas.openxmlformats.org/markup-compatibility/2006" xmlns:a14="http://schemas.microsoft.com/office/drawing/2010/main">
+          <mc:Choice Requires="a14">
             <p:sp>
               <p:nvSpPr>
                 <p:cNvPr id="171" name="TextBox 170">
@@ -9025,6 +9052,7 @@
                 </a:bodyPr>
                 <a:lstStyle/>
                 <a:p>
+                  <a:pPr/>
                   <a14:m>
                     <m:oMathPara xmlns:m="http://schemas.openxmlformats.org/officeDocument/2006/math">
                       <m:oMathParaPr>
@@ -9089,7 +9117,7 @@
               </p:txBody>
             </p:sp>
           </mc:Choice>
-          <mc:Fallback>
+          <mc:Fallback xmlns="">
             <p:sp>
               <p:nvSpPr>
                 <p:cNvPr id="171" name="TextBox 170">
@@ -9134,8 +9162,8 @@
             </p:sp>
           </mc:Fallback>
         </mc:AlternateContent>
-        <mc:AlternateContent xmlns:mc="http://schemas.openxmlformats.org/markup-compatibility/2006">
-          <mc:Choice xmlns:a14="http://schemas.microsoft.com/office/drawing/2010/main" Requires="a14">
+        <mc:AlternateContent xmlns:mc="http://schemas.openxmlformats.org/markup-compatibility/2006" xmlns:a14="http://schemas.microsoft.com/office/drawing/2010/main">
+          <mc:Choice Requires="a14">
             <p:sp>
               <p:nvSpPr>
                 <p:cNvPr id="172" name="TextBox 171">
@@ -9164,6 +9192,7 @@
                 </a:bodyPr>
                 <a:lstStyle/>
                 <a:p>
+                  <a:pPr/>
                   <a14:m>
                     <m:oMathPara xmlns:m="http://schemas.openxmlformats.org/officeDocument/2006/math">
                       <m:oMathParaPr>
@@ -9228,7 +9257,7 @@
               </p:txBody>
             </p:sp>
           </mc:Choice>
-          <mc:Fallback>
+          <mc:Fallback xmlns="">
             <p:sp>
               <p:nvSpPr>
                 <p:cNvPr id="172" name="TextBox 171">
@@ -9315,8 +9344,8 @@
             </a:fontRef>
           </p:style>
         </p:cxnSp>
-        <mc:AlternateContent xmlns:mc="http://schemas.openxmlformats.org/markup-compatibility/2006">
-          <mc:Choice xmlns:a14="http://schemas.microsoft.com/office/drawing/2010/main" Requires="a14">
+        <mc:AlternateContent xmlns:mc="http://schemas.openxmlformats.org/markup-compatibility/2006" xmlns:a14="http://schemas.microsoft.com/office/drawing/2010/main">
+          <mc:Choice Requires="a14">
             <p:sp>
               <p:nvSpPr>
                 <p:cNvPr id="177" name="TextBox 176">
@@ -9345,6 +9374,7 @@
                 </a:bodyPr>
                 <a:lstStyle/>
                 <a:p>
+                  <a:pPr/>
                   <a14:m>
                     <m:oMathPara xmlns:m="http://schemas.openxmlformats.org/officeDocument/2006/math">
                       <m:oMathParaPr>
@@ -9409,7 +9439,7 @@
               </p:txBody>
             </p:sp>
           </mc:Choice>
-          <mc:Fallback>
+          <mc:Fallback xmlns="">
             <p:sp>
               <p:nvSpPr>
                 <p:cNvPr id="177" name="TextBox 176">
